--- a/tests/corpus/pptx/generated/effects.pptx
+++ b/tests/corpus/pptx/generated/effects.pptx
@@ -7,6 +7,8 @@
   <p:sldIdLst>
     <p:sldId id="256" r:id="rId2"/>
     <p:sldId id="257" r:id="rId3"/>
+    <p:sldId id="258" r:id="rId4"/>
+    <p:sldId id="259" r:id="rId5"/>
   </p:sldIdLst>
   <p:sldSz cx="12192000" cy="6858000"/>
   <p:notesSz cx="6858000" cy="9144000"/>
@@ -130,7 +132,7 @@
           <p:cNvPr id="2" name="Titel 1">
             <a:extLst>
               <a:ext uri="{FF2B5EF4-FFF2-40B4-BE49-F238E27FC236}">
-                <a16:creationId xmlns:a16="http://schemas.microsoft.com/office/drawing/2014/main" id="{CE080CB4-AAD6-0317-86F7-46FBADB73F14}"/>
+                <a16:creationId xmlns:a16="http://schemas.microsoft.com/office/drawing/2014/main" id="{0A7199FF-1A45-EB29-A0BC-0EA369265080}"/>
               </a:ext>
             </a:extLst>
           </p:cNvPr>
@@ -167,7 +169,7 @@
           <p:cNvPr id="3" name="Untertitel 2">
             <a:extLst>
               <a:ext uri="{FF2B5EF4-FFF2-40B4-BE49-F238E27FC236}">
-                <a16:creationId xmlns:a16="http://schemas.microsoft.com/office/drawing/2014/main" id="{C7443D61-3317-D154-E090-C3464FF5FC3D}"/>
+                <a16:creationId xmlns:a16="http://schemas.microsoft.com/office/drawing/2014/main" id="{635552F4-D857-C88F-B9B6-839C18DAECCC}"/>
               </a:ext>
             </a:extLst>
           </p:cNvPr>
@@ -237,7 +239,7 @@
           <p:cNvPr id="4" name="Datumsplatzhalter 3">
             <a:extLst>
               <a:ext uri="{FF2B5EF4-FFF2-40B4-BE49-F238E27FC236}">
-                <a16:creationId xmlns:a16="http://schemas.microsoft.com/office/drawing/2014/main" id="{A9649D8F-401E-2638-7340-A4DDF1F0DE3F}"/>
+                <a16:creationId xmlns:a16="http://schemas.microsoft.com/office/drawing/2014/main" id="{95999C38-F840-427D-78D0-4D9FA453A46E}"/>
               </a:ext>
             </a:extLst>
           </p:cNvPr>
@@ -253,7 +255,7 @@
           <a:bodyPr/>
           <a:lstStyle/>
           <a:p>
-            <a:fld id="{6D4811C1-AEF3-4DDB-8A6F-AFFB6AB542CA}" type="datetimeFigureOut">
+            <a:fld id="{5A1AF197-8666-45A1-A9DD-65DA68AEA0EB}" type="datetimeFigureOut">
               <a:rPr lang="de-DE" smtClean="0"/>
               <a:t>08.10.2026</a:t>
             </a:fld>
@@ -266,7 +268,7 @@
           <p:cNvPr id="5" name="Fußzeilenplatzhalter 4">
             <a:extLst>
               <a:ext uri="{FF2B5EF4-FFF2-40B4-BE49-F238E27FC236}">
-                <a16:creationId xmlns:a16="http://schemas.microsoft.com/office/drawing/2014/main" id="{296DCE64-2846-0D08-052C-5B90A4751DA5}"/>
+                <a16:creationId xmlns:a16="http://schemas.microsoft.com/office/drawing/2014/main" id="{09DA14AC-79FD-C1B9-6E65-4EF3646A7740}"/>
               </a:ext>
             </a:extLst>
           </p:cNvPr>
@@ -291,7 +293,7 @@
           <p:cNvPr id="6" name="Foliennummernplatzhalter 5">
             <a:extLst>
               <a:ext uri="{FF2B5EF4-FFF2-40B4-BE49-F238E27FC236}">
-                <a16:creationId xmlns:a16="http://schemas.microsoft.com/office/drawing/2014/main" id="{13F64646-27F7-2B86-1524-B75CCAC88092}"/>
+                <a16:creationId xmlns:a16="http://schemas.microsoft.com/office/drawing/2014/main" id="{4D73CA68-EBAD-AC26-0814-CC06634918CC}"/>
               </a:ext>
             </a:extLst>
           </p:cNvPr>
@@ -307,7 +309,7 @@
           <a:bodyPr/>
           <a:lstStyle/>
           <a:p>
-            <a:fld id="{F45884CD-9BF8-425B-9EAD-9E0FE3DAEAB7}" type="slidenum">
+            <a:fld id="{FD7A2B11-542E-4CA3-8CAD-ADBF93301D0C}" type="slidenum">
               <a:rPr lang="de-DE" smtClean="0"/>
               <a:t>‹Nr.›</a:t>
             </a:fld>
@@ -318,7 +320,7 @@
     </p:spTree>
     <p:extLst>
       <p:ext uri="{BB962C8B-B14F-4D97-AF65-F5344CB8AC3E}">
-        <p14:creationId xmlns:p14="http://schemas.microsoft.com/office/powerpoint/2010/main" val="2645735984"/>
+        <p14:creationId xmlns:p14="http://schemas.microsoft.com/office/powerpoint/2010/main" val="1518090723"/>
       </p:ext>
     </p:extLst>
   </p:cSld>
@@ -350,7 +352,7 @@
           <p:cNvPr id="2" name="Titel 1">
             <a:extLst>
               <a:ext uri="{FF2B5EF4-FFF2-40B4-BE49-F238E27FC236}">
-                <a16:creationId xmlns:a16="http://schemas.microsoft.com/office/drawing/2014/main" id="{E76D8CF9-A832-9D05-0C70-AB7099DE483A}"/>
+                <a16:creationId xmlns:a16="http://schemas.microsoft.com/office/drawing/2014/main" id="{C2D471B9-DACF-73F3-4910-A236AC245575}"/>
               </a:ext>
             </a:extLst>
           </p:cNvPr>
@@ -378,7 +380,7 @@
           <p:cNvPr id="3" name="Vertikaler Textplatzhalter 2">
             <a:extLst>
               <a:ext uri="{FF2B5EF4-FFF2-40B4-BE49-F238E27FC236}">
-                <a16:creationId xmlns:a16="http://schemas.microsoft.com/office/drawing/2014/main" id="{D07B7777-8947-2054-698D-5A1BECF45261}"/>
+                <a16:creationId xmlns:a16="http://schemas.microsoft.com/office/drawing/2014/main" id="{951D566B-99B9-9C48-292E-2E1A7FD6694F}"/>
               </a:ext>
             </a:extLst>
           </p:cNvPr>
@@ -435,7 +437,7 @@
           <p:cNvPr id="4" name="Datumsplatzhalter 3">
             <a:extLst>
               <a:ext uri="{FF2B5EF4-FFF2-40B4-BE49-F238E27FC236}">
-                <a16:creationId xmlns:a16="http://schemas.microsoft.com/office/drawing/2014/main" id="{B7A7123E-0C86-AEC4-F7D5-856B028C1C9B}"/>
+                <a16:creationId xmlns:a16="http://schemas.microsoft.com/office/drawing/2014/main" id="{5E2A96C1-E8E7-57C9-9F4B-7B979C3FFDD4}"/>
               </a:ext>
             </a:extLst>
           </p:cNvPr>
@@ -451,7 +453,7 @@
           <a:bodyPr/>
           <a:lstStyle/>
           <a:p>
-            <a:fld id="{6D4811C1-AEF3-4DDB-8A6F-AFFB6AB542CA}" type="datetimeFigureOut">
+            <a:fld id="{5A1AF197-8666-45A1-A9DD-65DA68AEA0EB}" type="datetimeFigureOut">
               <a:rPr lang="de-DE" smtClean="0"/>
               <a:t>08.10.2026</a:t>
             </a:fld>
@@ -464,7 +466,7 @@
           <p:cNvPr id="5" name="Fußzeilenplatzhalter 4">
             <a:extLst>
               <a:ext uri="{FF2B5EF4-FFF2-40B4-BE49-F238E27FC236}">
-                <a16:creationId xmlns:a16="http://schemas.microsoft.com/office/drawing/2014/main" id="{8E81005A-F2D4-7DAE-F799-9FBE8E983760}"/>
+                <a16:creationId xmlns:a16="http://schemas.microsoft.com/office/drawing/2014/main" id="{26E1B800-A5C4-1EF5-CF70-A1C1DF6ADAFD}"/>
               </a:ext>
             </a:extLst>
           </p:cNvPr>
@@ -489,7 +491,7 @@
           <p:cNvPr id="6" name="Foliennummernplatzhalter 5">
             <a:extLst>
               <a:ext uri="{FF2B5EF4-FFF2-40B4-BE49-F238E27FC236}">
-                <a16:creationId xmlns:a16="http://schemas.microsoft.com/office/drawing/2014/main" id="{34F1124B-C9E9-AFA3-1BC0-351E5E576600}"/>
+                <a16:creationId xmlns:a16="http://schemas.microsoft.com/office/drawing/2014/main" id="{4C33FB90-B6C9-FCFE-BB89-6D2C34CCCC09}"/>
               </a:ext>
             </a:extLst>
           </p:cNvPr>
@@ -505,7 +507,7 @@
           <a:bodyPr/>
           <a:lstStyle/>
           <a:p>
-            <a:fld id="{F45884CD-9BF8-425B-9EAD-9E0FE3DAEAB7}" type="slidenum">
+            <a:fld id="{FD7A2B11-542E-4CA3-8CAD-ADBF93301D0C}" type="slidenum">
               <a:rPr lang="de-DE" smtClean="0"/>
               <a:t>‹Nr.›</a:t>
             </a:fld>
@@ -516,7 +518,7 @@
     </p:spTree>
     <p:extLst>
       <p:ext uri="{BB962C8B-B14F-4D97-AF65-F5344CB8AC3E}">
-        <p14:creationId xmlns:p14="http://schemas.microsoft.com/office/powerpoint/2010/main" val="381265737"/>
+        <p14:creationId xmlns:p14="http://schemas.microsoft.com/office/powerpoint/2010/main" val="3911492640"/>
       </p:ext>
     </p:extLst>
   </p:cSld>
@@ -548,7 +550,7 @@
           <p:cNvPr id="2" name="Vertikaler Titel 1">
             <a:extLst>
               <a:ext uri="{FF2B5EF4-FFF2-40B4-BE49-F238E27FC236}">
-                <a16:creationId xmlns:a16="http://schemas.microsoft.com/office/drawing/2014/main" id="{3277CA28-5B36-8E9F-7607-0DFC92BECF6F}"/>
+                <a16:creationId xmlns:a16="http://schemas.microsoft.com/office/drawing/2014/main" id="{FA0F1A3C-1479-6884-1416-B0A0961B3680}"/>
               </a:ext>
             </a:extLst>
           </p:cNvPr>
@@ -581,7 +583,7 @@
           <p:cNvPr id="3" name="Vertikaler Textplatzhalter 2">
             <a:extLst>
               <a:ext uri="{FF2B5EF4-FFF2-40B4-BE49-F238E27FC236}">
-                <a16:creationId xmlns:a16="http://schemas.microsoft.com/office/drawing/2014/main" id="{A1717527-E1F9-BF8D-98F6-5D9B5CE463C9}"/>
+                <a16:creationId xmlns:a16="http://schemas.microsoft.com/office/drawing/2014/main" id="{B77E2EDB-B08E-4A97-ABCA-81778AB8F83B}"/>
               </a:ext>
             </a:extLst>
           </p:cNvPr>
@@ -643,7 +645,7 @@
           <p:cNvPr id="4" name="Datumsplatzhalter 3">
             <a:extLst>
               <a:ext uri="{FF2B5EF4-FFF2-40B4-BE49-F238E27FC236}">
-                <a16:creationId xmlns:a16="http://schemas.microsoft.com/office/drawing/2014/main" id="{27A82997-3840-FBD2-3D67-B8834CEBEA52}"/>
+                <a16:creationId xmlns:a16="http://schemas.microsoft.com/office/drawing/2014/main" id="{F7278748-A8E4-B974-554A-4B8390B89CD0}"/>
               </a:ext>
             </a:extLst>
           </p:cNvPr>
@@ -659,7 +661,7 @@
           <a:bodyPr/>
           <a:lstStyle/>
           <a:p>
-            <a:fld id="{6D4811C1-AEF3-4DDB-8A6F-AFFB6AB542CA}" type="datetimeFigureOut">
+            <a:fld id="{5A1AF197-8666-45A1-A9DD-65DA68AEA0EB}" type="datetimeFigureOut">
               <a:rPr lang="de-DE" smtClean="0"/>
               <a:t>08.10.2026</a:t>
             </a:fld>
@@ -672,7 +674,7 @@
           <p:cNvPr id="5" name="Fußzeilenplatzhalter 4">
             <a:extLst>
               <a:ext uri="{FF2B5EF4-FFF2-40B4-BE49-F238E27FC236}">
-                <a16:creationId xmlns:a16="http://schemas.microsoft.com/office/drawing/2014/main" id="{08D55F48-3EB1-2CC0-0A4C-0B19079BC3C9}"/>
+                <a16:creationId xmlns:a16="http://schemas.microsoft.com/office/drawing/2014/main" id="{C496F664-2D0B-E9FF-0148-7EB4FFCD3E23}"/>
               </a:ext>
             </a:extLst>
           </p:cNvPr>
@@ -697,7 +699,7 @@
           <p:cNvPr id="6" name="Foliennummernplatzhalter 5">
             <a:extLst>
               <a:ext uri="{FF2B5EF4-FFF2-40B4-BE49-F238E27FC236}">
-                <a16:creationId xmlns:a16="http://schemas.microsoft.com/office/drawing/2014/main" id="{7121ADDB-1201-9708-CCF3-3F288CA05C2E}"/>
+                <a16:creationId xmlns:a16="http://schemas.microsoft.com/office/drawing/2014/main" id="{7B71E32C-4056-C975-9368-BD507506F8B9}"/>
               </a:ext>
             </a:extLst>
           </p:cNvPr>
@@ -713,7 +715,7 @@
           <a:bodyPr/>
           <a:lstStyle/>
           <a:p>
-            <a:fld id="{F45884CD-9BF8-425B-9EAD-9E0FE3DAEAB7}" type="slidenum">
+            <a:fld id="{FD7A2B11-542E-4CA3-8CAD-ADBF93301D0C}" type="slidenum">
               <a:rPr lang="de-DE" smtClean="0"/>
               <a:t>‹Nr.›</a:t>
             </a:fld>
@@ -724,7 +726,7 @@
     </p:spTree>
     <p:extLst>
       <p:ext uri="{BB962C8B-B14F-4D97-AF65-F5344CB8AC3E}">
-        <p14:creationId xmlns:p14="http://schemas.microsoft.com/office/powerpoint/2010/main" val="2576090773"/>
+        <p14:creationId xmlns:p14="http://schemas.microsoft.com/office/powerpoint/2010/main" val="1763581593"/>
       </p:ext>
     </p:extLst>
   </p:cSld>
@@ -756,7 +758,7 @@
           <p:cNvPr id="2" name="Titel 1">
             <a:extLst>
               <a:ext uri="{FF2B5EF4-FFF2-40B4-BE49-F238E27FC236}">
-                <a16:creationId xmlns:a16="http://schemas.microsoft.com/office/drawing/2014/main" id="{DBBC8467-CA26-9EFC-0E24-C05C456665D9}"/>
+                <a16:creationId xmlns:a16="http://schemas.microsoft.com/office/drawing/2014/main" id="{06755BAF-71E2-3262-D3F5-0467D0BE2F7A}"/>
               </a:ext>
             </a:extLst>
           </p:cNvPr>
@@ -784,7 +786,7 @@
           <p:cNvPr id="3" name="Inhaltsplatzhalter 2">
             <a:extLst>
               <a:ext uri="{FF2B5EF4-FFF2-40B4-BE49-F238E27FC236}">
-                <a16:creationId xmlns:a16="http://schemas.microsoft.com/office/drawing/2014/main" id="{76F11E0E-F658-2E5B-A8D6-6CA9DF3C6234}"/>
+                <a16:creationId xmlns:a16="http://schemas.microsoft.com/office/drawing/2014/main" id="{81E498FD-4E31-362D-976A-A05120E89C00}"/>
               </a:ext>
             </a:extLst>
           </p:cNvPr>
@@ -841,7 +843,7 @@
           <p:cNvPr id="4" name="Datumsplatzhalter 3">
             <a:extLst>
               <a:ext uri="{FF2B5EF4-FFF2-40B4-BE49-F238E27FC236}">
-                <a16:creationId xmlns:a16="http://schemas.microsoft.com/office/drawing/2014/main" id="{332E4051-45DD-5916-F9A0-32084320E887}"/>
+                <a16:creationId xmlns:a16="http://schemas.microsoft.com/office/drawing/2014/main" id="{540030CB-C414-0BE1-AB5E-6CD1644FB07C}"/>
               </a:ext>
             </a:extLst>
           </p:cNvPr>
@@ -857,7 +859,7 @@
           <a:bodyPr/>
           <a:lstStyle/>
           <a:p>
-            <a:fld id="{6D4811C1-AEF3-4DDB-8A6F-AFFB6AB542CA}" type="datetimeFigureOut">
+            <a:fld id="{5A1AF197-8666-45A1-A9DD-65DA68AEA0EB}" type="datetimeFigureOut">
               <a:rPr lang="de-DE" smtClean="0"/>
               <a:t>08.10.2026</a:t>
             </a:fld>
@@ -870,7 +872,7 @@
           <p:cNvPr id="5" name="Fußzeilenplatzhalter 4">
             <a:extLst>
               <a:ext uri="{FF2B5EF4-FFF2-40B4-BE49-F238E27FC236}">
-                <a16:creationId xmlns:a16="http://schemas.microsoft.com/office/drawing/2014/main" id="{F3A5EF10-D490-ADBF-9FCE-2857CE784208}"/>
+                <a16:creationId xmlns:a16="http://schemas.microsoft.com/office/drawing/2014/main" id="{87ECD622-2577-1E52-E593-5B841F6738BA}"/>
               </a:ext>
             </a:extLst>
           </p:cNvPr>
@@ -895,7 +897,7 @@
           <p:cNvPr id="6" name="Foliennummernplatzhalter 5">
             <a:extLst>
               <a:ext uri="{FF2B5EF4-FFF2-40B4-BE49-F238E27FC236}">
-                <a16:creationId xmlns:a16="http://schemas.microsoft.com/office/drawing/2014/main" id="{147EABEB-0B5E-9B97-988B-3BFCCEF730AE}"/>
+                <a16:creationId xmlns:a16="http://schemas.microsoft.com/office/drawing/2014/main" id="{C1359DD1-8217-6340-BF8E-233DA944D135}"/>
               </a:ext>
             </a:extLst>
           </p:cNvPr>
@@ -911,7 +913,7 @@
           <a:bodyPr/>
           <a:lstStyle/>
           <a:p>
-            <a:fld id="{F45884CD-9BF8-425B-9EAD-9E0FE3DAEAB7}" type="slidenum">
+            <a:fld id="{FD7A2B11-542E-4CA3-8CAD-ADBF93301D0C}" type="slidenum">
               <a:rPr lang="de-DE" smtClean="0"/>
               <a:t>‹Nr.›</a:t>
             </a:fld>
@@ -922,7 +924,7 @@
     </p:spTree>
     <p:extLst>
       <p:ext uri="{BB962C8B-B14F-4D97-AF65-F5344CB8AC3E}">
-        <p14:creationId xmlns:p14="http://schemas.microsoft.com/office/powerpoint/2010/main" val="84058338"/>
+        <p14:creationId xmlns:p14="http://schemas.microsoft.com/office/powerpoint/2010/main" val="3394778371"/>
       </p:ext>
     </p:extLst>
   </p:cSld>
@@ -954,7 +956,7 @@
           <p:cNvPr id="2" name="Titel 1">
             <a:extLst>
               <a:ext uri="{FF2B5EF4-FFF2-40B4-BE49-F238E27FC236}">
-                <a16:creationId xmlns:a16="http://schemas.microsoft.com/office/drawing/2014/main" id="{BA383E75-CC60-9F3A-F909-C6D043311215}"/>
+                <a16:creationId xmlns:a16="http://schemas.microsoft.com/office/drawing/2014/main" id="{ABDA4AC9-E63C-56F2-D876-74DEBFE22E9D}"/>
               </a:ext>
             </a:extLst>
           </p:cNvPr>
@@ -991,7 +993,7 @@
           <p:cNvPr id="3" name="Textplatzhalter 2">
             <a:extLst>
               <a:ext uri="{FF2B5EF4-FFF2-40B4-BE49-F238E27FC236}">
-                <a16:creationId xmlns:a16="http://schemas.microsoft.com/office/drawing/2014/main" id="{00C38426-646F-CAA3-BDD3-598DD79CCAFC}"/>
+                <a16:creationId xmlns:a16="http://schemas.microsoft.com/office/drawing/2014/main" id="{858FDD71-7A18-4A08-BF66-A57A18828071}"/>
               </a:ext>
             </a:extLst>
           </p:cNvPr>
@@ -1116,7 +1118,7 @@
           <p:cNvPr id="4" name="Datumsplatzhalter 3">
             <a:extLst>
               <a:ext uri="{FF2B5EF4-FFF2-40B4-BE49-F238E27FC236}">
-                <a16:creationId xmlns:a16="http://schemas.microsoft.com/office/drawing/2014/main" id="{388DA232-DAA1-2AB9-F228-8AB62FCA5CB1}"/>
+                <a16:creationId xmlns:a16="http://schemas.microsoft.com/office/drawing/2014/main" id="{F864D8D5-2F68-5533-6D66-95CF2353EF8B}"/>
               </a:ext>
             </a:extLst>
           </p:cNvPr>
@@ -1132,7 +1134,7 @@
           <a:bodyPr/>
           <a:lstStyle/>
           <a:p>
-            <a:fld id="{6D4811C1-AEF3-4DDB-8A6F-AFFB6AB542CA}" type="datetimeFigureOut">
+            <a:fld id="{5A1AF197-8666-45A1-A9DD-65DA68AEA0EB}" type="datetimeFigureOut">
               <a:rPr lang="de-DE" smtClean="0"/>
               <a:t>08.10.2026</a:t>
             </a:fld>
@@ -1145,7 +1147,7 @@
           <p:cNvPr id="5" name="Fußzeilenplatzhalter 4">
             <a:extLst>
               <a:ext uri="{FF2B5EF4-FFF2-40B4-BE49-F238E27FC236}">
-                <a16:creationId xmlns:a16="http://schemas.microsoft.com/office/drawing/2014/main" id="{FADB247F-3911-5463-F5C3-7D7407F183DD}"/>
+                <a16:creationId xmlns:a16="http://schemas.microsoft.com/office/drawing/2014/main" id="{B9B2F4A6-462A-1DB1-630E-1F29B9AA383F}"/>
               </a:ext>
             </a:extLst>
           </p:cNvPr>
@@ -1170,7 +1172,7 @@
           <p:cNvPr id="6" name="Foliennummernplatzhalter 5">
             <a:extLst>
               <a:ext uri="{FF2B5EF4-FFF2-40B4-BE49-F238E27FC236}">
-                <a16:creationId xmlns:a16="http://schemas.microsoft.com/office/drawing/2014/main" id="{FBA740AB-AF97-26E7-CB72-7875E01C0C41}"/>
+                <a16:creationId xmlns:a16="http://schemas.microsoft.com/office/drawing/2014/main" id="{A9A10DA5-F096-DD7C-25B9-177F49297628}"/>
               </a:ext>
             </a:extLst>
           </p:cNvPr>
@@ -1186,7 +1188,7 @@
           <a:bodyPr/>
           <a:lstStyle/>
           <a:p>
-            <a:fld id="{F45884CD-9BF8-425B-9EAD-9E0FE3DAEAB7}" type="slidenum">
+            <a:fld id="{FD7A2B11-542E-4CA3-8CAD-ADBF93301D0C}" type="slidenum">
               <a:rPr lang="de-DE" smtClean="0"/>
               <a:t>‹Nr.›</a:t>
             </a:fld>
@@ -1197,7 +1199,7 @@
     </p:spTree>
     <p:extLst>
       <p:ext uri="{BB962C8B-B14F-4D97-AF65-F5344CB8AC3E}">
-        <p14:creationId xmlns:p14="http://schemas.microsoft.com/office/powerpoint/2010/main" val="1377568954"/>
+        <p14:creationId xmlns:p14="http://schemas.microsoft.com/office/powerpoint/2010/main" val="3996943530"/>
       </p:ext>
     </p:extLst>
   </p:cSld>
@@ -1229,7 +1231,7 @@
           <p:cNvPr id="2" name="Titel 1">
             <a:extLst>
               <a:ext uri="{FF2B5EF4-FFF2-40B4-BE49-F238E27FC236}">
-                <a16:creationId xmlns:a16="http://schemas.microsoft.com/office/drawing/2014/main" id="{41C7CDD6-6F9A-DFC0-CE83-6BDBC9070898}"/>
+                <a16:creationId xmlns:a16="http://schemas.microsoft.com/office/drawing/2014/main" id="{4AF5849A-E7D1-25E1-B2DF-DACE3ECE6940}"/>
               </a:ext>
             </a:extLst>
           </p:cNvPr>
@@ -1257,7 +1259,7 @@
           <p:cNvPr id="3" name="Inhaltsplatzhalter 2">
             <a:extLst>
               <a:ext uri="{FF2B5EF4-FFF2-40B4-BE49-F238E27FC236}">
-                <a16:creationId xmlns:a16="http://schemas.microsoft.com/office/drawing/2014/main" id="{A02381AA-2085-1AF4-DD3F-9B41DFB92306}"/>
+                <a16:creationId xmlns:a16="http://schemas.microsoft.com/office/drawing/2014/main" id="{6DA4F8A0-5E08-1132-0557-604020CFC715}"/>
               </a:ext>
             </a:extLst>
           </p:cNvPr>
@@ -1319,7 +1321,7 @@
           <p:cNvPr id="4" name="Inhaltsplatzhalter 3">
             <a:extLst>
               <a:ext uri="{FF2B5EF4-FFF2-40B4-BE49-F238E27FC236}">
-                <a16:creationId xmlns:a16="http://schemas.microsoft.com/office/drawing/2014/main" id="{8FA06B8E-82D6-7088-4387-8C94E8622D86}"/>
+                <a16:creationId xmlns:a16="http://schemas.microsoft.com/office/drawing/2014/main" id="{6AE4F29D-760F-BC00-E5FC-FD7BB3B668FB}"/>
               </a:ext>
             </a:extLst>
           </p:cNvPr>
@@ -1381,7 +1383,7 @@
           <p:cNvPr id="5" name="Datumsplatzhalter 4">
             <a:extLst>
               <a:ext uri="{FF2B5EF4-FFF2-40B4-BE49-F238E27FC236}">
-                <a16:creationId xmlns:a16="http://schemas.microsoft.com/office/drawing/2014/main" id="{0710599E-A384-9DF6-A811-82914284C735}"/>
+                <a16:creationId xmlns:a16="http://schemas.microsoft.com/office/drawing/2014/main" id="{8F2264E7-C836-71A1-3851-92A6276F5B10}"/>
               </a:ext>
             </a:extLst>
           </p:cNvPr>
@@ -1397,7 +1399,7 @@
           <a:bodyPr/>
           <a:lstStyle/>
           <a:p>
-            <a:fld id="{6D4811C1-AEF3-4DDB-8A6F-AFFB6AB542CA}" type="datetimeFigureOut">
+            <a:fld id="{5A1AF197-8666-45A1-A9DD-65DA68AEA0EB}" type="datetimeFigureOut">
               <a:rPr lang="de-DE" smtClean="0"/>
               <a:t>08.10.2026</a:t>
             </a:fld>
@@ -1410,7 +1412,7 @@
           <p:cNvPr id="6" name="Fußzeilenplatzhalter 5">
             <a:extLst>
               <a:ext uri="{FF2B5EF4-FFF2-40B4-BE49-F238E27FC236}">
-                <a16:creationId xmlns:a16="http://schemas.microsoft.com/office/drawing/2014/main" id="{7624C93F-957A-E900-7604-37F449C7923B}"/>
+                <a16:creationId xmlns:a16="http://schemas.microsoft.com/office/drawing/2014/main" id="{1B9ABD61-A37B-69EA-4DD7-C1249CA31325}"/>
               </a:ext>
             </a:extLst>
           </p:cNvPr>
@@ -1435,7 +1437,7 @@
           <p:cNvPr id="7" name="Foliennummernplatzhalter 6">
             <a:extLst>
               <a:ext uri="{FF2B5EF4-FFF2-40B4-BE49-F238E27FC236}">
-                <a16:creationId xmlns:a16="http://schemas.microsoft.com/office/drawing/2014/main" id="{BDBDEF24-92EA-D1A6-E0FD-62DF3E9FAE1C}"/>
+                <a16:creationId xmlns:a16="http://schemas.microsoft.com/office/drawing/2014/main" id="{8AD97F0F-AFD6-0420-8A75-4EB3C475324E}"/>
               </a:ext>
             </a:extLst>
           </p:cNvPr>
@@ -1451,7 +1453,7 @@
           <a:bodyPr/>
           <a:lstStyle/>
           <a:p>
-            <a:fld id="{F45884CD-9BF8-425B-9EAD-9E0FE3DAEAB7}" type="slidenum">
+            <a:fld id="{FD7A2B11-542E-4CA3-8CAD-ADBF93301D0C}" type="slidenum">
               <a:rPr lang="de-DE" smtClean="0"/>
               <a:t>‹Nr.›</a:t>
             </a:fld>
@@ -1462,7 +1464,7 @@
     </p:spTree>
     <p:extLst>
       <p:ext uri="{BB962C8B-B14F-4D97-AF65-F5344CB8AC3E}">
-        <p14:creationId xmlns:p14="http://schemas.microsoft.com/office/powerpoint/2010/main" val="99208770"/>
+        <p14:creationId xmlns:p14="http://schemas.microsoft.com/office/powerpoint/2010/main" val="3733309982"/>
       </p:ext>
     </p:extLst>
   </p:cSld>
@@ -1494,7 +1496,7 @@
           <p:cNvPr id="2" name="Titel 1">
             <a:extLst>
               <a:ext uri="{FF2B5EF4-FFF2-40B4-BE49-F238E27FC236}">
-                <a16:creationId xmlns:a16="http://schemas.microsoft.com/office/drawing/2014/main" id="{9FA63F1D-1D73-AE31-EA14-A1FD4F779527}"/>
+                <a16:creationId xmlns:a16="http://schemas.microsoft.com/office/drawing/2014/main" id="{DF7FCAD1-A880-F6F0-6428-688651BBE5F3}"/>
               </a:ext>
             </a:extLst>
           </p:cNvPr>
@@ -1527,7 +1529,7 @@
           <p:cNvPr id="3" name="Textplatzhalter 2">
             <a:extLst>
               <a:ext uri="{FF2B5EF4-FFF2-40B4-BE49-F238E27FC236}">
-                <a16:creationId xmlns:a16="http://schemas.microsoft.com/office/drawing/2014/main" id="{5BD7591E-96BF-91DC-578C-1C9D5686E39C}"/>
+                <a16:creationId xmlns:a16="http://schemas.microsoft.com/office/drawing/2014/main" id="{81BF47F1-9E9E-3934-36D0-F2C83BBB1160}"/>
               </a:ext>
             </a:extLst>
           </p:cNvPr>
@@ -1598,7 +1600,7 @@
           <p:cNvPr id="4" name="Inhaltsplatzhalter 3">
             <a:extLst>
               <a:ext uri="{FF2B5EF4-FFF2-40B4-BE49-F238E27FC236}">
-                <a16:creationId xmlns:a16="http://schemas.microsoft.com/office/drawing/2014/main" id="{FAE74539-86FE-5A33-F76C-BDA90BAB16FF}"/>
+                <a16:creationId xmlns:a16="http://schemas.microsoft.com/office/drawing/2014/main" id="{36CDC8D7-BDC2-487D-7DA5-BE538BA407B5}"/>
               </a:ext>
             </a:extLst>
           </p:cNvPr>
@@ -1660,7 +1662,7 @@
           <p:cNvPr id="5" name="Textplatzhalter 4">
             <a:extLst>
               <a:ext uri="{FF2B5EF4-FFF2-40B4-BE49-F238E27FC236}">
-                <a16:creationId xmlns:a16="http://schemas.microsoft.com/office/drawing/2014/main" id="{8104B1F8-EBBB-AB1B-AA9A-59765A2C1650}"/>
+                <a16:creationId xmlns:a16="http://schemas.microsoft.com/office/drawing/2014/main" id="{3B1D7BB4-11CE-C01C-1F2F-6AE1C77698CC}"/>
               </a:ext>
             </a:extLst>
           </p:cNvPr>
@@ -1731,7 +1733,7 @@
           <p:cNvPr id="6" name="Inhaltsplatzhalter 5">
             <a:extLst>
               <a:ext uri="{FF2B5EF4-FFF2-40B4-BE49-F238E27FC236}">
-                <a16:creationId xmlns:a16="http://schemas.microsoft.com/office/drawing/2014/main" id="{28455FA2-FB4B-5504-8A92-CD429A326759}"/>
+                <a16:creationId xmlns:a16="http://schemas.microsoft.com/office/drawing/2014/main" id="{92FBE1FB-5DAF-62D7-FDAC-316D99A220BB}"/>
               </a:ext>
             </a:extLst>
           </p:cNvPr>
@@ -1793,7 +1795,7 @@
           <p:cNvPr id="7" name="Datumsplatzhalter 6">
             <a:extLst>
               <a:ext uri="{FF2B5EF4-FFF2-40B4-BE49-F238E27FC236}">
-                <a16:creationId xmlns:a16="http://schemas.microsoft.com/office/drawing/2014/main" id="{472E7301-7A62-A29A-7565-686160A92F8B}"/>
+                <a16:creationId xmlns:a16="http://schemas.microsoft.com/office/drawing/2014/main" id="{5288D339-5A3F-CC80-289C-9F23D109CB35}"/>
               </a:ext>
             </a:extLst>
           </p:cNvPr>
@@ -1809,7 +1811,7 @@
           <a:bodyPr/>
           <a:lstStyle/>
           <a:p>
-            <a:fld id="{6D4811C1-AEF3-4DDB-8A6F-AFFB6AB542CA}" type="datetimeFigureOut">
+            <a:fld id="{5A1AF197-8666-45A1-A9DD-65DA68AEA0EB}" type="datetimeFigureOut">
               <a:rPr lang="de-DE" smtClean="0"/>
               <a:t>08.10.2026</a:t>
             </a:fld>
@@ -1822,7 +1824,7 @@
           <p:cNvPr id="8" name="Fußzeilenplatzhalter 7">
             <a:extLst>
               <a:ext uri="{FF2B5EF4-FFF2-40B4-BE49-F238E27FC236}">
-                <a16:creationId xmlns:a16="http://schemas.microsoft.com/office/drawing/2014/main" id="{2E81D09C-C8C8-4FAA-459B-A3210CFA31F9}"/>
+                <a16:creationId xmlns:a16="http://schemas.microsoft.com/office/drawing/2014/main" id="{31E237DA-2745-EBCD-C3A2-861475A7D85D}"/>
               </a:ext>
             </a:extLst>
           </p:cNvPr>
@@ -1847,7 +1849,7 @@
           <p:cNvPr id="9" name="Foliennummernplatzhalter 8">
             <a:extLst>
               <a:ext uri="{FF2B5EF4-FFF2-40B4-BE49-F238E27FC236}">
-                <a16:creationId xmlns:a16="http://schemas.microsoft.com/office/drawing/2014/main" id="{48C0FFF8-6E0A-4434-E68D-4F6665D16D8C}"/>
+                <a16:creationId xmlns:a16="http://schemas.microsoft.com/office/drawing/2014/main" id="{7694FA05-D20A-7FB0-A4F2-6EF76ADFAAF1}"/>
               </a:ext>
             </a:extLst>
           </p:cNvPr>
@@ -1863,7 +1865,7 @@
           <a:bodyPr/>
           <a:lstStyle/>
           <a:p>
-            <a:fld id="{F45884CD-9BF8-425B-9EAD-9E0FE3DAEAB7}" type="slidenum">
+            <a:fld id="{FD7A2B11-542E-4CA3-8CAD-ADBF93301D0C}" type="slidenum">
               <a:rPr lang="de-DE" smtClean="0"/>
               <a:t>‹Nr.›</a:t>
             </a:fld>
@@ -1874,7 +1876,7 @@
     </p:spTree>
     <p:extLst>
       <p:ext uri="{BB962C8B-B14F-4D97-AF65-F5344CB8AC3E}">
-        <p14:creationId xmlns:p14="http://schemas.microsoft.com/office/powerpoint/2010/main" val="1521895317"/>
+        <p14:creationId xmlns:p14="http://schemas.microsoft.com/office/powerpoint/2010/main" val="3608037728"/>
       </p:ext>
     </p:extLst>
   </p:cSld>
@@ -1906,7 +1908,7 @@
           <p:cNvPr id="2" name="Titel 1">
             <a:extLst>
               <a:ext uri="{FF2B5EF4-FFF2-40B4-BE49-F238E27FC236}">
-                <a16:creationId xmlns:a16="http://schemas.microsoft.com/office/drawing/2014/main" id="{3936492F-43F3-1D3C-3F7F-444A48B98708}"/>
+                <a16:creationId xmlns:a16="http://schemas.microsoft.com/office/drawing/2014/main" id="{E45E1E03-7F49-7D4A-A8E8-FA673F3EEF06}"/>
               </a:ext>
             </a:extLst>
           </p:cNvPr>
@@ -1934,7 +1936,7 @@
           <p:cNvPr id="3" name="Datumsplatzhalter 2">
             <a:extLst>
               <a:ext uri="{FF2B5EF4-FFF2-40B4-BE49-F238E27FC236}">
-                <a16:creationId xmlns:a16="http://schemas.microsoft.com/office/drawing/2014/main" id="{9C39732E-C13E-00C9-3590-B0202018D434}"/>
+                <a16:creationId xmlns:a16="http://schemas.microsoft.com/office/drawing/2014/main" id="{571A424E-AA81-AEAE-B6C9-73C427F08E40}"/>
               </a:ext>
             </a:extLst>
           </p:cNvPr>
@@ -1950,7 +1952,7 @@
           <a:bodyPr/>
           <a:lstStyle/>
           <a:p>
-            <a:fld id="{6D4811C1-AEF3-4DDB-8A6F-AFFB6AB542CA}" type="datetimeFigureOut">
+            <a:fld id="{5A1AF197-8666-45A1-A9DD-65DA68AEA0EB}" type="datetimeFigureOut">
               <a:rPr lang="de-DE" smtClean="0"/>
               <a:t>08.10.2026</a:t>
             </a:fld>
@@ -1963,7 +1965,7 @@
           <p:cNvPr id="4" name="Fußzeilenplatzhalter 3">
             <a:extLst>
               <a:ext uri="{FF2B5EF4-FFF2-40B4-BE49-F238E27FC236}">
-                <a16:creationId xmlns:a16="http://schemas.microsoft.com/office/drawing/2014/main" id="{FAC534CF-1454-64D4-DFBC-BE0170240E77}"/>
+                <a16:creationId xmlns:a16="http://schemas.microsoft.com/office/drawing/2014/main" id="{F23F30FF-A2F4-9657-DFE4-ADCE0196E561}"/>
               </a:ext>
             </a:extLst>
           </p:cNvPr>
@@ -1988,7 +1990,7 @@
           <p:cNvPr id="5" name="Foliennummernplatzhalter 4">
             <a:extLst>
               <a:ext uri="{FF2B5EF4-FFF2-40B4-BE49-F238E27FC236}">
-                <a16:creationId xmlns:a16="http://schemas.microsoft.com/office/drawing/2014/main" id="{CB21E90E-BF9F-36AA-7EE6-9A300E54BE07}"/>
+                <a16:creationId xmlns:a16="http://schemas.microsoft.com/office/drawing/2014/main" id="{0127FB7C-B101-D599-1C23-B658F1A3A7E4}"/>
               </a:ext>
             </a:extLst>
           </p:cNvPr>
@@ -2004,7 +2006,7 @@
           <a:bodyPr/>
           <a:lstStyle/>
           <a:p>
-            <a:fld id="{F45884CD-9BF8-425B-9EAD-9E0FE3DAEAB7}" type="slidenum">
+            <a:fld id="{FD7A2B11-542E-4CA3-8CAD-ADBF93301D0C}" type="slidenum">
               <a:rPr lang="de-DE" smtClean="0"/>
               <a:t>‹Nr.›</a:t>
             </a:fld>
@@ -2015,7 +2017,7 @@
     </p:spTree>
     <p:extLst>
       <p:ext uri="{BB962C8B-B14F-4D97-AF65-F5344CB8AC3E}">
-        <p14:creationId xmlns:p14="http://schemas.microsoft.com/office/powerpoint/2010/main" val="2240725117"/>
+        <p14:creationId xmlns:p14="http://schemas.microsoft.com/office/powerpoint/2010/main" val="2573641852"/>
       </p:ext>
     </p:extLst>
   </p:cSld>
@@ -2047,7 +2049,7 @@
           <p:cNvPr id="2" name="Datumsplatzhalter 1">
             <a:extLst>
               <a:ext uri="{FF2B5EF4-FFF2-40B4-BE49-F238E27FC236}">
-                <a16:creationId xmlns:a16="http://schemas.microsoft.com/office/drawing/2014/main" id="{AE088A3B-2222-82D8-E0BE-8C6F036ECD86}"/>
+                <a16:creationId xmlns:a16="http://schemas.microsoft.com/office/drawing/2014/main" id="{7282B58B-A0AE-A9DE-0E81-2333FF204C55}"/>
               </a:ext>
             </a:extLst>
           </p:cNvPr>
@@ -2063,7 +2065,7 @@
           <a:bodyPr/>
           <a:lstStyle/>
           <a:p>
-            <a:fld id="{6D4811C1-AEF3-4DDB-8A6F-AFFB6AB542CA}" type="datetimeFigureOut">
+            <a:fld id="{5A1AF197-8666-45A1-A9DD-65DA68AEA0EB}" type="datetimeFigureOut">
               <a:rPr lang="de-DE" smtClean="0"/>
               <a:t>08.10.2026</a:t>
             </a:fld>
@@ -2076,7 +2078,7 @@
           <p:cNvPr id="3" name="Fußzeilenplatzhalter 2">
             <a:extLst>
               <a:ext uri="{FF2B5EF4-FFF2-40B4-BE49-F238E27FC236}">
-                <a16:creationId xmlns:a16="http://schemas.microsoft.com/office/drawing/2014/main" id="{43E98CD1-55C6-6F71-405B-6B67D1E72D23}"/>
+                <a16:creationId xmlns:a16="http://schemas.microsoft.com/office/drawing/2014/main" id="{3CFF02AA-C73E-9097-EFF8-128E14C9300B}"/>
               </a:ext>
             </a:extLst>
           </p:cNvPr>
@@ -2101,7 +2103,7 @@
           <p:cNvPr id="4" name="Foliennummernplatzhalter 3">
             <a:extLst>
               <a:ext uri="{FF2B5EF4-FFF2-40B4-BE49-F238E27FC236}">
-                <a16:creationId xmlns:a16="http://schemas.microsoft.com/office/drawing/2014/main" id="{9D5F17D8-24E2-949F-2515-109B27E96822}"/>
+                <a16:creationId xmlns:a16="http://schemas.microsoft.com/office/drawing/2014/main" id="{3250BD19-16C8-D21E-2374-0B75DB47AAD8}"/>
               </a:ext>
             </a:extLst>
           </p:cNvPr>
@@ -2117,7 +2119,7 @@
           <a:bodyPr/>
           <a:lstStyle/>
           <a:p>
-            <a:fld id="{F45884CD-9BF8-425B-9EAD-9E0FE3DAEAB7}" type="slidenum">
+            <a:fld id="{FD7A2B11-542E-4CA3-8CAD-ADBF93301D0C}" type="slidenum">
               <a:rPr lang="de-DE" smtClean="0"/>
               <a:t>‹Nr.›</a:t>
             </a:fld>
@@ -2128,7 +2130,7 @@
     </p:spTree>
     <p:extLst>
       <p:ext uri="{BB962C8B-B14F-4D97-AF65-F5344CB8AC3E}">
-        <p14:creationId xmlns:p14="http://schemas.microsoft.com/office/powerpoint/2010/main" val="1442249529"/>
+        <p14:creationId xmlns:p14="http://schemas.microsoft.com/office/powerpoint/2010/main" val="2840669831"/>
       </p:ext>
     </p:extLst>
   </p:cSld>
@@ -2160,7 +2162,7 @@
           <p:cNvPr id="2" name="Titel 1">
             <a:extLst>
               <a:ext uri="{FF2B5EF4-FFF2-40B4-BE49-F238E27FC236}">
-                <a16:creationId xmlns:a16="http://schemas.microsoft.com/office/drawing/2014/main" id="{9B7395CE-5484-2302-7DE5-A5D1816F3708}"/>
+                <a16:creationId xmlns:a16="http://schemas.microsoft.com/office/drawing/2014/main" id="{EA490759-DD95-7AD8-D8F4-71529678A784}"/>
               </a:ext>
             </a:extLst>
           </p:cNvPr>
@@ -2197,7 +2199,7 @@
           <p:cNvPr id="3" name="Inhaltsplatzhalter 2">
             <a:extLst>
               <a:ext uri="{FF2B5EF4-FFF2-40B4-BE49-F238E27FC236}">
-                <a16:creationId xmlns:a16="http://schemas.microsoft.com/office/drawing/2014/main" id="{6593991B-8336-F67F-D1AA-BE160919B3E4}"/>
+                <a16:creationId xmlns:a16="http://schemas.microsoft.com/office/drawing/2014/main" id="{A5B00C52-AE47-5A09-A9A4-4439FE1F109E}"/>
               </a:ext>
             </a:extLst>
           </p:cNvPr>
@@ -2287,7 +2289,7 @@
           <p:cNvPr id="4" name="Textplatzhalter 3">
             <a:extLst>
               <a:ext uri="{FF2B5EF4-FFF2-40B4-BE49-F238E27FC236}">
-                <a16:creationId xmlns:a16="http://schemas.microsoft.com/office/drawing/2014/main" id="{F916B70B-EDCE-9B20-A68D-52DFCA638506}"/>
+                <a16:creationId xmlns:a16="http://schemas.microsoft.com/office/drawing/2014/main" id="{B8ADC2AA-2294-B49A-9D4A-0DE780C16DB5}"/>
               </a:ext>
             </a:extLst>
           </p:cNvPr>
@@ -2358,7 +2360,7 @@
           <p:cNvPr id="5" name="Datumsplatzhalter 4">
             <a:extLst>
               <a:ext uri="{FF2B5EF4-FFF2-40B4-BE49-F238E27FC236}">
-                <a16:creationId xmlns:a16="http://schemas.microsoft.com/office/drawing/2014/main" id="{BD44F1DE-1B06-33F1-F282-73FB2E24D9E8}"/>
+                <a16:creationId xmlns:a16="http://schemas.microsoft.com/office/drawing/2014/main" id="{F492C5EB-1021-EACA-EBF7-950CC7D0F7CB}"/>
               </a:ext>
             </a:extLst>
           </p:cNvPr>
@@ -2374,7 +2376,7 @@
           <a:bodyPr/>
           <a:lstStyle/>
           <a:p>
-            <a:fld id="{6D4811C1-AEF3-4DDB-8A6F-AFFB6AB542CA}" type="datetimeFigureOut">
+            <a:fld id="{5A1AF197-8666-45A1-A9DD-65DA68AEA0EB}" type="datetimeFigureOut">
               <a:rPr lang="de-DE" smtClean="0"/>
               <a:t>08.10.2026</a:t>
             </a:fld>
@@ -2387,7 +2389,7 @@
           <p:cNvPr id="6" name="Fußzeilenplatzhalter 5">
             <a:extLst>
               <a:ext uri="{FF2B5EF4-FFF2-40B4-BE49-F238E27FC236}">
-                <a16:creationId xmlns:a16="http://schemas.microsoft.com/office/drawing/2014/main" id="{4DF346E9-29E9-C3F0-9F2A-25FF4A20D11F}"/>
+                <a16:creationId xmlns:a16="http://schemas.microsoft.com/office/drawing/2014/main" id="{2C88EAEA-3AE6-98B5-FA33-8BCFDB17DE97}"/>
               </a:ext>
             </a:extLst>
           </p:cNvPr>
@@ -2412,7 +2414,7 @@
           <p:cNvPr id="7" name="Foliennummernplatzhalter 6">
             <a:extLst>
               <a:ext uri="{FF2B5EF4-FFF2-40B4-BE49-F238E27FC236}">
-                <a16:creationId xmlns:a16="http://schemas.microsoft.com/office/drawing/2014/main" id="{0C843E76-2038-2A0C-7E81-43798B5E3C93}"/>
+                <a16:creationId xmlns:a16="http://schemas.microsoft.com/office/drawing/2014/main" id="{AC08A9FA-3460-A241-89A5-14DEF284408E}"/>
               </a:ext>
             </a:extLst>
           </p:cNvPr>
@@ -2428,7 +2430,7 @@
           <a:bodyPr/>
           <a:lstStyle/>
           <a:p>
-            <a:fld id="{F45884CD-9BF8-425B-9EAD-9E0FE3DAEAB7}" type="slidenum">
+            <a:fld id="{FD7A2B11-542E-4CA3-8CAD-ADBF93301D0C}" type="slidenum">
               <a:rPr lang="de-DE" smtClean="0"/>
               <a:t>‹Nr.›</a:t>
             </a:fld>
@@ -2439,7 +2441,7 @@
     </p:spTree>
     <p:extLst>
       <p:ext uri="{BB962C8B-B14F-4D97-AF65-F5344CB8AC3E}">
-        <p14:creationId xmlns:p14="http://schemas.microsoft.com/office/powerpoint/2010/main" val="2687356039"/>
+        <p14:creationId xmlns:p14="http://schemas.microsoft.com/office/powerpoint/2010/main" val="236535551"/>
       </p:ext>
     </p:extLst>
   </p:cSld>
@@ -2471,7 +2473,7 @@
           <p:cNvPr id="2" name="Titel 1">
             <a:extLst>
               <a:ext uri="{FF2B5EF4-FFF2-40B4-BE49-F238E27FC236}">
-                <a16:creationId xmlns:a16="http://schemas.microsoft.com/office/drawing/2014/main" id="{58465F50-ED0E-3112-8857-0D8273C76DA2}"/>
+                <a16:creationId xmlns:a16="http://schemas.microsoft.com/office/drawing/2014/main" id="{E1ED5D83-5432-08B7-ED72-46E55380525A}"/>
               </a:ext>
             </a:extLst>
           </p:cNvPr>
@@ -2508,7 +2510,7 @@
           <p:cNvPr id="3" name="Bildplatzhalter 2">
             <a:extLst>
               <a:ext uri="{FF2B5EF4-FFF2-40B4-BE49-F238E27FC236}">
-                <a16:creationId xmlns:a16="http://schemas.microsoft.com/office/drawing/2014/main" id="{D8A26185-CBF0-46BF-C1FE-343248AF439C}"/>
+                <a16:creationId xmlns:a16="http://schemas.microsoft.com/office/drawing/2014/main" id="{D7A031F4-40A6-9190-865C-CEBC1A817FA5}"/>
               </a:ext>
             </a:extLst>
           </p:cNvPr>
@@ -2575,7 +2577,7 @@
           <p:cNvPr id="4" name="Textplatzhalter 3">
             <a:extLst>
               <a:ext uri="{FF2B5EF4-FFF2-40B4-BE49-F238E27FC236}">
-                <a16:creationId xmlns:a16="http://schemas.microsoft.com/office/drawing/2014/main" id="{44B84922-CBCD-E9A3-064B-67E1BC6E14F1}"/>
+                <a16:creationId xmlns:a16="http://schemas.microsoft.com/office/drawing/2014/main" id="{23789805-7810-7EEE-59FE-04FA2F21F8B2}"/>
               </a:ext>
             </a:extLst>
           </p:cNvPr>
@@ -2646,7 +2648,7 @@
           <p:cNvPr id="5" name="Datumsplatzhalter 4">
             <a:extLst>
               <a:ext uri="{FF2B5EF4-FFF2-40B4-BE49-F238E27FC236}">
-                <a16:creationId xmlns:a16="http://schemas.microsoft.com/office/drawing/2014/main" id="{D4C71F24-6C5F-07FB-BC63-B6BA751A2CD7}"/>
+                <a16:creationId xmlns:a16="http://schemas.microsoft.com/office/drawing/2014/main" id="{4E3CFBFD-8AE0-22A1-8740-A7D51952D861}"/>
               </a:ext>
             </a:extLst>
           </p:cNvPr>
@@ -2662,7 +2664,7 @@
           <a:bodyPr/>
           <a:lstStyle/>
           <a:p>
-            <a:fld id="{6D4811C1-AEF3-4DDB-8A6F-AFFB6AB542CA}" type="datetimeFigureOut">
+            <a:fld id="{5A1AF197-8666-45A1-A9DD-65DA68AEA0EB}" type="datetimeFigureOut">
               <a:rPr lang="de-DE" smtClean="0"/>
               <a:t>08.10.2026</a:t>
             </a:fld>
@@ -2675,7 +2677,7 @@
           <p:cNvPr id="6" name="Fußzeilenplatzhalter 5">
             <a:extLst>
               <a:ext uri="{FF2B5EF4-FFF2-40B4-BE49-F238E27FC236}">
-                <a16:creationId xmlns:a16="http://schemas.microsoft.com/office/drawing/2014/main" id="{87E80B2D-B55D-113E-9303-638EFD1F21F1}"/>
+                <a16:creationId xmlns:a16="http://schemas.microsoft.com/office/drawing/2014/main" id="{668B69EA-2174-3132-17B1-43E202968E75}"/>
               </a:ext>
             </a:extLst>
           </p:cNvPr>
@@ -2700,7 +2702,7 @@
           <p:cNvPr id="7" name="Foliennummernplatzhalter 6">
             <a:extLst>
               <a:ext uri="{FF2B5EF4-FFF2-40B4-BE49-F238E27FC236}">
-                <a16:creationId xmlns:a16="http://schemas.microsoft.com/office/drawing/2014/main" id="{ECEDD754-42A2-3335-4596-3CAADAE0E189}"/>
+                <a16:creationId xmlns:a16="http://schemas.microsoft.com/office/drawing/2014/main" id="{8CF36AC2-0275-3140-1966-E1B21A7528E0}"/>
               </a:ext>
             </a:extLst>
           </p:cNvPr>
@@ -2716,7 +2718,7 @@
           <a:bodyPr/>
           <a:lstStyle/>
           <a:p>
-            <a:fld id="{F45884CD-9BF8-425B-9EAD-9E0FE3DAEAB7}" type="slidenum">
+            <a:fld id="{FD7A2B11-542E-4CA3-8CAD-ADBF93301D0C}" type="slidenum">
               <a:rPr lang="de-DE" smtClean="0"/>
               <a:t>‹Nr.›</a:t>
             </a:fld>
@@ -2727,7 +2729,7 @@
     </p:spTree>
     <p:extLst>
       <p:ext uri="{BB962C8B-B14F-4D97-AF65-F5344CB8AC3E}">
-        <p14:creationId xmlns:p14="http://schemas.microsoft.com/office/powerpoint/2010/main" val="3950438343"/>
+        <p14:creationId xmlns:p14="http://schemas.microsoft.com/office/powerpoint/2010/main" val="4284705121"/>
       </p:ext>
     </p:extLst>
   </p:cSld>
@@ -2764,7 +2766,7 @@
           <p:cNvPr id="2" name="Titelplatzhalter 1">
             <a:extLst>
               <a:ext uri="{FF2B5EF4-FFF2-40B4-BE49-F238E27FC236}">
-                <a16:creationId xmlns:a16="http://schemas.microsoft.com/office/drawing/2014/main" id="{8020E904-FA50-2C2A-FB3C-64C94D818CB2}"/>
+                <a16:creationId xmlns:a16="http://schemas.microsoft.com/office/drawing/2014/main" id="{2A1B5342-469A-88F5-06D1-2F6BAE196031}"/>
               </a:ext>
             </a:extLst>
           </p:cNvPr>
@@ -2802,7 +2804,7 @@
           <p:cNvPr id="3" name="Textplatzhalter 2">
             <a:extLst>
               <a:ext uri="{FF2B5EF4-FFF2-40B4-BE49-F238E27FC236}">
-                <a16:creationId xmlns:a16="http://schemas.microsoft.com/office/drawing/2014/main" id="{A463D5CC-9926-5934-4D7A-B4CEA8482180}"/>
+                <a16:creationId xmlns:a16="http://schemas.microsoft.com/office/drawing/2014/main" id="{FF82D3DA-0033-4E60-AD70-530A1E840A4A}"/>
               </a:ext>
             </a:extLst>
           </p:cNvPr>
@@ -2869,7 +2871,7 @@
           <p:cNvPr id="4" name="Datumsplatzhalter 3">
             <a:extLst>
               <a:ext uri="{FF2B5EF4-FFF2-40B4-BE49-F238E27FC236}">
-                <a16:creationId xmlns:a16="http://schemas.microsoft.com/office/drawing/2014/main" id="{46848C39-0DBC-526E-7C5D-B9B609322A2E}"/>
+                <a16:creationId xmlns:a16="http://schemas.microsoft.com/office/drawing/2014/main" id="{83311BBC-602C-292F-9D94-A1655F3472B8}"/>
               </a:ext>
             </a:extLst>
           </p:cNvPr>
@@ -2903,7 +2905,7 @@
             </a:lvl1pPr>
           </a:lstStyle>
           <a:p>
-            <a:fld id="{6D4811C1-AEF3-4DDB-8A6F-AFFB6AB542CA}" type="datetimeFigureOut">
+            <a:fld id="{5A1AF197-8666-45A1-A9DD-65DA68AEA0EB}" type="datetimeFigureOut">
               <a:rPr lang="de-DE" smtClean="0"/>
               <a:t>08.10.2026</a:t>
             </a:fld>
@@ -2916,7 +2918,7 @@
           <p:cNvPr id="5" name="Fußzeilenplatzhalter 4">
             <a:extLst>
               <a:ext uri="{FF2B5EF4-FFF2-40B4-BE49-F238E27FC236}">
-                <a16:creationId xmlns:a16="http://schemas.microsoft.com/office/drawing/2014/main" id="{BE26E72E-9BC3-6E7D-5D1A-06BCEB0E7F3F}"/>
+                <a16:creationId xmlns:a16="http://schemas.microsoft.com/office/drawing/2014/main" id="{EEC4B4EA-CE28-553A-B843-ABDAE0269558}"/>
               </a:ext>
             </a:extLst>
           </p:cNvPr>
@@ -2959,7 +2961,7 @@
           <p:cNvPr id="6" name="Foliennummernplatzhalter 5">
             <a:extLst>
               <a:ext uri="{FF2B5EF4-FFF2-40B4-BE49-F238E27FC236}">
-                <a16:creationId xmlns:a16="http://schemas.microsoft.com/office/drawing/2014/main" id="{4AA60E5D-7546-EE1D-A42D-1E431B5FB471}"/>
+                <a16:creationId xmlns:a16="http://schemas.microsoft.com/office/drawing/2014/main" id="{BD0E9F3A-3C43-96F2-4149-F8D7885C390E}"/>
               </a:ext>
             </a:extLst>
           </p:cNvPr>
@@ -2993,7 +2995,7 @@
             </a:lvl1pPr>
           </a:lstStyle>
           <a:p>
-            <a:fld id="{F45884CD-9BF8-425B-9EAD-9E0FE3DAEAB7}" type="slidenum">
+            <a:fld id="{FD7A2B11-542E-4CA3-8CAD-ADBF93301D0C}" type="slidenum">
               <a:rPr lang="de-DE" smtClean="0"/>
               <a:t>‹Nr.›</a:t>
             </a:fld>
@@ -3004,7 +3006,7 @@
     </p:spTree>
     <p:extLst>
       <p:ext uri="{BB962C8B-B14F-4D97-AF65-F5344CB8AC3E}">
-        <p14:creationId xmlns:p14="http://schemas.microsoft.com/office/powerpoint/2010/main" val="4056324035"/>
+        <p14:creationId xmlns:p14="http://schemas.microsoft.com/office/powerpoint/2010/main" val="1261187872"/>
       </p:ext>
     </p:extLst>
   </p:cSld>
@@ -3327,7 +3329,7 @@
           <p:cNvPr id="2" name="Rechteck 1">
             <a:extLst>
               <a:ext uri="{FF2B5EF4-FFF2-40B4-BE49-F238E27FC236}">
-                <a16:creationId xmlns:a16="http://schemas.microsoft.com/office/drawing/2014/main" id="{9AFB2ABC-99D7-D579-325C-09A003F1CC60}"/>
+                <a16:creationId xmlns:a16="http://schemas.microsoft.com/office/drawing/2014/main" id="{9F1DCDF6-ED1D-A1B1-39B9-92A272144DBC}"/>
               </a:ext>
             </a:extLst>
           </p:cNvPr>
@@ -3404,7 +3406,7 @@
           <p:cNvPr id="3" name="Rechteck 2">
             <a:extLst>
               <a:ext uri="{FF2B5EF4-FFF2-40B4-BE49-F238E27FC236}">
-                <a16:creationId xmlns:a16="http://schemas.microsoft.com/office/drawing/2014/main" id="{015D2D40-5DA4-1763-0EF2-1E1D1A0CE33C}"/>
+                <a16:creationId xmlns:a16="http://schemas.microsoft.com/office/drawing/2014/main" id="{43116EA8-4129-2AEC-AA30-0B643F63BED8}"/>
               </a:ext>
             </a:extLst>
           </p:cNvPr>
@@ -3479,7 +3481,7 @@
           <p:cNvPr id="4" name="Rechteck: abgerundete Ecken 3">
             <a:extLst>
               <a:ext uri="{FF2B5EF4-FFF2-40B4-BE49-F238E27FC236}">
-                <a16:creationId xmlns:a16="http://schemas.microsoft.com/office/drawing/2014/main" id="{653B1A2D-0AB8-D1D2-D105-E8C352D833BC}"/>
+                <a16:creationId xmlns:a16="http://schemas.microsoft.com/office/drawing/2014/main" id="{0A159F4C-7D71-3391-FFD2-E1431B85F4FE}"/>
               </a:ext>
             </a:extLst>
           </p:cNvPr>
@@ -3556,7 +3558,7 @@
           <p:cNvPr id="5" name="Rechteck 4">
             <a:extLst>
               <a:ext uri="{FF2B5EF4-FFF2-40B4-BE49-F238E27FC236}">
-                <a16:creationId xmlns:a16="http://schemas.microsoft.com/office/drawing/2014/main" id="{BF744559-8CCE-D865-DF14-A20BA43A3F0C}"/>
+                <a16:creationId xmlns:a16="http://schemas.microsoft.com/office/drawing/2014/main" id="{BE15463F-8592-E90E-5CA4-6274A0BA1081}"/>
               </a:ext>
             </a:extLst>
           </p:cNvPr>
@@ -3633,7 +3635,7 @@
           <p:cNvPr id="6" name="Ellipse 5">
             <a:extLst>
               <a:ext uri="{FF2B5EF4-FFF2-40B4-BE49-F238E27FC236}">
-                <a16:creationId xmlns:a16="http://schemas.microsoft.com/office/drawing/2014/main" id="{479585BD-9D4B-5DB0-B19C-DE538802AC67}"/>
+                <a16:creationId xmlns:a16="http://schemas.microsoft.com/office/drawing/2014/main" id="{0B45B2C6-A961-FB56-0CF0-EA7F07C17D44}"/>
               </a:ext>
             </a:extLst>
           </p:cNvPr>
@@ -3710,7 +3712,7 @@
           <p:cNvPr id="7" name="Rechteck 6">
             <a:extLst>
               <a:ext uri="{FF2B5EF4-FFF2-40B4-BE49-F238E27FC236}">
-                <a16:creationId xmlns:a16="http://schemas.microsoft.com/office/drawing/2014/main" id="{0B6B3F27-8BAD-1E85-1930-A00E9B0DFD18}"/>
+                <a16:creationId xmlns:a16="http://schemas.microsoft.com/office/drawing/2014/main" id="{8BAE3E37-5FA9-369A-8B26-A413B6F3C6BA}"/>
               </a:ext>
             </a:extLst>
           </p:cNvPr>
@@ -3778,7 +3780,7 @@
           <p:cNvPr id="8" name="Ellipse 7">
             <a:extLst>
               <a:ext uri="{FF2B5EF4-FFF2-40B4-BE49-F238E27FC236}">
-                <a16:creationId xmlns:a16="http://schemas.microsoft.com/office/drawing/2014/main" id="{194079A1-7D1E-18E8-2675-DE0A7C64106B}"/>
+                <a16:creationId xmlns:a16="http://schemas.microsoft.com/office/drawing/2014/main" id="{DD480319-B6CD-46AA-5C51-843AF60A1336}"/>
               </a:ext>
             </a:extLst>
           </p:cNvPr>
@@ -3852,7 +3854,7 @@
     </p:spTree>
     <p:extLst>
       <p:ext uri="{BB962C8B-B14F-4D97-AF65-F5344CB8AC3E}">
-        <p14:creationId xmlns:p14="http://schemas.microsoft.com/office/powerpoint/2010/main" val="2080103135"/>
+        <p14:creationId xmlns:p14="http://schemas.microsoft.com/office/powerpoint/2010/main" val="3732569157"/>
       </p:ext>
     </p:extLst>
   </p:cSld>
@@ -3884,7 +3886,7 @@
           <p:cNvPr id="2" name="Rechteck 1">
             <a:extLst>
               <a:ext uri="{FF2B5EF4-FFF2-40B4-BE49-F238E27FC236}">
-                <a16:creationId xmlns:a16="http://schemas.microsoft.com/office/drawing/2014/main" id="{8C42AFB5-8F9B-C906-69BB-2C0ACB11C6C5}"/>
+                <a16:creationId xmlns:a16="http://schemas.microsoft.com/office/drawing/2014/main" id="{EB0CDFF3-9426-601B-6B93-8B20E9316F4C}"/>
               </a:ext>
             </a:extLst>
           </p:cNvPr>
@@ -3962,7 +3964,7 @@
           <p:cNvPr id="3" name="Rechteck: abgerundete Ecken 2">
             <a:extLst>
               <a:ext uri="{FF2B5EF4-FFF2-40B4-BE49-F238E27FC236}">
-                <a16:creationId xmlns:a16="http://schemas.microsoft.com/office/drawing/2014/main" id="{F981924B-C607-12CD-5663-3D2679070DF6}"/>
+                <a16:creationId xmlns:a16="http://schemas.microsoft.com/office/drawing/2014/main" id="{91887F2B-F1A3-0409-742A-AAC507E60903}"/>
               </a:ext>
             </a:extLst>
           </p:cNvPr>
@@ -4040,7 +4042,7 @@
           <p:cNvPr id="4" name="Rechteck 3">
             <a:extLst>
               <a:ext uri="{FF2B5EF4-FFF2-40B4-BE49-F238E27FC236}">
-                <a16:creationId xmlns:a16="http://schemas.microsoft.com/office/drawing/2014/main" id="{3A0C565C-EE08-254A-86D2-02DE6440D982}"/>
+                <a16:creationId xmlns:a16="http://schemas.microsoft.com/office/drawing/2014/main" id="{39D9021C-216B-06E2-F7F8-246E778987FE}"/>
               </a:ext>
             </a:extLst>
           </p:cNvPr>
@@ -4117,7 +4119,7 @@
           <p:cNvPr id="5" name="Rechteck 4">
             <a:extLst>
               <a:ext uri="{FF2B5EF4-FFF2-40B4-BE49-F238E27FC236}">
-                <a16:creationId xmlns:a16="http://schemas.microsoft.com/office/drawing/2014/main" id="{43D76E9D-E947-8D55-3DC1-E829D9AC38D6}"/>
+                <a16:creationId xmlns:a16="http://schemas.microsoft.com/office/drawing/2014/main" id="{619EA6EB-1412-081E-5CA7-33EFDAF275D9}"/>
               </a:ext>
             </a:extLst>
           </p:cNvPr>
@@ -4193,7 +4195,7 @@
           <p:cNvPr id="6" name="Ellipse 5">
             <a:extLst>
               <a:ext uri="{FF2B5EF4-FFF2-40B4-BE49-F238E27FC236}">
-                <a16:creationId xmlns:a16="http://schemas.microsoft.com/office/drawing/2014/main" id="{271DD69E-D4AB-9BF6-2E4D-7925ECA2377A}"/>
+                <a16:creationId xmlns:a16="http://schemas.microsoft.com/office/drawing/2014/main" id="{FDFFA47E-B452-EA0E-5EB0-92DE20429C18}"/>
               </a:ext>
             </a:extLst>
           </p:cNvPr>
@@ -4269,7 +4271,1251 @@
     </p:spTree>
     <p:extLst>
       <p:ext uri="{BB962C8B-B14F-4D97-AF65-F5344CB8AC3E}">
-        <p14:creationId xmlns:p14="http://schemas.microsoft.com/office/powerpoint/2010/main" val="3189950230"/>
+        <p14:creationId xmlns:p14="http://schemas.microsoft.com/office/powerpoint/2010/main" val="1993990675"/>
+      </p:ext>
+    </p:extLst>
+  </p:cSld>
+  <p:clrMapOvr>
+    <a:masterClrMapping/>
+  </p:clrMapOvr>
+</p:sld>
+</file>
+
+<file path=ppt/slides/slide3.xml><?xml version="1.0" encoding="utf-8"?>
+<p:sld xmlns:a="http://schemas.openxmlformats.org/drawingml/2006/main" xmlns:r="http://schemas.openxmlformats.org/officeDocument/2006/relationships" xmlns:p="http://schemas.openxmlformats.org/presentationml/2006/main">
+  <p:cSld>
+    <p:spTree>
+      <p:nvGrpSpPr>
+        <p:cNvPr id="1" name=""/>
+        <p:cNvGrpSpPr/>
+        <p:nvPr/>
+      </p:nvGrpSpPr>
+      <p:grpSpPr>
+        <a:xfrm>
+          <a:off x="0" y="0"/>
+          <a:ext cx="0" cy="0"/>
+          <a:chOff x="0" y="0"/>
+          <a:chExt cx="0" cy="0"/>
+        </a:xfrm>
+      </p:grpSpPr>
+      <p:sp>
+        <p:nvSpPr>
+          <p:cNvPr id="2" name="perspective-0">
+            <a:extLst>
+              <a:ext uri="{FF2B5EF4-FFF2-40B4-BE49-F238E27FC236}">
+                <a16:creationId xmlns:a16="http://schemas.microsoft.com/office/drawing/2014/main" id="{BEF7C74C-C132-B0D8-D66A-D719F3DB739A}"/>
+              </a:ext>
+            </a:extLst>
+          </p:cNvPr>
+          <p:cNvSpPr/>
+          <p:nvPr/>
+        </p:nvSpPr>
+        <p:spPr>
+          <a:xfrm>
+            <a:off x="762000" y="1016000"/>
+            <a:ext cx="1651000" cy="1270000"/>
+          </a:xfrm>
+          <a:prstGeom prst="rect">
+            <a:avLst/>
+          </a:prstGeom>
+          <a:solidFill>
+            <a:srgbClr val="4472C4"/>
+          </a:solidFill>
+          <a:ln w="19050" cap="flat" cmpd="sng" algn="ctr">
+            <a:noFill/>
+            <a:prstDash val="solid"/>
+            <a:miter lim="800000"/>
+          </a:ln>
+          <a:effectLst xmlns:a="http://schemas.openxmlformats.org/drawingml/2006/main">
+            <a:outerShdw dist="0" sx="100000" sy="-50000" algn="b">
+              <a:srgbClr val="000000">
+                <a:alpha val="50000"/>
+              </a:srgbClr>
+            </a:outerShdw>
+          </a:effectLst>
+          <a:extLst>
+            <a:ext uri="{91240B29-F687-4F45-9708-019B960494DF}">
+              <a14:hiddenLine xmlns:a14="http://schemas.microsoft.com/office/drawing/2010/main" w="19050" cap="flat" cmpd="sng" algn="ctr">
+                <a:solidFill>
+                  <a:schemeClr val="accent1">
+                    <a:shade val="15000"/>
+                  </a:schemeClr>
+                </a:solidFill>
+                <a:prstDash val="solid"/>
+                <a:miter lim="800000"/>
+              </a14:hiddenLine>
+            </a:ext>
+          </a:extLst>
+        </p:spPr>
+        <p:style>
+          <a:lnRef idx="2">
+            <a:schemeClr val="accent1">
+              <a:shade val="15000"/>
+            </a:schemeClr>
+          </a:lnRef>
+          <a:fillRef idx="1">
+            <a:schemeClr val="accent1"/>
+          </a:fillRef>
+          <a:effectRef idx="0">
+            <a:schemeClr val="accent1"/>
+          </a:effectRef>
+          <a:fontRef idx="minor">
+            <a:schemeClr val="lt1"/>
+          </a:fontRef>
+        </p:style>
+        <p:txBody>
+          <a:bodyPr rtlCol="0" anchor="ctr"/>
+          <a:lstStyle/>
+          <a:p>
+            <a:pPr algn="ctr"/>
+            <a:endParaRPr lang="de-DE"/>
+          </a:p>
+        </p:txBody>
+      </p:sp>
+      <p:sp>
+        <p:nvSpPr>
+          <p:cNvPr id="3" name="perspective-1">
+            <a:extLst>
+              <a:ext uri="{FF2B5EF4-FFF2-40B4-BE49-F238E27FC236}">
+                <a16:creationId xmlns:a16="http://schemas.microsoft.com/office/drawing/2014/main" id="{BD4FA95A-1329-2224-7377-D8ED6346DB77}"/>
+              </a:ext>
+            </a:extLst>
+          </p:cNvPr>
+          <p:cNvSpPr/>
+          <p:nvPr/>
+        </p:nvSpPr>
+        <p:spPr>
+          <a:xfrm>
+            <a:off x="3683000" y="1016000"/>
+            <a:ext cx="1651000" cy="1270000"/>
+          </a:xfrm>
+          <a:prstGeom prst="rect">
+            <a:avLst/>
+          </a:prstGeom>
+          <a:solidFill>
+            <a:srgbClr val="4472C4"/>
+          </a:solidFill>
+          <a:ln w="19050" cap="flat" cmpd="sng" algn="ctr">
+            <a:noFill/>
+            <a:prstDash val="solid"/>
+            <a:miter lim="800000"/>
+          </a:ln>
+          <a:effectLst xmlns:a="http://schemas.openxmlformats.org/drawingml/2006/main">
+            <a:outerShdw dist="12700" dir="8100000" sy="-23000" kx="800400" algn="br">
+              <a:srgbClr val="000000">
+                <a:alpha val="50000"/>
+              </a:srgbClr>
+            </a:outerShdw>
+          </a:effectLst>
+          <a:extLst>
+            <a:ext uri="{91240B29-F687-4F45-9708-019B960494DF}">
+              <a14:hiddenLine xmlns:a14="http://schemas.microsoft.com/office/drawing/2010/main" w="19050" cap="flat" cmpd="sng" algn="ctr">
+                <a:solidFill>
+                  <a:schemeClr val="accent1">
+                    <a:shade val="15000"/>
+                  </a:schemeClr>
+                </a:solidFill>
+                <a:prstDash val="solid"/>
+                <a:miter lim="800000"/>
+              </a14:hiddenLine>
+            </a:ext>
+          </a:extLst>
+        </p:spPr>
+        <p:style>
+          <a:lnRef idx="2">
+            <a:schemeClr val="accent1">
+              <a:shade val="15000"/>
+            </a:schemeClr>
+          </a:lnRef>
+          <a:fillRef idx="1">
+            <a:schemeClr val="accent1"/>
+          </a:fillRef>
+          <a:effectRef idx="0">
+            <a:schemeClr val="accent1"/>
+          </a:effectRef>
+          <a:fontRef idx="minor">
+            <a:schemeClr val="lt1"/>
+          </a:fontRef>
+        </p:style>
+        <p:txBody>
+          <a:bodyPr rtlCol="0" anchor="ctr"/>
+          <a:lstStyle/>
+          <a:p>
+            <a:pPr algn="ctr"/>
+            <a:endParaRPr lang="de-DE"/>
+          </a:p>
+        </p:txBody>
+      </p:sp>
+      <p:sp>
+        <p:nvSpPr>
+          <p:cNvPr id="4" name="perspective-2">
+            <a:extLst>
+              <a:ext uri="{FF2B5EF4-FFF2-40B4-BE49-F238E27FC236}">
+                <a16:creationId xmlns:a16="http://schemas.microsoft.com/office/drawing/2014/main" id="{374FC81E-8387-5AA8-A2CB-2CE39D69A0E0}"/>
+              </a:ext>
+            </a:extLst>
+          </p:cNvPr>
+          <p:cNvSpPr/>
+          <p:nvPr/>
+        </p:nvSpPr>
+        <p:spPr>
+          <a:xfrm>
+            <a:off x="6604000" y="1016000"/>
+            <a:ext cx="1651000" cy="1270000"/>
+          </a:xfrm>
+          <a:prstGeom prst="rect">
+            <a:avLst/>
+          </a:prstGeom>
+          <a:solidFill>
+            <a:srgbClr val="4472C4"/>
+          </a:solidFill>
+          <a:ln w="19050" cap="flat" cmpd="sng" algn="ctr">
+            <a:noFill/>
+            <a:prstDash val="solid"/>
+            <a:miter lim="800000"/>
+          </a:ln>
+          <a:effectLst xmlns:a="http://schemas.openxmlformats.org/drawingml/2006/main">
+            <a:outerShdw dist="0" sx="50000" sy="50000" algn="tl">
+              <a:srgbClr val="000000">
+                <a:alpha val="50000"/>
+              </a:srgbClr>
+            </a:outerShdw>
+          </a:effectLst>
+          <a:extLst>
+            <a:ext uri="{91240B29-F687-4F45-9708-019B960494DF}">
+              <a14:hiddenLine xmlns:a14="http://schemas.microsoft.com/office/drawing/2010/main" w="19050" cap="flat" cmpd="sng" algn="ctr">
+                <a:solidFill>
+                  <a:schemeClr val="accent1">
+                    <a:shade val="15000"/>
+                  </a:schemeClr>
+                </a:solidFill>
+                <a:prstDash val="solid"/>
+                <a:miter lim="800000"/>
+              </a14:hiddenLine>
+            </a:ext>
+          </a:extLst>
+        </p:spPr>
+        <p:style>
+          <a:lnRef idx="2">
+            <a:schemeClr val="accent1">
+              <a:shade val="15000"/>
+            </a:schemeClr>
+          </a:lnRef>
+          <a:fillRef idx="1">
+            <a:schemeClr val="accent1"/>
+          </a:fillRef>
+          <a:effectRef idx="0">
+            <a:schemeClr val="accent1"/>
+          </a:effectRef>
+          <a:fontRef idx="minor">
+            <a:schemeClr val="lt1"/>
+          </a:fontRef>
+        </p:style>
+        <p:txBody>
+          <a:bodyPr rtlCol="0" anchor="ctr"/>
+          <a:lstStyle/>
+          <a:p>
+            <a:pPr algn="ctr"/>
+            <a:endParaRPr lang="de-DE"/>
+          </a:p>
+        </p:txBody>
+      </p:sp>
+      <p:sp>
+        <p:nvSpPr>
+          <p:cNvPr id="5" name="perspective-3">
+            <a:extLst>
+              <a:ext uri="{FF2B5EF4-FFF2-40B4-BE49-F238E27FC236}">
+                <a16:creationId xmlns:a16="http://schemas.microsoft.com/office/drawing/2014/main" id="{D0BE96B2-8D39-1D23-254E-D9CE4B278BD8}"/>
+              </a:ext>
+            </a:extLst>
+          </p:cNvPr>
+          <p:cNvSpPr/>
+          <p:nvPr/>
+        </p:nvSpPr>
+        <p:spPr>
+          <a:xfrm>
+            <a:off x="9525000" y="1016000"/>
+            <a:ext cx="1651000" cy="1270000"/>
+          </a:xfrm>
+          <a:prstGeom prst="rect">
+            <a:avLst/>
+          </a:prstGeom>
+          <a:solidFill>
+            <a:srgbClr val="4472C4"/>
+          </a:solidFill>
+          <a:ln w="19050" cap="flat" cmpd="sng" algn="ctr">
+            <a:noFill/>
+            <a:prstDash val="solid"/>
+            <a:miter lim="800000"/>
+          </a:ln>
+          <a:effectLst xmlns:a="http://schemas.openxmlformats.org/drawingml/2006/main">
+            <a:outerShdw dist="0" kx="1800000" algn="b">
+              <a:srgbClr val="000000">
+                <a:alpha val="50000"/>
+              </a:srgbClr>
+            </a:outerShdw>
+          </a:effectLst>
+          <a:extLst>
+            <a:ext uri="{91240B29-F687-4F45-9708-019B960494DF}">
+              <a14:hiddenLine xmlns:a14="http://schemas.microsoft.com/office/drawing/2010/main" w="19050" cap="flat" cmpd="sng" algn="ctr">
+                <a:solidFill>
+                  <a:schemeClr val="accent1">
+                    <a:shade val="15000"/>
+                  </a:schemeClr>
+                </a:solidFill>
+                <a:prstDash val="solid"/>
+                <a:miter lim="800000"/>
+              </a14:hiddenLine>
+            </a:ext>
+          </a:extLst>
+        </p:spPr>
+        <p:style>
+          <a:lnRef idx="2">
+            <a:schemeClr val="accent1">
+              <a:shade val="15000"/>
+            </a:schemeClr>
+          </a:lnRef>
+          <a:fillRef idx="1">
+            <a:schemeClr val="accent1"/>
+          </a:fillRef>
+          <a:effectRef idx="0">
+            <a:schemeClr val="accent1"/>
+          </a:effectRef>
+          <a:fontRef idx="minor">
+            <a:schemeClr val="lt1"/>
+          </a:fontRef>
+        </p:style>
+        <p:txBody>
+          <a:bodyPr rtlCol="0" anchor="ctr"/>
+          <a:lstStyle/>
+          <a:p>
+            <a:pPr algn="ctr"/>
+            <a:endParaRPr lang="de-DE"/>
+          </a:p>
+        </p:txBody>
+      </p:sp>
+      <p:sp>
+        <p:nvSpPr>
+          <p:cNvPr id="6" name="perspective-4">
+            <a:extLst>
+              <a:ext uri="{FF2B5EF4-FFF2-40B4-BE49-F238E27FC236}">
+                <a16:creationId xmlns:a16="http://schemas.microsoft.com/office/drawing/2014/main" id="{D180BCE6-6B27-72E1-FD32-E5E1D075A75A}"/>
+              </a:ext>
+            </a:extLst>
+          </p:cNvPr>
+          <p:cNvSpPr/>
+          <p:nvPr/>
+        </p:nvSpPr>
+        <p:spPr>
+          <a:xfrm>
+            <a:off x="762000" y="4318000"/>
+            <a:ext cx="1651000" cy="1270000"/>
+          </a:xfrm>
+          <a:prstGeom prst="rect">
+            <a:avLst/>
+          </a:prstGeom>
+          <a:solidFill>
+            <a:srgbClr val="4472C4"/>
+          </a:solidFill>
+          <a:ln w="19050" cap="flat" cmpd="sng" algn="ctr">
+            <a:noFill/>
+            <a:prstDash val="solid"/>
+            <a:miter lim="800000"/>
+          </a:ln>
+          <a:effectLst xmlns:a="http://schemas.openxmlformats.org/drawingml/2006/main">
+            <a:outerShdw dist="0" ky="1200000" algn="l">
+              <a:srgbClr val="000000">
+                <a:alpha val="50000"/>
+              </a:srgbClr>
+            </a:outerShdw>
+          </a:effectLst>
+          <a:extLst>
+            <a:ext uri="{91240B29-F687-4F45-9708-019B960494DF}">
+              <a14:hiddenLine xmlns:a14="http://schemas.microsoft.com/office/drawing/2010/main" w="19050" cap="flat" cmpd="sng" algn="ctr">
+                <a:solidFill>
+                  <a:schemeClr val="accent1">
+                    <a:shade val="15000"/>
+                  </a:schemeClr>
+                </a:solidFill>
+                <a:prstDash val="solid"/>
+                <a:miter lim="800000"/>
+              </a14:hiddenLine>
+            </a:ext>
+          </a:extLst>
+        </p:spPr>
+        <p:style>
+          <a:lnRef idx="2">
+            <a:schemeClr val="accent1">
+              <a:shade val="15000"/>
+            </a:schemeClr>
+          </a:lnRef>
+          <a:fillRef idx="1">
+            <a:schemeClr val="accent1"/>
+          </a:fillRef>
+          <a:effectRef idx="0">
+            <a:schemeClr val="accent1"/>
+          </a:effectRef>
+          <a:fontRef idx="minor">
+            <a:schemeClr val="lt1"/>
+          </a:fontRef>
+        </p:style>
+        <p:txBody>
+          <a:bodyPr rtlCol="0" anchor="ctr"/>
+          <a:lstStyle/>
+          <a:p>
+            <a:pPr algn="ctr"/>
+            <a:endParaRPr lang="de-DE"/>
+          </a:p>
+        </p:txBody>
+      </p:sp>
+      <p:sp>
+        <p:nvSpPr>
+          <p:cNvPr id="7" name="perspective-5">
+            <a:extLst>
+              <a:ext uri="{FF2B5EF4-FFF2-40B4-BE49-F238E27FC236}">
+                <a16:creationId xmlns:a16="http://schemas.microsoft.com/office/drawing/2014/main" id="{71BFD4D2-C820-3E33-9E0A-0A9E015106C7}"/>
+              </a:ext>
+            </a:extLst>
+          </p:cNvPr>
+          <p:cNvSpPr/>
+          <p:nvPr/>
+        </p:nvSpPr>
+        <p:spPr>
+          <a:xfrm>
+            <a:off x="3683000" y="4318000"/>
+            <a:ext cx="1651000" cy="1270000"/>
+          </a:xfrm>
+          <a:prstGeom prst="rect">
+            <a:avLst/>
+          </a:prstGeom>
+          <a:solidFill>
+            <a:srgbClr val="4472C4"/>
+          </a:solidFill>
+          <a:ln w="19050" cap="flat" cmpd="sng" algn="ctr">
+            <a:noFill/>
+            <a:prstDash val="solid"/>
+            <a:miter lim="800000"/>
+          </a:ln>
+          <a:effectLst xmlns:a="http://schemas.openxmlformats.org/drawingml/2006/main">
+            <a:outerShdw dist="0" sx="150000" sy="150000" algn="ctr">
+              <a:srgbClr val="000000">
+                <a:alpha val="50000"/>
+              </a:srgbClr>
+            </a:outerShdw>
+          </a:effectLst>
+          <a:extLst>
+            <a:ext uri="{91240B29-F687-4F45-9708-019B960494DF}">
+              <a14:hiddenLine xmlns:a14="http://schemas.microsoft.com/office/drawing/2010/main" w="19050" cap="flat" cmpd="sng" algn="ctr">
+                <a:solidFill>
+                  <a:schemeClr val="accent1">
+                    <a:shade val="15000"/>
+                  </a:schemeClr>
+                </a:solidFill>
+                <a:prstDash val="solid"/>
+                <a:miter lim="800000"/>
+              </a14:hiddenLine>
+            </a:ext>
+          </a:extLst>
+        </p:spPr>
+        <p:style>
+          <a:lnRef idx="2">
+            <a:schemeClr val="accent1">
+              <a:shade val="15000"/>
+            </a:schemeClr>
+          </a:lnRef>
+          <a:fillRef idx="1">
+            <a:schemeClr val="accent1"/>
+          </a:fillRef>
+          <a:effectRef idx="0">
+            <a:schemeClr val="accent1"/>
+          </a:effectRef>
+          <a:fontRef idx="minor">
+            <a:schemeClr val="lt1"/>
+          </a:fontRef>
+        </p:style>
+        <p:txBody>
+          <a:bodyPr rtlCol="0" anchor="ctr"/>
+          <a:lstStyle/>
+          <a:p>
+            <a:pPr algn="ctr"/>
+            <a:endParaRPr lang="de-DE"/>
+          </a:p>
+        </p:txBody>
+      </p:sp>
+      <p:sp>
+        <p:nvSpPr>
+          <p:cNvPr id="8" name="perspective-6">
+            <a:extLst>
+              <a:ext uri="{FF2B5EF4-FFF2-40B4-BE49-F238E27FC236}">
+                <a16:creationId xmlns:a16="http://schemas.microsoft.com/office/drawing/2014/main" id="{0B24BDCB-B900-C396-3FEB-79E43AEF9515}"/>
+              </a:ext>
+            </a:extLst>
+          </p:cNvPr>
+          <p:cNvSpPr/>
+          <p:nvPr/>
+        </p:nvSpPr>
+        <p:spPr>
+          <a:xfrm>
+            <a:off x="6604000" y="4318000"/>
+            <a:ext cx="1651000" cy="1270000"/>
+          </a:xfrm>
+          <a:prstGeom prst="rect">
+            <a:avLst/>
+          </a:prstGeom>
+          <a:solidFill>
+            <a:srgbClr val="4472C4"/>
+          </a:solidFill>
+          <a:ln w="19050" cap="flat" cmpd="sng" algn="ctr">
+            <a:noFill/>
+            <a:prstDash val="solid"/>
+            <a:miter lim="800000"/>
+          </a:ln>
+          <a:effectLst xmlns:a="http://schemas.openxmlformats.org/drawingml/2006/main">
+            <a:outerShdw blurRad="76200" dist="12700" dir="8100000" sy="-23000" kx="800400" algn="br">
+              <a:srgbClr val="000000">
+                <a:alpha val="50000"/>
+              </a:srgbClr>
+            </a:outerShdw>
+          </a:effectLst>
+          <a:extLst>
+            <a:ext uri="{91240B29-F687-4F45-9708-019B960494DF}">
+              <a14:hiddenLine xmlns:a14="http://schemas.microsoft.com/office/drawing/2010/main" w="19050" cap="flat" cmpd="sng" algn="ctr">
+                <a:solidFill>
+                  <a:schemeClr val="accent1">
+                    <a:shade val="15000"/>
+                  </a:schemeClr>
+                </a:solidFill>
+                <a:prstDash val="solid"/>
+                <a:miter lim="800000"/>
+              </a14:hiddenLine>
+            </a:ext>
+          </a:extLst>
+        </p:spPr>
+        <p:style>
+          <a:lnRef idx="2">
+            <a:schemeClr val="accent1">
+              <a:shade val="15000"/>
+            </a:schemeClr>
+          </a:lnRef>
+          <a:fillRef idx="1">
+            <a:schemeClr val="accent1"/>
+          </a:fillRef>
+          <a:effectRef idx="0">
+            <a:schemeClr val="accent1"/>
+          </a:effectRef>
+          <a:fontRef idx="minor">
+            <a:schemeClr val="lt1"/>
+          </a:fontRef>
+        </p:style>
+        <p:txBody>
+          <a:bodyPr rtlCol="0" anchor="ctr"/>
+          <a:lstStyle/>
+          <a:p>
+            <a:pPr algn="ctr"/>
+            <a:endParaRPr lang="de-DE"/>
+          </a:p>
+        </p:txBody>
+      </p:sp>
+      <p:sp>
+        <p:nvSpPr>
+          <p:cNvPr id="9" name="perspective-7">
+            <a:extLst>
+              <a:ext uri="{FF2B5EF4-FFF2-40B4-BE49-F238E27FC236}">
+                <a16:creationId xmlns:a16="http://schemas.microsoft.com/office/drawing/2014/main" id="{99EAEC51-9AE6-28DA-C920-01287B4EDB52}"/>
+              </a:ext>
+            </a:extLst>
+          </p:cNvPr>
+          <p:cNvSpPr/>
+          <p:nvPr/>
+        </p:nvSpPr>
+        <p:spPr>
+          <a:xfrm>
+            <a:off x="9525000" y="4318000"/>
+            <a:ext cx="1651000" cy="1270000"/>
+          </a:xfrm>
+          <a:prstGeom prst="rect">
+            <a:avLst/>
+          </a:prstGeom>
+          <a:solidFill>
+            <a:srgbClr val="4472C4"/>
+          </a:solidFill>
+          <a:ln w="19050" cap="flat" cmpd="sng" algn="ctr">
+            <a:noFill/>
+            <a:prstDash val="solid"/>
+            <a:miter lim="800000"/>
+          </a:ln>
+          <a:effectLst xmlns:a="http://schemas.openxmlformats.org/drawingml/2006/main">
+            <a:outerShdw blurRad="76200" dist="317500" dir="5400000" sx="90000" sy="-19000">
+              <a:srgbClr val="000000">
+                <a:alpha val="50000"/>
+              </a:srgbClr>
+            </a:outerShdw>
+          </a:effectLst>
+          <a:extLst>
+            <a:ext uri="{91240B29-F687-4F45-9708-019B960494DF}">
+              <a14:hiddenLine xmlns:a14="http://schemas.microsoft.com/office/drawing/2010/main" w="19050" cap="flat" cmpd="sng" algn="ctr">
+                <a:solidFill>
+                  <a:schemeClr val="accent1">
+                    <a:shade val="15000"/>
+                  </a:schemeClr>
+                </a:solidFill>
+                <a:prstDash val="solid"/>
+                <a:miter lim="800000"/>
+              </a14:hiddenLine>
+            </a:ext>
+          </a:extLst>
+        </p:spPr>
+        <p:style>
+          <a:lnRef idx="2">
+            <a:schemeClr val="accent1">
+              <a:shade val="15000"/>
+            </a:schemeClr>
+          </a:lnRef>
+          <a:fillRef idx="1">
+            <a:schemeClr val="accent1"/>
+          </a:fillRef>
+          <a:effectRef idx="0">
+            <a:schemeClr val="accent1"/>
+          </a:effectRef>
+          <a:fontRef idx="minor">
+            <a:schemeClr val="lt1"/>
+          </a:fontRef>
+        </p:style>
+        <p:txBody>
+          <a:bodyPr rtlCol="0" anchor="ctr"/>
+          <a:lstStyle/>
+          <a:p>
+            <a:pPr algn="ctr"/>
+            <a:endParaRPr lang="de-DE"/>
+          </a:p>
+        </p:txBody>
+      </p:sp>
+    </p:spTree>
+    <p:extLst>
+      <p:ext uri="{BB962C8B-B14F-4D97-AF65-F5344CB8AC3E}">
+        <p14:creationId xmlns:p14="http://schemas.microsoft.com/office/powerpoint/2010/main" val="3146653908"/>
+      </p:ext>
+    </p:extLst>
+  </p:cSld>
+  <p:clrMapOvr>
+    <a:masterClrMapping/>
+  </p:clrMapOvr>
+</p:sld>
+</file>
+
+<file path=ppt/slides/slide4.xml><?xml version="1.0" encoding="utf-8"?>
+<p:sld xmlns:a="http://schemas.openxmlformats.org/drawingml/2006/main" xmlns:r="http://schemas.openxmlformats.org/officeDocument/2006/relationships" xmlns:p="http://schemas.openxmlformats.org/presentationml/2006/main">
+  <p:cSld>
+    <p:spTree>
+      <p:nvGrpSpPr>
+        <p:cNvPr id="1" name=""/>
+        <p:cNvGrpSpPr/>
+        <p:nvPr/>
+      </p:nvGrpSpPr>
+      <p:grpSpPr>
+        <a:xfrm>
+          <a:off x="0" y="0"/>
+          <a:ext cx="0" cy="0"/>
+          <a:chOff x="0" y="0"/>
+          <a:chExt cx="0" cy="0"/>
+        </a:xfrm>
+      </p:grpSpPr>
+      <p:sp>
+        <p:nvSpPr>
+          <p:cNvPr id="2" name="turned-0">
+            <a:extLst>
+              <a:ext uri="{FF2B5EF4-FFF2-40B4-BE49-F238E27FC236}">
+                <a16:creationId xmlns:a16="http://schemas.microsoft.com/office/drawing/2014/main" id="{0EA5DEC4-0EED-8E42-A95D-1DF0FA17945E}"/>
+              </a:ext>
+            </a:extLst>
+          </p:cNvPr>
+          <p:cNvSpPr/>
+          <p:nvPr/>
+        </p:nvSpPr>
+        <p:spPr>
+          <a:xfrm rot="1800000">
+            <a:off x="762000" y="1016000"/>
+            <a:ext cx="1651000" cy="1270000"/>
+          </a:xfrm>
+          <a:prstGeom prst="rect">
+            <a:avLst/>
+          </a:prstGeom>
+          <a:solidFill>
+            <a:srgbClr val="4472C4"/>
+          </a:solidFill>
+          <a:ln w="19050" cap="flat" cmpd="sng" algn="ctr">
+            <a:noFill/>
+            <a:prstDash val="solid"/>
+            <a:miter lim="800000"/>
+          </a:ln>
+          <a:effectLst xmlns:a="http://schemas.openxmlformats.org/drawingml/2006/main">
+            <a:outerShdw dist="190500" dir="2700000" rotWithShape="0">
+              <a:srgbClr val="000000">
+                <a:alpha val="50000"/>
+              </a:srgbClr>
+            </a:outerShdw>
+          </a:effectLst>
+          <a:extLst>
+            <a:ext uri="{91240B29-F687-4F45-9708-019B960494DF}">
+              <a14:hiddenLine xmlns:a14="http://schemas.microsoft.com/office/drawing/2010/main" w="19050" cap="flat" cmpd="sng" algn="ctr">
+                <a:solidFill>
+                  <a:schemeClr val="accent1">
+                    <a:shade val="15000"/>
+                  </a:schemeClr>
+                </a:solidFill>
+                <a:prstDash val="solid"/>
+                <a:miter lim="800000"/>
+              </a14:hiddenLine>
+            </a:ext>
+          </a:extLst>
+        </p:spPr>
+        <p:style>
+          <a:lnRef idx="2">
+            <a:schemeClr val="accent1">
+              <a:shade val="15000"/>
+            </a:schemeClr>
+          </a:lnRef>
+          <a:fillRef idx="1">
+            <a:schemeClr val="accent1"/>
+          </a:fillRef>
+          <a:effectRef idx="0">
+            <a:schemeClr val="accent1"/>
+          </a:effectRef>
+          <a:fontRef idx="minor">
+            <a:schemeClr val="lt1"/>
+          </a:fontRef>
+        </p:style>
+        <p:txBody>
+          <a:bodyPr rtlCol="0" anchor="ctr"/>
+          <a:lstStyle/>
+          <a:p>
+            <a:pPr algn="ctr"/>
+            <a:endParaRPr lang="de-DE"/>
+          </a:p>
+        </p:txBody>
+      </p:sp>
+      <p:sp>
+        <p:nvSpPr>
+          <p:cNvPr id="3" name="turned-1">
+            <a:extLst>
+              <a:ext uri="{FF2B5EF4-FFF2-40B4-BE49-F238E27FC236}">
+                <a16:creationId xmlns:a16="http://schemas.microsoft.com/office/drawing/2014/main" id="{439F2E9E-D1C8-601D-5B61-4A2BA56D7431}"/>
+              </a:ext>
+            </a:extLst>
+          </p:cNvPr>
+          <p:cNvSpPr/>
+          <p:nvPr/>
+        </p:nvSpPr>
+        <p:spPr>
+          <a:xfrm rot="5400000">
+            <a:off x="3683000" y="1016000"/>
+            <a:ext cx="1651000" cy="1270000"/>
+          </a:xfrm>
+          <a:prstGeom prst="rect">
+            <a:avLst/>
+          </a:prstGeom>
+          <a:solidFill>
+            <a:srgbClr val="4472C4"/>
+          </a:solidFill>
+          <a:ln w="19050" cap="flat" cmpd="sng" algn="ctr">
+            <a:noFill/>
+            <a:prstDash val="solid"/>
+            <a:miter lim="800000"/>
+          </a:ln>
+          <a:effectLst xmlns:a="http://schemas.openxmlformats.org/drawingml/2006/main">
+            <a:outerShdw dist="190500" dir="2700000" rotWithShape="0">
+              <a:srgbClr val="000000">
+                <a:alpha val="50000"/>
+              </a:srgbClr>
+            </a:outerShdw>
+          </a:effectLst>
+          <a:extLst>
+            <a:ext uri="{91240B29-F687-4F45-9708-019B960494DF}">
+              <a14:hiddenLine xmlns:a14="http://schemas.microsoft.com/office/drawing/2010/main" w="19050" cap="flat" cmpd="sng" algn="ctr">
+                <a:solidFill>
+                  <a:schemeClr val="accent1">
+                    <a:shade val="15000"/>
+                  </a:schemeClr>
+                </a:solidFill>
+                <a:prstDash val="solid"/>
+                <a:miter lim="800000"/>
+              </a14:hiddenLine>
+            </a:ext>
+          </a:extLst>
+        </p:spPr>
+        <p:style>
+          <a:lnRef idx="2">
+            <a:schemeClr val="accent1">
+              <a:shade val="15000"/>
+            </a:schemeClr>
+          </a:lnRef>
+          <a:fillRef idx="1">
+            <a:schemeClr val="accent1"/>
+          </a:fillRef>
+          <a:effectRef idx="0">
+            <a:schemeClr val="accent1"/>
+          </a:effectRef>
+          <a:fontRef idx="minor">
+            <a:schemeClr val="lt1"/>
+          </a:fontRef>
+        </p:style>
+        <p:txBody>
+          <a:bodyPr rtlCol="0" anchor="ctr"/>
+          <a:lstStyle/>
+          <a:p>
+            <a:pPr algn="ctr"/>
+            <a:endParaRPr lang="de-DE"/>
+          </a:p>
+        </p:txBody>
+      </p:sp>
+      <p:sp>
+        <p:nvSpPr>
+          <p:cNvPr id="4" name="turned-2">
+            <a:extLst>
+              <a:ext uri="{FF2B5EF4-FFF2-40B4-BE49-F238E27FC236}">
+                <a16:creationId xmlns:a16="http://schemas.microsoft.com/office/drawing/2014/main" id="{45095E88-1B56-148C-906B-59760DCA2136}"/>
+              </a:ext>
+            </a:extLst>
+          </p:cNvPr>
+          <p:cNvSpPr/>
+          <p:nvPr/>
+        </p:nvSpPr>
+        <p:spPr>
+          <a:xfrm rot="1800000">
+            <a:off x="6604000" y="1016000"/>
+            <a:ext cx="1651000" cy="1270000"/>
+          </a:xfrm>
+          <a:prstGeom prst="rect">
+            <a:avLst/>
+          </a:prstGeom>
+          <a:solidFill>
+            <a:srgbClr val="4472C4"/>
+          </a:solidFill>
+          <a:ln w="19050" cap="flat" cmpd="sng" algn="ctr">
+            <a:noFill/>
+            <a:prstDash val="solid"/>
+            <a:miter lim="800000"/>
+          </a:ln>
+          <a:effectLst xmlns:a="http://schemas.openxmlformats.org/drawingml/2006/main">
+            <a:outerShdw dist="190500" dir="2700000" rotWithShape="1">
+              <a:srgbClr val="000000">
+                <a:alpha val="50000"/>
+              </a:srgbClr>
+            </a:outerShdw>
+          </a:effectLst>
+          <a:extLst>
+            <a:ext uri="{91240B29-F687-4F45-9708-019B960494DF}">
+              <a14:hiddenLine xmlns:a14="http://schemas.microsoft.com/office/drawing/2010/main" w="19050" cap="flat" cmpd="sng" algn="ctr">
+                <a:solidFill>
+                  <a:schemeClr val="accent1">
+                    <a:shade val="15000"/>
+                  </a:schemeClr>
+                </a:solidFill>
+                <a:prstDash val="solid"/>
+                <a:miter lim="800000"/>
+              </a14:hiddenLine>
+            </a:ext>
+          </a:extLst>
+        </p:spPr>
+        <p:style>
+          <a:lnRef idx="2">
+            <a:schemeClr val="accent1">
+              <a:shade val="15000"/>
+            </a:schemeClr>
+          </a:lnRef>
+          <a:fillRef idx="1">
+            <a:schemeClr val="accent1"/>
+          </a:fillRef>
+          <a:effectRef idx="0">
+            <a:schemeClr val="accent1"/>
+          </a:effectRef>
+          <a:fontRef idx="minor">
+            <a:schemeClr val="lt1"/>
+          </a:fontRef>
+        </p:style>
+        <p:txBody>
+          <a:bodyPr rtlCol="0" anchor="ctr"/>
+          <a:lstStyle/>
+          <a:p>
+            <a:pPr algn="ctr"/>
+            <a:endParaRPr lang="de-DE"/>
+          </a:p>
+        </p:txBody>
+      </p:sp>
+      <p:sp>
+        <p:nvSpPr>
+          <p:cNvPr id="5" name="turned-3">
+            <a:extLst>
+              <a:ext uri="{FF2B5EF4-FFF2-40B4-BE49-F238E27FC236}">
+                <a16:creationId xmlns:a16="http://schemas.microsoft.com/office/drawing/2014/main" id="{DA543B73-9AB1-11D1-0328-22FF4EF3D093}"/>
+              </a:ext>
+            </a:extLst>
+          </p:cNvPr>
+          <p:cNvSpPr/>
+          <p:nvPr/>
+        </p:nvSpPr>
+        <p:spPr>
+          <a:xfrm rot="5400000">
+            <a:off x="9525000" y="1016000"/>
+            <a:ext cx="1651000" cy="1270000"/>
+          </a:xfrm>
+          <a:prstGeom prst="rect">
+            <a:avLst/>
+          </a:prstGeom>
+          <a:solidFill>
+            <a:srgbClr val="4472C4"/>
+          </a:solidFill>
+          <a:ln w="19050" cap="flat" cmpd="sng" algn="ctr">
+            <a:noFill/>
+            <a:prstDash val="solid"/>
+            <a:miter lim="800000"/>
+          </a:ln>
+          <a:effectLst xmlns:a="http://schemas.openxmlformats.org/drawingml/2006/main">
+            <a:outerShdw dist="190500" dir="2700000" rotWithShape="1">
+              <a:srgbClr val="000000">
+                <a:alpha val="50000"/>
+              </a:srgbClr>
+            </a:outerShdw>
+          </a:effectLst>
+          <a:extLst>
+            <a:ext uri="{91240B29-F687-4F45-9708-019B960494DF}">
+              <a14:hiddenLine xmlns:a14="http://schemas.microsoft.com/office/drawing/2010/main" w="19050" cap="flat" cmpd="sng" algn="ctr">
+                <a:solidFill>
+                  <a:schemeClr val="accent1">
+                    <a:shade val="15000"/>
+                  </a:schemeClr>
+                </a:solidFill>
+                <a:prstDash val="solid"/>
+                <a:miter lim="800000"/>
+              </a14:hiddenLine>
+            </a:ext>
+          </a:extLst>
+        </p:spPr>
+        <p:style>
+          <a:lnRef idx="2">
+            <a:schemeClr val="accent1">
+              <a:shade val="15000"/>
+            </a:schemeClr>
+          </a:lnRef>
+          <a:fillRef idx="1">
+            <a:schemeClr val="accent1"/>
+          </a:fillRef>
+          <a:effectRef idx="0">
+            <a:schemeClr val="accent1"/>
+          </a:effectRef>
+          <a:fontRef idx="minor">
+            <a:schemeClr val="lt1"/>
+          </a:fontRef>
+        </p:style>
+        <p:txBody>
+          <a:bodyPr rtlCol="0" anchor="ctr"/>
+          <a:lstStyle/>
+          <a:p>
+            <a:pPr algn="ctr"/>
+            <a:endParaRPr lang="de-DE"/>
+          </a:p>
+        </p:txBody>
+      </p:sp>
+      <p:sp>
+        <p:nvSpPr>
+          <p:cNvPr id="6" name="turned-4">
+            <a:extLst>
+              <a:ext uri="{FF2B5EF4-FFF2-40B4-BE49-F238E27FC236}">
+                <a16:creationId xmlns:a16="http://schemas.microsoft.com/office/drawing/2014/main" id="{F6B42B56-767F-0E62-237B-BDA94D4A6389}"/>
+              </a:ext>
+            </a:extLst>
+          </p:cNvPr>
+          <p:cNvSpPr/>
+          <p:nvPr/>
+        </p:nvSpPr>
+        <p:spPr>
+          <a:xfrm rot="1800000">
+            <a:off x="762000" y="4318000"/>
+            <a:ext cx="1651000" cy="1270000"/>
+          </a:xfrm>
+          <a:prstGeom prst="rect">
+            <a:avLst/>
+          </a:prstGeom>
+          <a:solidFill>
+            <a:srgbClr val="4472C4"/>
+          </a:solidFill>
+          <a:ln w="19050" cap="flat" cmpd="sng" algn="ctr">
+            <a:noFill/>
+            <a:prstDash val="solid"/>
+            <a:miter lim="800000"/>
+          </a:ln>
+          <a:effectLst xmlns:a="http://schemas.openxmlformats.org/drawingml/2006/main">
+            <a:outerShdw dist="12700" dir="8100000" sy="-23000" kx="800400" algn="br" rotWithShape="0">
+              <a:srgbClr val="000000">
+                <a:alpha val="50000"/>
+              </a:srgbClr>
+            </a:outerShdw>
+          </a:effectLst>
+          <a:extLst>
+            <a:ext uri="{91240B29-F687-4F45-9708-019B960494DF}">
+              <a14:hiddenLine xmlns:a14="http://schemas.microsoft.com/office/drawing/2010/main" w="19050" cap="flat" cmpd="sng" algn="ctr">
+                <a:solidFill>
+                  <a:schemeClr val="accent1">
+                    <a:shade val="15000"/>
+                  </a:schemeClr>
+                </a:solidFill>
+                <a:prstDash val="solid"/>
+                <a:miter lim="800000"/>
+              </a14:hiddenLine>
+            </a:ext>
+          </a:extLst>
+        </p:spPr>
+        <p:style>
+          <a:lnRef idx="2">
+            <a:schemeClr val="accent1">
+              <a:shade val="15000"/>
+            </a:schemeClr>
+          </a:lnRef>
+          <a:fillRef idx="1">
+            <a:schemeClr val="accent1"/>
+          </a:fillRef>
+          <a:effectRef idx="0">
+            <a:schemeClr val="accent1"/>
+          </a:effectRef>
+          <a:fontRef idx="minor">
+            <a:schemeClr val="lt1"/>
+          </a:fontRef>
+        </p:style>
+        <p:txBody>
+          <a:bodyPr rtlCol="0" anchor="ctr"/>
+          <a:lstStyle/>
+          <a:p>
+            <a:pPr algn="ctr"/>
+            <a:endParaRPr lang="de-DE"/>
+          </a:p>
+        </p:txBody>
+      </p:sp>
+      <p:sp>
+        <p:nvSpPr>
+          <p:cNvPr id="7" name="turned-5">
+            <a:extLst>
+              <a:ext uri="{FF2B5EF4-FFF2-40B4-BE49-F238E27FC236}">
+                <a16:creationId xmlns:a16="http://schemas.microsoft.com/office/drawing/2014/main" id="{4D693258-FAA2-46AF-2689-61A1D3919947}"/>
+              </a:ext>
+            </a:extLst>
+          </p:cNvPr>
+          <p:cNvSpPr/>
+          <p:nvPr/>
+        </p:nvSpPr>
+        <p:spPr>
+          <a:xfrm flipH="1">
+            <a:off x="3683000" y="4318000"/>
+            <a:ext cx="1651000" cy="1270000"/>
+          </a:xfrm>
+          <a:prstGeom prst="rect">
+            <a:avLst/>
+          </a:prstGeom>
+          <a:solidFill>
+            <a:srgbClr val="4472C4"/>
+          </a:solidFill>
+          <a:ln w="19050" cap="flat" cmpd="sng" algn="ctr">
+            <a:noFill/>
+            <a:prstDash val="solid"/>
+            <a:miter lim="800000"/>
+          </a:ln>
+          <a:effectLst xmlns:a="http://schemas.openxmlformats.org/drawingml/2006/main">
+            <a:outerShdw dist="190500" dir="2700000" rotWithShape="0">
+              <a:srgbClr val="000000">
+                <a:alpha val="50000"/>
+              </a:srgbClr>
+            </a:outerShdw>
+          </a:effectLst>
+          <a:extLst>
+            <a:ext uri="{91240B29-F687-4F45-9708-019B960494DF}">
+              <a14:hiddenLine xmlns:a14="http://schemas.microsoft.com/office/drawing/2010/main" w="19050" cap="flat" cmpd="sng" algn="ctr">
+                <a:solidFill>
+                  <a:schemeClr val="accent1">
+                    <a:shade val="15000"/>
+                  </a:schemeClr>
+                </a:solidFill>
+                <a:prstDash val="solid"/>
+                <a:miter lim="800000"/>
+              </a14:hiddenLine>
+            </a:ext>
+          </a:extLst>
+        </p:spPr>
+        <p:style>
+          <a:lnRef idx="2">
+            <a:schemeClr val="accent1">
+              <a:shade val="15000"/>
+            </a:schemeClr>
+          </a:lnRef>
+          <a:fillRef idx="1">
+            <a:schemeClr val="accent1"/>
+          </a:fillRef>
+          <a:effectRef idx="0">
+            <a:schemeClr val="accent1"/>
+          </a:effectRef>
+          <a:fontRef idx="minor">
+            <a:schemeClr val="lt1"/>
+          </a:fontRef>
+        </p:style>
+        <p:txBody>
+          <a:bodyPr rtlCol="0" anchor="ctr"/>
+          <a:lstStyle/>
+          <a:p>
+            <a:pPr algn="ctr"/>
+            <a:endParaRPr lang="de-DE"/>
+          </a:p>
+        </p:txBody>
+      </p:sp>
+      <p:sp>
+        <p:nvSpPr>
+          <p:cNvPr id="8" name="turned-6">
+            <a:extLst>
+              <a:ext uri="{FF2B5EF4-FFF2-40B4-BE49-F238E27FC236}">
+                <a16:creationId xmlns:a16="http://schemas.microsoft.com/office/drawing/2014/main" id="{1CDB972F-65D1-C236-A394-20F361D3E2F8}"/>
+              </a:ext>
+            </a:extLst>
+          </p:cNvPr>
+          <p:cNvSpPr/>
+          <p:nvPr/>
+        </p:nvSpPr>
+        <p:spPr>
+          <a:xfrm rot="12000000">
+            <a:off x="6604000" y="4318000"/>
+            <a:ext cx="1651000" cy="1270000"/>
+          </a:xfrm>
+          <a:prstGeom prst="rect">
+            <a:avLst/>
+          </a:prstGeom>
+          <a:solidFill>
+            <a:srgbClr val="4472C4"/>
+          </a:solidFill>
+          <a:ln w="19050" cap="flat" cmpd="sng" algn="ctr">
+            <a:noFill/>
+            <a:prstDash val="solid"/>
+            <a:miter lim="800000"/>
+          </a:ln>
+          <a:effectLst xmlns:a="http://schemas.openxmlformats.org/drawingml/2006/main">
+            <a:outerShdw dist="190500" dir="2700000" rotWithShape="0">
+              <a:srgbClr val="000000">
+                <a:alpha val="50000"/>
+              </a:srgbClr>
+            </a:outerShdw>
+          </a:effectLst>
+          <a:extLst>
+            <a:ext uri="{91240B29-F687-4F45-9708-019B960494DF}">
+              <a14:hiddenLine xmlns:a14="http://schemas.microsoft.com/office/drawing/2010/main" w="19050" cap="flat" cmpd="sng" algn="ctr">
+                <a:solidFill>
+                  <a:schemeClr val="accent1">
+                    <a:shade val="15000"/>
+                  </a:schemeClr>
+                </a:solidFill>
+                <a:prstDash val="solid"/>
+                <a:miter lim="800000"/>
+              </a14:hiddenLine>
+            </a:ext>
+          </a:extLst>
+        </p:spPr>
+        <p:style>
+          <a:lnRef idx="2">
+            <a:schemeClr val="accent1">
+              <a:shade val="15000"/>
+            </a:schemeClr>
+          </a:lnRef>
+          <a:fillRef idx="1">
+            <a:schemeClr val="accent1"/>
+          </a:fillRef>
+          <a:effectRef idx="0">
+            <a:schemeClr val="accent1"/>
+          </a:effectRef>
+          <a:fontRef idx="minor">
+            <a:schemeClr val="lt1"/>
+          </a:fontRef>
+        </p:style>
+        <p:txBody>
+          <a:bodyPr rtlCol="0" anchor="ctr"/>
+          <a:lstStyle/>
+          <a:p>
+            <a:pPr algn="ctr"/>
+            <a:endParaRPr lang="de-DE"/>
+          </a:p>
+        </p:txBody>
+      </p:sp>
+      <p:sp>
+        <p:nvSpPr>
+          <p:cNvPr id="9" name="turned-7">
+            <a:extLst>
+              <a:ext uri="{FF2B5EF4-FFF2-40B4-BE49-F238E27FC236}">
+                <a16:creationId xmlns:a16="http://schemas.microsoft.com/office/drawing/2014/main" id="{C523081F-AC63-7F65-F484-9D842B79568C}"/>
+              </a:ext>
+            </a:extLst>
+          </p:cNvPr>
+          <p:cNvSpPr/>
+          <p:nvPr/>
+        </p:nvSpPr>
+        <p:spPr>
+          <a:xfrm rot="1800000">
+            <a:off x="9525000" y="4318000"/>
+            <a:ext cx="1651000" cy="1270000"/>
+          </a:xfrm>
+          <a:prstGeom prst="rect">
+            <a:avLst/>
+          </a:prstGeom>
+          <a:solidFill>
+            <a:srgbClr val="4472C4"/>
+          </a:solidFill>
+          <a:ln w="19050" cap="flat" cmpd="sng" algn="ctr">
+            <a:noFill/>
+            <a:prstDash val="solid"/>
+            <a:miter lim="800000"/>
+          </a:ln>
+          <a:effectLst xmlns:a="http://schemas.openxmlformats.org/drawingml/2006/main">
+            <a:outerShdw dist="12700" dir="8100000" sy="-23000" kx="800400" algn="br" rotWithShape="1">
+              <a:srgbClr val="000000">
+                <a:alpha val="50000"/>
+              </a:srgbClr>
+            </a:outerShdw>
+          </a:effectLst>
+          <a:extLst>
+            <a:ext uri="{91240B29-F687-4F45-9708-019B960494DF}">
+              <a14:hiddenLine xmlns:a14="http://schemas.microsoft.com/office/drawing/2010/main" w="19050" cap="flat" cmpd="sng" algn="ctr">
+                <a:solidFill>
+                  <a:schemeClr val="accent1">
+                    <a:shade val="15000"/>
+                  </a:schemeClr>
+                </a:solidFill>
+                <a:prstDash val="solid"/>
+                <a:miter lim="800000"/>
+              </a14:hiddenLine>
+            </a:ext>
+          </a:extLst>
+        </p:spPr>
+        <p:style>
+          <a:lnRef idx="2">
+            <a:schemeClr val="accent1">
+              <a:shade val="15000"/>
+            </a:schemeClr>
+          </a:lnRef>
+          <a:fillRef idx="1">
+            <a:schemeClr val="accent1"/>
+          </a:fillRef>
+          <a:effectRef idx="0">
+            <a:schemeClr val="accent1"/>
+          </a:effectRef>
+          <a:fontRef idx="minor">
+            <a:schemeClr val="lt1"/>
+          </a:fontRef>
+        </p:style>
+        <p:txBody>
+          <a:bodyPr rtlCol="0" anchor="ctr"/>
+          <a:lstStyle/>
+          <a:p>
+            <a:pPr algn="ctr"/>
+            <a:endParaRPr lang="de-DE"/>
+          </a:p>
+        </p:txBody>
+      </p:sp>
+    </p:spTree>
+    <p:extLst>
+      <p:ext uri="{BB962C8B-B14F-4D97-AF65-F5344CB8AC3E}">
+        <p14:creationId xmlns:p14="http://schemas.microsoft.com/office/powerpoint/2010/main" val="2821036149"/>
       </p:ext>
     </p:extLst>
   </p:cSld>

--- a/tests/corpus/pptx/generated/effects.pptx
+++ b/tests/corpus/pptx/generated/effects.pptx
@@ -9,6 +9,7 @@
     <p:sldId id="257" r:id="rId3"/>
     <p:sldId id="258" r:id="rId4"/>
     <p:sldId id="259" r:id="rId5"/>
+    <p:sldId id="260" r:id="rId6"/>
   </p:sldIdLst>
   <p:sldSz cx="12192000" cy="6858000"/>
   <p:notesSz cx="6858000" cy="9144000"/>
@@ -132,7 +133,7 @@
           <p:cNvPr id="2" name="Titel 1">
             <a:extLst>
               <a:ext uri="{FF2B5EF4-FFF2-40B4-BE49-F238E27FC236}">
-                <a16:creationId xmlns:a16="http://schemas.microsoft.com/office/drawing/2014/main" id="{0A7199FF-1A45-EB29-A0BC-0EA369265080}"/>
+                <a16:creationId xmlns:a16="http://schemas.microsoft.com/office/drawing/2014/main" id="{8BEB1A70-84E6-6026-2A15-5BBB2240BB7A}"/>
               </a:ext>
             </a:extLst>
           </p:cNvPr>
@@ -169,7 +170,7 @@
           <p:cNvPr id="3" name="Untertitel 2">
             <a:extLst>
               <a:ext uri="{FF2B5EF4-FFF2-40B4-BE49-F238E27FC236}">
-                <a16:creationId xmlns:a16="http://schemas.microsoft.com/office/drawing/2014/main" id="{635552F4-D857-C88F-B9B6-839C18DAECCC}"/>
+                <a16:creationId xmlns:a16="http://schemas.microsoft.com/office/drawing/2014/main" id="{E9A8AC4B-4EDE-8E9A-49F4-25AFCB6F0480}"/>
               </a:ext>
             </a:extLst>
           </p:cNvPr>
@@ -239,7 +240,7 @@
           <p:cNvPr id="4" name="Datumsplatzhalter 3">
             <a:extLst>
               <a:ext uri="{FF2B5EF4-FFF2-40B4-BE49-F238E27FC236}">
-                <a16:creationId xmlns:a16="http://schemas.microsoft.com/office/drawing/2014/main" id="{95999C38-F840-427D-78D0-4D9FA453A46E}"/>
+                <a16:creationId xmlns:a16="http://schemas.microsoft.com/office/drawing/2014/main" id="{BC5AA442-8D19-4B5D-D498-2F00885A9997}"/>
               </a:ext>
             </a:extLst>
           </p:cNvPr>
@@ -255,7 +256,7 @@
           <a:bodyPr/>
           <a:lstStyle/>
           <a:p>
-            <a:fld id="{5A1AF197-8666-45A1-A9DD-65DA68AEA0EB}" type="datetimeFigureOut">
+            <a:fld id="{B2B075A0-D846-4290-88CC-C140D1C58584}" type="datetimeFigureOut">
               <a:rPr lang="de-DE" smtClean="0"/>
               <a:t>08.10.2026</a:t>
             </a:fld>
@@ -268,7 +269,7 @@
           <p:cNvPr id="5" name="Fußzeilenplatzhalter 4">
             <a:extLst>
               <a:ext uri="{FF2B5EF4-FFF2-40B4-BE49-F238E27FC236}">
-                <a16:creationId xmlns:a16="http://schemas.microsoft.com/office/drawing/2014/main" id="{09DA14AC-79FD-C1B9-6E65-4EF3646A7740}"/>
+                <a16:creationId xmlns:a16="http://schemas.microsoft.com/office/drawing/2014/main" id="{50674454-EC0C-68DC-E077-151B50527042}"/>
               </a:ext>
             </a:extLst>
           </p:cNvPr>
@@ -293,7 +294,7 @@
           <p:cNvPr id="6" name="Foliennummernplatzhalter 5">
             <a:extLst>
               <a:ext uri="{FF2B5EF4-FFF2-40B4-BE49-F238E27FC236}">
-                <a16:creationId xmlns:a16="http://schemas.microsoft.com/office/drawing/2014/main" id="{4D73CA68-EBAD-AC26-0814-CC06634918CC}"/>
+                <a16:creationId xmlns:a16="http://schemas.microsoft.com/office/drawing/2014/main" id="{D35CE148-0999-1885-164E-084F26064FB6}"/>
               </a:ext>
             </a:extLst>
           </p:cNvPr>
@@ -309,7 +310,7 @@
           <a:bodyPr/>
           <a:lstStyle/>
           <a:p>
-            <a:fld id="{FD7A2B11-542E-4CA3-8CAD-ADBF93301D0C}" type="slidenum">
+            <a:fld id="{56A1CD77-F38E-452D-AE70-F639BBE63637}" type="slidenum">
               <a:rPr lang="de-DE" smtClean="0"/>
               <a:t>‹Nr.›</a:t>
             </a:fld>
@@ -320,7 +321,7 @@
     </p:spTree>
     <p:extLst>
       <p:ext uri="{BB962C8B-B14F-4D97-AF65-F5344CB8AC3E}">
-        <p14:creationId xmlns:p14="http://schemas.microsoft.com/office/powerpoint/2010/main" val="1518090723"/>
+        <p14:creationId xmlns:p14="http://schemas.microsoft.com/office/powerpoint/2010/main" val="278253278"/>
       </p:ext>
     </p:extLst>
   </p:cSld>
@@ -352,7 +353,7 @@
           <p:cNvPr id="2" name="Titel 1">
             <a:extLst>
               <a:ext uri="{FF2B5EF4-FFF2-40B4-BE49-F238E27FC236}">
-                <a16:creationId xmlns:a16="http://schemas.microsoft.com/office/drawing/2014/main" id="{C2D471B9-DACF-73F3-4910-A236AC245575}"/>
+                <a16:creationId xmlns:a16="http://schemas.microsoft.com/office/drawing/2014/main" id="{E4C3E5E1-A00B-5E36-D19E-FF4719EE7754}"/>
               </a:ext>
             </a:extLst>
           </p:cNvPr>
@@ -380,7 +381,7 @@
           <p:cNvPr id="3" name="Vertikaler Textplatzhalter 2">
             <a:extLst>
               <a:ext uri="{FF2B5EF4-FFF2-40B4-BE49-F238E27FC236}">
-                <a16:creationId xmlns:a16="http://schemas.microsoft.com/office/drawing/2014/main" id="{951D566B-99B9-9C48-292E-2E1A7FD6694F}"/>
+                <a16:creationId xmlns:a16="http://schemas.microsoft.com/office/drawing/2014/main" id="{CC5BB5E4-7845-F138-9CC2-427D433E2935}"/>
               </a:ext>
             </a:extLst>
           </p:cNvPr>
@@ -437,7 +438,7 @@
           <p:cNvPr id="4" name="Datumsplatzhalter 3">
             <a:extLst>
               <a:ext uri="{FF2B5EF4-FFF2-40B4-BE49-F238E27FC236}">
-                <a16:creationId xmlns:a16="http://schemas.microsoft.com/office/drawing/2014/main" id="{5E2A96C1-E8E7-57C9-9F4B-7B979C3FFDD4}"/>
+                <a16:creationId xmlns:a16="http://schemas.microsoft.com/office/drawing/2014/main" id="{E07879E2-F826-7EBE-579B-0186D7BB00B1}"/>
               </a:ext>
             </a:extLst>
           </p:cNvPr>
@@ -453,7 +454,7 @@
           <a:bodyPr/>
           <a:lstStyle/>
           <a:p>
-            <a:fld id="{5A1AF197-8666-45A1-A9DD-65DA68AEA0EB}" type="datetimeFigureOut">
+            <a:fld id="{B2B075A0-D846-4290-88CC-C140D1C58584}" type="datetimeFigureOut">
               <a:rPr lang="de-DE" smtClean="0"/>
               <a:t>08.10.2026</a:t>
             </a:fld>
@@ -466,7 +467,7 @@
           <p:cNvPr id="5" name="Fußzeilenplatzhalter 4">
             <a:extLst>
               <a:ext uri="{FF2B5EF4-FFF2-40B4-BE49-F238E27FC236}">
-                <a16:creationId xmlns:a16="http://schemas.microsoft.com/office/drawing/2014/main" id="{26E1B800-A5C4-1EF5-CF70-A1C1DF6ADAFD}"/>
+                <a16:creationId xmlns:a16="http://schemas.microsoft.com/office/drawing/2014/main" id="{B5E0305B-D00A-A422-81C3-4318549D7737}"/>
               </a:ext>
             </a:extLst>
           </p:cNvPr>
@@ -491,7 +492,7 @@
           <p:cNvPr id="6" name="Foliennummernplatzhalter 5">
             <a:extLst>
               <a:ext uri="{FF2B5EF4-FFF2-40B4-BE49-F238E27FC236}">
-                <a16:creationId xmlns:a16="http://schemas.microsoft.com/office/drawing/2014/main" id="{4C33FB90-B6C9-FCFE-BB89-6D2C34CCCC09}"/>
+                <a16:creationId xmlns:a16="http://schemas.microsoft.com/office/drawing/2014/main" id="{435C540F-9CBA-2FA1-722F-81334D497F07}"/>
               </a:ext>
             </a:extLst>
           </p:cNvPr>
@@ -507,7 +508,7 @@
           <a:bodyPr/>
           <a:lstStyle/>
           <a:p>
-            <a:fld id="{FD7A2B11-542E-4CA3-8CAD-ADBF93301D0C}" type="slidenum">
+            <a:fld id="{56A1CD77-F38E-452D-AE70-F639BBE63637}" type="slidenum">
               <a:rPr lang="de-DE" smtClean="0"/>
               <a:t>‹Nr.›</a:t>
             </a:fld>
@@ -518,7 +519,7 @@
     </p:spTree>
     <p:extLst>
       <p:ext uri="{BB962C8B-B14F-4D97-AF65-F5344CB8AC3E}">
-        <p14:creationId xmlns:p14="http://schemas.microsoft.com/office/powerpoint/2010/main" val="3911492640"/>
+        <p14:creationId xmlns:p14="http://schemas.microsoft.com/office/powerpoint/2010/main" val="2557100837"/>
       </p:ext>
     </p:extLst>
   </p:cSld>
@@ -550,7 +551,7 @@
           <p:cNvPr id="2" name="Vertikaler Titel 1">
             <a:extLst>
               <a:ext uri="{FF2B5EF4-FFF2-40B4-BE49-F238E27FC236}">
-                <a16:creationId xmlns:a16="http://schemas.microsoft.com/office/drawing/2014/main" id="{FA0F1A3C-1479-6884-1416-B0A0961B3680}"/>
+                <a16:creationId xmlns:a16="http://schemas.microsoft.com/office/drawing/2014/main" id="{26A55FD1-F958-65C4-BF8E-DCC26EC2FF04}"/>
               </a:ext>
             </a:extLst>
           </p:cNvPr>
@@ -583,7 +584,7 @@
           <p:cNvPr id="3" name="Vertikaler Textplatzhalter 2">
             <a:extLst>
               <a:ext uri="{FF2B5EF4-FFF2-40B4-BE49-F238E27FC236}">
-                <a16:creationId xmlns:a16="http://schemas.microsoft.com/office/drawing/2014/main" id="{B77E2EDB-B08E-4A97-ABCA-81778AB8F83B}"/>
+                <a16:creationId xmlns:a16="http://schemas.microsoft.com/office/drawing/2014/main" id="{E6FB4F81-9B13-0373-7C3B-5B3641B204FD}"/>
               </a:ext>
             </a:extLst>
           </p:cNvPr>
@@ -645,7 +646,7 @@
           <p:cNvPr id="4" name="Datumsplatzhalter 3">
             <a:extLst>
               <a:ext uri="{FF2B5EF4-FFF2-40B4-BE49-F238E27FC236}">
-                <a16:creationId xmlns:a16="http://schemas.microsoft.com/office/drawing/2014/main" id="{F7278748-A8E4-B974-554A-4B8390B89CD0}"/>
+                <a16:creationId xmlns:a16="http://schemas.microsoft.com/office/drawing/2014/main" id="{CE65AB08-1927-FA3A-275D-7532CC89E5B1}"/>
               </a:ext>
             </a:extLst>
           </p:cNvPr>
@@ -661,7 +662,7 @@
           <a:bodyPr/>
           <a:lstStyle/>
           <a:p>
-            <a:fld id="{5A1AF197-8666-45A1-A9DD-65DA68AEA0EB}" type="datetimeFigureOut">
+            <a:fld id="{B2B075A0-D846-4290-88CC-C140D1C58584}" type="datetimeFigureOut">
               <a:rPr lang="de-DE" smtClean="0"/>
               <a:t>08.10.2026</a:t>
             </a:fld>
@@ -674,7 +675,7 @@
           <p:cNvPr id="5" name="Fußzeilenplatzhalter 4">
             <a:extLst>
               <a:ext uri="{FF2B5EF4-FFF2-40B4-BE49-F238E27FC236}">
-                <a16:creationId xmlns:a16="http://schemas.microsoft.com/office/drawing/2014/main" id="{C496F664-2D0B-E9FF-0148-7EB4FFCD3E23}"/>
+                <a16:creationId xmlns:a16="http://schemas.microsoft.com/office/drawing/2014/main" id="{96D90D63-E3A2-D2FB-4D38-329A410290B8}"/>
               </a:ext>
             </a:extLst>
           </p:cNvPr>
@@ -699,7 +700,7 @@
           <p:cNvPr id="6" name="Foliennummernplatzhalter 5">
             <a:extLst>
               <a:ext uri="{FF2B5EF4-FFF2-40B4-BE49-F238E27FC236}">
-                <a16:creationId xmlns:a16="http://schemas.microsoft.com/office/drawing/2014/main" id="{7B71E32C-4056-C975-9368-BD507506F8B9}"/>
+                <a16:creationId xmlns:a16="http://schemas.microsoft.com/office/drawing/2014/main" id="{154CDC3F-4262-41BF-2D6F-375C6B361498}"/>
               </a:ext>
             </a:extLst>
           </p:cNvPr>
@@ -715,7 +716,7 @@
           <a:bodyPr/>
           <a:lstStyle/>
           <a:p>
-            <a:fld id="{FD7A2B11-542E-4CA3-8CAD-ADBF93301D0C}" type="slidenum">
+            <a:fld id="{56A1CD77-F38E-452D-AE70-F639BBE63637}" type="slidenum">
               <a:rPr lang="de-DE" smtClean="0"/>
               <a:t>‹Nr.›</a:t>
             </a:fld>
@@ -726,7 +727,7 @@
     </p:spTree>
     <p:extLst>
       <p:ext uri="{BB962C8B-B14F-4D97-AF65-F5344CB8AC3E}">
-        <p14:creationId xmlns:p14="http://schemas.microsoft.com/office/powerpoint/2010/main" val="1763581593"/>
+        <p14:creationId xmlns:p14="http://schemas.microsoft.com/office/powerpoint/2010/main" val="1859356957"/>
       </p:ext>
     </p:extLst>
   </p:cSld>
@@ -758,7 +759,7 @@
           <p:cNvPr id="2" name="Titel 1">
             <a:extLst>
               <a:ext uri="{FF2B5EF4-FFF2-40B4-BE49-F238E27FC236}">
-                <a16:creationId xmlns:a16="http://schemas.microsoft.com/office/drawing/2014/main" id="{06755BAF-71E2-3262-D3F5-0467D0BE2F7A}"/>
+                <a16:creationId xmlns:a16="http://schemas.microsoft.com/office/drawing/2014/main" id="{6227ED53-CE58-9DA2-8318-6625664D0170}"/>
               </a:ext>
             </a:extLst>
           </p:cNvPr>
@@ -786,7 +787,7 @@
           <p:cNvPr id="3" name="Inhaltsplatzhalter 2">
             <a:extLst>
               <a:ext uri="{FF2B5EF4-FFF2-40B4-BE49-F238E27FC236}">
-                <a16:creationId xmlns:a16="http://schemas.microsoft.com/office/drawing/2014/main" id="{81E498FD-4E31-362D-976A-A05120E89C00}"/>
+                <a16:creationId xmlns:a16="http://schemas.microsoft.com/office/drawing/2014/main" id="{F17FD985-BE06-C63D-81BE-363E98471C25}"/>
               </a:ext>
             </a:extLst>
           </p:cNvPr>
@@ -843,7 +844,7 @@
           <p:cNvPr id="4" name="Datumsplatzhalter 3">
             <a:extLst>
               <a:ext uri="{FF2B5EF4-FFF2-40B4-BE49-F238E27FC236}">
-                <a16:creationId xmlns:a16="http://schemas.microsoft.com/office/drawing/2014/main" id="{540030CB-C414-0BE1-AB5E-6CD1644FB07C}"/>
+                <a16:creationId xmlns:a16="http://schemas.microsoft.com/office/drawing/2014/main" id="{44F644B3-4B20-4972-B2FC-5725C037E727}"/>
               </a:ext>
             </a:extLst>
           </p:cNvPr>
@@ -859,7 +860,7 @@
           <a:bodyPr/>
           <a:lstStyle/>
           <a:p>
-            <a:fld id="{5A1AF197-8666-45A1-A9DD-65DA68AEA0EB}" type="datetimeFigureOut">
+            <a:fld id="{B2B075A0-D846-4290-88CC-C140D1C58584}" type="datetimeFigureOut">
               <a:rPr lang="de-DE" smtClean="0"/>
               <a:t>08.10.2026</a:t>
             </a:fld>
@@ -872,7 +873,7 @@
           <p:cNvPr id="5" name="Fußzeilenplatzhalter 4">
             <a:extLst>
               <a:ext uri="{FF2B5EF4-FFF2-40B4-BE49-F238E27FC236}">
-                <a16:creationId xmlns:a16="http://schemas.microsoft.com/office/drawing/2014/main" id="{87ECD622-2577-1E52-E593-5B841F6738BA}"/>
+                <a16:creationId xmlns:a16="http://schemas.microsoft.com/office/drawing/2014/main" id="{57034BFE-1986-3389-74D0-C7BE33A383D9}"/>
               </a:ext>
             </a:extLst>
           </p:cNvPr>
@@ -897,7 +898,7 @@
           <p:cNvPr id="6" name="Foliennummernplatzhalter 5">
             <a:extLst>
               <a:ext uri="{FF2B5EF4-FFF2-40B4-BE49-F238E27FC236}">
-                <a16:creationId xmlns:a16="http://schemas.microsoft.com/office/drawing/2014/main" id="{C1359DD1-8217-6340-BF8E-233DA944D135}"/>
+                <a16:creationId xmlns:a16="http://schemas.microsoft.com/office/drawing/2014/main" id="{F50D6AD8-165A-3412-EEAB-B866DA57C87E}"/>
               </a:ext>
             </a:extLst>
           </p:cNvPr>
@@ -913,7 +914,7 @@
           <a:bodyPr/>
           <a:lstStyle/>
           <a:p>
-            <a:fld id="{FD7A2B11-542E-4CA3-8CAD-ADBF93301D0C}" type="slidenum">
+            <a:fld id="{56A1CD77-F38E-452D-AE70-F639BBE63637}" type="slidenum">
               <a:rPr lang="de-DE" smtClean="0"/>
               <a:t>‹Nr.›</a:t>
             </a:fld>
@@ -924,7 +925,7 @@
     </p:spTree>
     <p:extLst>
       <p:ext uri="{BB962C8B-B14F-4D97-AF65-F5344CB8AC3E}">
-        <p14:creationId xmlns:p14="http://schemas.microsoft.com/office/powerpoint/2010/main" val="3394778371"/>
+        <p14:creationId xmlns:p14="http://schemas.microsoft.com/office/powerpoint/2010/main" val="1222884156"/>
       </p:ext>
     </p:extLst>
   </p:cSld>
@@ -956,7 +957,7 @@
           <p:cNvPr id="2" name="Titel 1">
             <a:extLst>
               <a:ext uri="{FF2B5EF4-FFF2-40B4-BE49-F238E27FC236}">
-                <a16:creationId xmlns:a16="http://schemas.microsoft.com/office/drawing/2014/main" id="{ABDA4AC9-E63C-56F2-D876-74DEBFE22E9D}"/>
+                <a16:creationId xmlns:a16="http://schemas.microsoft.com/office/drawing/2014/main" id="{E21BF7F7-F7E8-80A3-16CC-D47D0EB1A1DA}"/>
               </a:ext>
             </a:extLst>
           </p:cNvPr>
@@ -993,7 +994,7 @@
           <p:cNvPr id="3" name="Textplatzhalter 2">
             <a:extLst>
               <a:ext uri="{FF2B5EF4-FFF2-40B4-BE49-F238E27FC236}">
-                <a16:creationId xmlns:a16="http://schemas.microsoft.com/office/drawing/2014/main" id="{858FDD71-7A18-4A08-BF66-A57A18828071}"/>
+                <a16:creationId xmlns:a16="http://schemas.microsoft.com/office/drawing/2014/main" id="{93739F2F-63FC-79CD-BB13-7454D84D8F9A}"/>
               </a:ext>
             </a:extLst>
           </p:cNvPr>
@@ -1118,7 +1119,7 @@
           <p:cNvPr id="4" name="Datumsplatzhalter 3">
             <a:extLst>
               <a:ext uri="{FF2B5EF4-FFF2-40B4-BE49-F238E27FC236}">
-                <a16:creationId xmlns:a16="http://schemas.microsoft.com/office/drawing/2014/main" id="{F864D8D5-2F68-5533-6D66-95CF2353EF8B}"/>
+                <a16:creationId xmlns:a16="http://schemas.microsoft.com/office/drawing/2014/main" id="{3E1ED8A6-4C6E-95DC-D9CB-A0582A9277C8}"/>
               </a:ext>
             </a:extLst>
           </p:cNvPr>
@@ -1134,7 +1135,7 @@
           <a:bodyPr/>
           <a:lstStyle/>
           <a:p>
-            <a:fld id="{5A1AF197-8666-45A1-A9DD-65DA68AEA0EB}" type="datetimeFigureOut">
+            <a:fld id="{B2B075A0-D846-4290-88CC-C140D1C58584}" type="datetimeFigureOut">
               <a:rPr lang="de-DE" smtClean="0"/>
               <a:t>08.10.2026</a:t>
             </a:fld>
@@ -1147,7 +1148,7 @@
           <p:cNvPr id="5" name="Fußzeilenplatzhalter 4">
             <a:extLst>
               <a:ext uri="{FF2B5EF4-FFF2-40B4-BE49-F238E27FC236}">
-                <a16:creationId xmlns:a16="http://schemas.microsoft.com/office/drawing/2014/main" id="{B9B2F4A6-462A-1DB1-630E-1F29B9AA383F}"/>
+                <a16:creationId xmlns:a16="http://schemas.microsoft.com/office/drawing/2014/main" id="{A93184EC-A68E-7ABC-CFDD-120CABCD5903}"/>
               </a:ext>
             </a:extLst>
           </p:cNvPr>
@@ -1172,7 +1173,7 @@
           <p:cNvPr id="6" name="Foliennummernplatzhalter 5">
             <a:extLst>
               <a:ext uri="{FF2B5EF4-FFF2-40B4-BE49-F238E27FC236}">
-                <a16:creationId xmlns:a16="http://schemas.microsoft.com/office/drawing/2014/main" id="{A9A10DA5-F096-DD7C-25B9-177F49297628}"/>
+                <a16:creationId xmlns:a16="http://schemas.microsoft.com/office/drawing/2014/main" id="{1EEFA52E-6DB3-BAAF-C58B-C6EF75F49AA8}"/>
               </a:ext>
             </a:extLst>
           </p:cNvPr>
@@ -1188,7 +1189,7 @@
           <a:bodyPr/>
           <a:lstStyle/>
           <a:p>
-            <a:fld id="{FD7A2B11-542E-4CA3-8CAD-ADBF93301D0C}" type="slidenum">
+            <a:fld id="{56A1CD77-F38E-452D-AE70-F639BBE63637}" type="slidenum">
               <a:rPr lang="de-DE" smtClean="0"/>
               <a:t>‹Nr.›</a:t>
             </a:fld>
@@ -1199,7 +1200,7 @@
     </p:spTree>
     <p:extLst>
       <p:ext uri="{BB962C8B-B14F-4D97-AF65-F5344CB8AC3E}">
-        <p14:creationId xmlns:p14="http://schemas.microsoft.com/office/powerpoint/2010/main" val="3996943530"/>
+        <p14:creationId xmlns:p14="http://schemas.microsoft.com/office/powerpoint/2010/main" val="2874697670"/>
       </p:ext>
     </p:extLst>
   </p:cSld>
@@ -1231,7 +1232,7 @@
           <p:cNvPr id="2" name="Titel 1">
             <a:extLst>
               <a:ext uri="{FF2B5EF4-FFF2-40B4-BE49-F238E27FC236}">
-                <a16:creationId xmlns:a16="http://schemas.microsoft.com/office/drawing/2014/main" id="{4AF5849A-E7D1-25E1-B2DF-DACE3ECE6940}"/>
+                <a16:creationId xmlns:a16="http://schemas.microsoft.com/office/drawing/2014/main" id="{F8E782E3-7FDF-21E5-4ED6-D57A3413F53E}"/>
               </a:ext>
             </a:extLst>
           </p:cNvPr>
@@ -1259,7 +1260,7 @@
           <p:cNvPr id="3" name="Inhaltsplatzhalter 2">
             <a:extLst>
               <a:ext uri="{FF2B5EF4-FFF2-40B4-BE49-F238E27FC236}">
-                <a16:creationId xmlns:a16="http://schemas.microsoft.com/office/drawing/2014/main" id="{6DA4F8A0-5E08-1132-0557-604020CFC715}"/>
+                <a16:creationId xmlns:a16="http://schemas.microsoft.com/office/drawing/2014/main" id="{27D6975F-585E-B7A7-9753-71F01250D49D}"/>
               </a:ext>
             </a:extLst>
           </p:cNvPr>
@@ -1321,7 +1322,7 @@
           <p:cNvPr id="4" name="Inhaltsplatzhalter 3">
             <a:extLst>
               <a:ext uri="{FF2B5EF4-FFF2-40B4-BE49-F238E27FC236}">
-                <a16:creationId xmlns:a16="http://schemas.microsoft.com/office/drawing/2014/main" id="{6AE4F29D-760F-BC00-E5FC-FD7BB3B668FB}"/>
+                <a16:creationId xmlns:a16="http://schemas.microsoft.com/office/drawing/2014/main" id="{EA1B1BEB-D498-A875-1F04-F511228DB4C7}"/>
               </a:ext>
             </a:extLst>
           </p:cNvPr>
@@ -1383,7 +1384,7 @@
           <p:cNvPr id="5" name="Datumsplatzhalter 4">
             <a:extLst>
               <a:ext uri="{FF2B5EF4-FFF2-40B4-BE49-F238E27FC236}">
-                <a16:creationId xmlns:a16="http://schemas.microsoft.com/office/drawing/2014/main" id="{8F2264E7-C836-71A1-3851-92A6276F5B10}"/>
+                <a16:creationId xmlns:a16="http://schemas.microsoft.com/office/drawing/2014/main" id="{2FB3E54F-1571-C17D-E868-650941F13E2A}"/>
               </a:ext>
             </a:extLst>
           </p:cNvPr>
@@ -1399,7 +1400,7 @@
           <a:bodyPr/>
           <a:lstStyle/>
           <a:p>
-            <a:fld id="{5A1AF197-8666-45A1-A9DD-65DA68AEA0EB}" type="datetimeFigureOut">
+            <a:fld id="{B2B075A0-D846-4290-88CC-C140D1C58584}" type="datetimeFigureOut">
               <a:rPr lang="de-DE" smtClean="0"/>
               <a:t>08.10.2026</a:t>
             </a:fld>
@@ -1412,7 +1413,7 @@
           <p:cNvPr id="6" name="Fußzeilenplatzhalter 5">
             <a:extLst>
               <a:ext uri="{FF2B5EF4-FFF2-40B4-BE49-F238E27FC236}">
-                <a16:creationId xmlns:a16="http://schemas.microsoft.com/office/drawing/2014/main" id="{1B9ABD61-A37B-69EA-4DD7-C1249CA31325}"/>
+                <a16:creationId xmlns:a16="http://schemas.microsoft.com/office/drawing/2014/main" id="{85456782-9E56-8BF1-99C2-1840D854AA45}"/>
               </a:ext>
             </a:extLst>
           </p:cNvPr>
@@ -1437,7 +1438,7 @@
           <p:cNvPr id="7" name="Foliennummernplatzhalter 6">
             <a:extLst>
               <a:ext uri="{FF2B5EF4-FFF2-40B4-BE49-F238E27FC236}">
-                <a16:creationId xmlns:a16="http://schemas.microsoft.com/office/drawing/2014/main" id="{8AD97F0F-AFD6-0420-8A75-4EB3C475324E}"/>
+                <a16:creationId xmlns:a16="http://schemas.microsoft.com/office/drawing/2014/main" id="{D13FCEFE-58BD-6537-9F57-9D89BCF0BEC2}"/>
               </a:ext>
             </a:extLst>
           </p:cNvPr>
@@ -1453,7 +1454,7 @@
           <a:bodyPr/>
           <a:lstStyle/>
           <a:p>
-            <a:fld id="{FD7A2B11-542E-4CA3-8CAD-ADBF93301D0C}" type="slidenum">
+            <a:fld id="{56A1CD77-F38E-452D-AE70-F639BBE63637}" type="slidenum">
               <a:rPr lang="de-DE" smtClean="0"/>
               <a:t>‹Nr.›</a:t>
             </a:fld>
@@ -1464,7 +1465,7 @@
     </p:spTree>
     <p:extLst>
       <p:ext uri="{BB962C8B-B14F-4D97-AF65-F5344CB8AC3E}">
-        <p14:creationId xmlns:p14="http://schemas.microsoft.com/office/powerpoint/2010/main" val="3733309982"/>
+        <p14:creationId xmlns:p14="http://schemas.microsoft.com/office/powerpoint/2010/main" val="4019589627"/>
       </p:ext>
     </p:extLst>
   </p:cSld>
@@ -1496,7 +1497,7 @@
           <p:cNvPr id="2" name="Titel 1">
             <a:extLst>
               <a:ext uri="{FF2B5EF4-FFF2-40B4-BE49-F238E27FC236}">
-                <a16:creationId xmlns:a16="http://schemas.microsoft.com/office/drawing/2014/main" id="{DF7FCAD1-A880-F6F0-6428-688651BBE5F3}"/>
+                <a16:creationId xmlns:a16="http://schemas.microsoft.com/office/drawing/2014/main" id="{C243BEAD-7000-1EA3-E69E-F7AE1331853A}"/>
               </a:ext>
             </a:extLst>
           </p:cNvPr>
@@ -1529,7 +1530,7 @@
           <p:cNvPr id="3" name="Textplatzhalter 2">
             <a:extLst>
               <a:ext uri="{FF2B5EF4-FFF2-40B4-BE49-F238E27FC236}">
-                <a16:creationId xmlns:a16="http://schemas.microsoft.com/office/drawing/2014/main" id="{81BF47F1-9E9E-3934-36D0-F2C83BBB1160}"/>
+                <a16:creationId xmlns:a16="http://schemas.microsoft.com/office/drawing/2014/main" id="{0E917852-B675-A77D-D588-C5A461180BCF}"/>
               </a:ext>
             </a:extLst>
           </p:cNvPr>
@@ -1600,7 +1601,7 @@
           <p:cNvPr id="4" name="Inhaltsplatzhalter 3">
             <a:extLst>
               <a:ext uri="{FF2B5EF4-FFF2-40B4-BE49-F238E27FC236}">
-                <a16:creationId xmlns:a16="http://schemas.microsoft.com/office/drawing/2014/main" id="{36CDC8D7-BDC2-487D-7DA5-BE538BA407B5}"/>
+                <a16:creationId xmlns:a16="http://schemas.microsoft.com/office/drawing/2014/main" id="{5E693C4C-C048-FDF2-80F2-FAE814F6C53B}"/>
               </a:ext>
             </a:extLst>
           </p:cNvPr>
@@ -1662,7 +1663,7 @@
           <p:cNvPr id="5" name="Textplatzhalter 4">
             <a:extLst>
               <a:ext uri="{FF2B5EF4-FFF2-40B4-BE49-F238E27FC236}">
-                <a16:creationId xmlns:a16="http://schemas.microsoft.com/office/drawing/2014/main" id="{3B1D7BB4-11CE-C01C-1F2F-6AE1C77698CC}"/>
+                <a16:creationId xmlns:a16="http://schemas.microsoft.com/office/drawing/2014/main" id="{3D874796-3060-6B89-44F2-35D7CAFFBE6C}"/>
               </a:ext>
             </a:extLst>
           </p:cNvPr>
@@ -1733,7 +1734,7 @@
           <p:cNvPr id="6" name="Inhaltsplatzhalter 5">
             <a:extLst>
               <a:ext uri="{FF2B5EF4-FFF2-40B4-BE49-F238E27FC236}">
-                <a16:creationId xmlns:a16="http://schemas.microsoft.com/office/drawing/2014/main" id="{92FBE1FB-5DAF-62D7-FDAC-316D99A220BB}"/>
+                <a16:creationId xmlns:a16="http://schemas.microsoft.com/office/drawing/2014/main" id="{7973CD52-99C5-D93D-9508-6ECA6D3FEA28}"/>
               </a:ext>
             </a:extLst>
           </p:cNvPr>
@@ -1795,7 +1796,7 @@
           <p:cNvPr id="7" name="Datumsplatzhalter 6">
             <a:extLst>
               <a:ext uri="{FF2B5EF4-FFF2-40B4-BE49-F238E27FC236}">
-                <a16:creationId xmlns:a16="http://schemas.microsoft.com/office/drawing/2014/main" id="{5288D339-5A3F-CC80-289C-9F23D109CB35}"/>
+                <a16:creationId xmlns:a16="http://schemas.microsoft.com/office/drawing/2014/main" id="{24C206D3-598E-83AF-B475-33C56BF75862}"/>
               </a:ext>
             </a:extLst>
           </p:cNvPr>
@@ -1811,7 +1812,7 @@
           <a:bodyPr/>
           <a:lstStyle/>
           <a:p>
-            <a:fld id="{5A1AF197-8666-45A1-A9DD-65DA68AEA0EB}" type="datetimeFigureOut">
+            <a:fld id="{B2B075A0-D846-4290-88CC-C140D1C58584}" type="datetimeFigureOut">
               <a:rPr lang="de-DE" smtClean="0"/>
               <a:t>08.10.2026</a:t>
             </a:fld>
@@ -1824,7 +1825,7 @@
           <p:cNvPr id="8" name="Fußzeilenplatzhalter 7">
             <a:extLst>
               <a:ext uri="{FF2B5EF4-FFF2-40B4-BE49-F238E27FC236}">
-                <a16:creationId xmlns:a16="http://schemas.microsoft.com/office/drawing/2014/main" id="{31E237DA-2745-EBCD-C3A2-861475A7D85D}"/>
+                <a16:creationId xmlns:a16="http://schemas.microsoft.com/office/drawing/2014/main" id="{15BA3B99-8E32-5A2F-7ED2-D7C8016B40BE}"/>
               </a:ext>
             </a:extLst>
           </p:cNvPr>
@@ -1849,7 +1850,7 @@
           <p:cNvPr id="9" name="Foliennummernplatzhalter 8">
             <a:extLst>
               <a:ext uri="{FF2B5EF4-FFF2-40B4-BE49-F238E27FC236}">
-                <a16:creationId xmlns:a16="http://schemas.microsoft.com/office/drawing/2014/main" id="{7694FA05-D20A-7FB0-A4F2-6EF76ADFAAF1}"/>
+                <a16:creationId xmlns:a16="http://schemas.microsoft.com/office/drawing/2014/main" id="{9F1DE143-8C4C-F84F-1CC2-272C9A290AAB}"/>
               </a:ext>
             </a:extLst>
           </p:cNvPr>
@@ -1865,7 +1866,7 @@
           <a:bodyPr/>
           <a:lstStyle/>
           <a:p>
-            <a:fld id="{FD7A2B11-542E-4CA3-8CAD-ADBF93301D0C}" type="slidenum">
+            <a:fld id="{56A1CD77-F38E-452D-AE70-F639BBE63637}" type="slidenum">
               <a:rPr lang="de-DE" smtClean="0"/>
               <a:t>‹Nr.›</a:t>
             </a:fld>
@@ -1876,7 +1877,7 @@
     </p:spTree>
     <p:extLst>
       <p:ext uri="{BB962C8B-B14F-4D97-AF65-F5344CB8AC3E}">
-        <p14:creationId xmlns:p14="http://schemas.microsoft.com/office/powerpoint/2010/main" val="3608037728"/>
+        <p14:creationId xmlns:p14="http://schemas.microsoft.com/office/powerpoint/2010/main" val="1754774303"/>
       </p:ext>
     </p:extLst>
   </p:cSld>
@@ -1908,7 +1909,7 @@
           <p:cNvPr id="2" name="Titel 1">
             <a:extLst>
               <a:ext uri="{FF2B5EF4-FFF2-40B4-BE49-F238E27FC236}">
-                <a16:creationId xmlns:a16="http://schemas.microsoft.com/office/drawing/2014/main" id="{E45E1E03-7F49-7D4A-A8E8-FA673F3EEF06}"/>
+                <a16:creationId xmlns:a16="http://schemas.microsoft.com/office/drawing/2014/main" id="{B7FC9B37-0E03-44CB-304E-C756725FAA1F}"/>
               </a:ext>
             </a:extLst>
           </p:cNvPr>
@@ -1936,7 +1937,7 @@
           <p:cNvPr id="3" name="Datumsplatzhalter 2">
             <a:extLst>
               <a:ext uri="{FF2B5EF4-FFF2-40B4-BE49-F238E27FC236}">
-                <a16:creationId xmlns:a16="http://schemas.microsoft.com/office/drawing/2014/main" id="{571A424E-AA81-AEAE-B6C9-73C427F08E40}"/>
+                <a16:creationId xmlns:a16="http://schemas.microsoft.com/office/drawing/2014/main" id="{4DA16509-2077-8999-2517-41B21EF3048A}"/>
               </a:ext>
             </a:extLst>
           </p:cNvPr>
@@ -1952,7 +1953,7 @@
           <a:bodyPr/>
           <a:lstStyle/>
           <a:p>
-            <a:fld id="{5A1AF197-8666-45A1-A9DD-65DA68AEA0EB}" type="datetimeFigureOut">
+            <a:fld id="{B2B075A0-D846-4290-88CC-C140D1C58584}" type="datetimeFigureOut">
               <a:rPr lang="de-DE" smtClean="0"/>
               <a:t>08.10.2026</a:t>
             </a:fld>
@@ -1965,7 +1966,7 @@
           <p:cNvPr id="4" name="Fußzeilenplatzhalter 3">
             <a:extLst>
               <a:ext uri="{FF2B5EF4-FFF2-40B4-BE49-F238E27FC236}">
-                <a16:creationId xmlns:a16="http://schemas.microsoft.com/office/drawing/2014/main" id="{F23F30FF-A2F4-9657-DFE4-ADCE0196E561}"/>
+                <a16:creationId xmlns:a16="http://schemas.microsoft.com/office/drawing/2014/main" id="{384A81F3-D7D6-3491-4918-F8F10F42EC0E}"/>
               </a:ext>
             </a:extLst>
           </p:cNvPr>
@@ -1990,7 +1991,7 @@
           <p:cNvPr id="5" name="Foliennummernplatzhalter 4">
             <a:extLst>
               <a:ext uri="{FF2B5EF4-FFF2-40B4-BE49-F238E27FC236}">
-                <a16:creationId xmlns:a16="http://schemas.microsoft.com/office/drawing/2014/main" id="{0127FB7C-B101-D599-1C23-B658F1A3A7E4}"/>
+                <a16:creationId xmlns:a16="http://schemas.microsoft.com/office/drawing/2014/main" id="{3742CAFA-886B-45BA-3A2C-9C62AFBF5E88}"/>
               </a:ext>
             </a:extLst>
           </p:cNvPr>
@@ -2006,7 +2007,7 @@
           <a:bodyPr/>
           <a:lstStyle/>
           <a:p>
-            <a:fld id="{FD7A2B11-542E-4CA3-8CAD-ADBF93301D0C}" type="slidenum">
+            <a:fld id="{56A1CD77-F38E-452D-AE70-F639BBE63637}" type="slidenum">
               <a:rPr lang="de-DE" smtClean="0"/>
               <a:t>‹Nr.›</a:t>
             </a:fld>
@@ -2017,7 +2018,7 @@
     </p:spTree>
     <p:extLst>
       <p:ext uri="{BB962C8B-B14F-4D97-AF65-F5344CB8AC3E}">
-        <p14:creationId xmlns:p14="http://schemas.microsoft.com/office/powerpoint/2010/main" val="2573641852"/>
+        <p14:creationId xmlns:p14="http://schemas.microsoft.com/office/powerpoint/2010/main" val="2441466213"/>
       </p:ext>
     </p:extLst>
   </p:cSld>
@@ -2049,7 +2050,7 @@
           <p:cNvPr id="2" name="Datumsplatzhalter 1">
             <a:extLst>
               <a:ext uri="{FF2B5EF4-FFF2-40B4-BE49-F238E27FC236}">
-                <a16:creationId xmlns:a16="http://schemas.microsoft.com/office/drawing/2014/main" id="{7282B58B-A0AE-A9DE-0E81-2333FF204C55}"/>
+                <a16:creationId xmlns:a16="http://schemas.microsoft.com/office/drawing/2014/main" id="{CE7DB488-3325-4822-363F-D4538FD5F08D}"/>
               </a:ext>
             </a:extLst>
           </p:cNvPr>
@@ -2065,7 +2066,7 @@
           <a:bodyPr/>
           <a:lstStyle/>
           <a:p>
-            <a:fld id="{5A1AF197-8666-45A1-A9DD-65DA68AEA0EB}" type="datetimeFigureOut">
+            <a:fld id="{B2B075A0-D846-4290-88CC-C140D1C58584}" type="datetimeFigureOut">
               <a:rPr lang="de-DE" smtClean="0"/>
               <a:t>08.10.2026</a:t>
             </a:fld>
@@ -2078,7 +2079,7 @@
           <p:cNvPr id="3" name="Fußzeilenplatzhalter 2">
             <a:extLst>
               <a:ext uri="{FF2B5EF4-FFF2-40B4-BE49-F238E27FC236}">
-                <a16:creationId xmlns:a16="http://schemas.microsoft.com/office/drawing/2014/main" id="{3CFF02AA-C73E-9097-EFF8-128E14C9300B}"/>
+                <a16:creationId xmlns:a16="http://schemas.microsoft.com/office/drawing/2014/main" id="{CEE04DB9-6E65-6ED2-75F3-8C401D52A2FE}"/>
               </a:ext>
             </a:extLst>
           </p:cNvPr>
@@ -2103,7 +2104,7 @@
           <p:cNvPr id="4" name="Foliennummernplatzhalter 3">
             <a:extLst>
               <a:ext uri="{FF2B5EF4-FFF2-40B4-BE49-F238E27FC236}">
-                <a16:creationId xmlns:a16="http://schemas.microsoft.com/office/drawing/2014/main" id="{3250BD19-16C8-D21E-2374-0B75DB47AAD8}"/>
+                <a16:creationId xmlns:a16="http://schemas.microsoft.com/office/drawing/2014/main" id="{B4B8C999-0EC5-EA37-2EBB-5915BFA4F759}"/>
               </a:ext>
             </a:extLst>
           </p:cNvPr>
@@ -2119,7 +2120,7 @@
           <a:bodyPr/>
           <a:lstStyle/>
           <a:p>
-            <a:fld id="{FD7A2B11-542E-4CA3-8CAD-ADBF93301D0C}" type="slidenum">
+            <a:fld id="{56A1CD77-F38E-452D-AE70-F639BBE63637}" type="slidenum">
               <a:rPr lang="de-DE" smtClean="0"/>
               <a:t>‹Nr.›</a:t>
             </a:fld>
@@ -2130,7 +2131,7 @@
     </p:spTree>
     <p:extLst>
       <p:ext uri="{BB962C8B-B14F-4D97-AF65-F5344CB8AC3E}">
-        <p14:creationId xmlns:p14="http://schemas.microsoft.com/office/powerpoint/2010/main" val="2840669831"/>
+        <p14:creationId xmlns:p14="http://schemas.microsoft.com/office/powerpoint/2010/main" val="3400210695"/>
       </p:ext>
     </p:extLst>
   </p:cSld>
@@ -2162,7 +2163,7 @@
           <p:cNvPr id="2" name="Titel 1">
             <a:extLst>
               <a:ext uri="{FF2B5EF4-FFF2-40B4-BE49-F238E27FC236}">
-                <a16:creationId xmlns:a16="http://schemas.microsoft.com/office/drawing/2014/main" id="{EA490759-DD95-7AD8-D8F4-71529678A784}"/>
+                <a16:creationId xmlns:a16="http://schemas.microsoft.com/office/drawing/2014/main" id="{DAFCF47D-50A6-EB69-4AEE-4AB1BBBBA972}"/>
               </a:ext>
             </a:extLst>
           </p:cNvPr>
@@ -2199,7 +2200,7 @@
           <p:cNvPr id="3" name="Inhaltsplatzhalter 2">
             <a:extLst>
               <a:ext uri="{FF2B5EF4-FFF2-40B4-BE49-F238E27FC236}">
-                <a16:creationId xmlns:a16="http://schemas.microsoft.com/office/drawing/2014/main" id="{A5B00C52-AE47-5A09-A9A4-4439FE1F109E}"/>
+                <a16:creationId xmlns:a16="http://schemas.microsoft.com/office/drawing/2014/main" id="{81215F9F-921F-7B2C-417E-02D8D2D4D89E}"/>
               </a:ext>
             </a:extLst>
           </p:cNvPr>
@@ -2289,7 +2290,7 @@
           <p:cNvPr id="4" name="Textplatzhalter 3">
             <a:extLst>
               <a:ext uri="{FF2B5EF4-FFF2-40B4-BE49-F238E27FC236}">
-                <a16:creationId xmlns:a16="http://schemas.microsoft.com/office/drawing/2014/main" id="{B8ADC2AA-2294-B49A-9D4A-0DE780C16DB5}"/>
+                <a16:creationId xmlns:a16="http://schemas.microsoft.com/office/drawing/2014/main" id="{E10343AD-C715-EAB8-838B-323B96132F23}"/>
               </a:ext>
             </a:extLst>
           </p:cNvPr>
@@ -2360,7 +2361,7 @@
           <p:cNvPr id="5" name="Datumsplatzhalter 4">
             <a:extLst>
               <a:ext uri="{FF2B5EF4-FFF2-40B4-BE49-F238E27FC236}">
-                <a16:creationId xmlns:a16="http://schemas.microsoft.com/office/drawing/2014/main" id="{F492C5EB-1021-EACA-EBF7-950CC7D0F7CB}"/>
+                <a16:creationId xmlns:a16="http://schemas.microsoft.com/office/drawing/2014/main" id="{DF22A225-F982-58A7-98E5-774201C34FE3}"/>
               </a:ext>
             </a:extLst>
           </p:cNvPr>
@@ -2376,7 +2377,7 @@
           <a:bodyPr/>
           <a:lstStyle/>
           <a:p>
-            <a:fld id="{5A1AF197-8666-45A1-A9DD-65DA68AEA0EB}" type="datetimeFigureOut">
+            <a:fld id="{B2B075A0-D846-4290-88CC-C140D1C58584}" type="datetimeFigureOut">
               <a:rPr lang="de-DE" smtClean="0"/>
               <a:t>08.10.2026</a:t>
             </a:fld>
@@ -2389,7 +2390,7 @@
           <p:cNvPr id="6" name="Fußzeilenplatzhalter 5">
             <a:extLst>
               <a:ext uri="{FF2B5EF4-FFF2-40B4-BE49-F238E27FC236}">
-                <a16:creationId xmlns:a16="http://schemas.microsoft.com/office/drawing/2014/main" id="{2C88EAEA-3AE6-98B5-FA33-8BCFDB17DE97}"/>
+                <a16:creationId xmlns:a16="http://schemas.microsoft.com/office/drawing/2014/main" id="{E4E0816D-C16A-E890-5E69-56D39C9200D2}"/>
               </a:ext>
             </a:extLst>
           </p:cNvPr>
@@ -2414,7 +2415,7 @@
           <p:cNvPr id="7" name="Foliennummernplatzhalter 6">
             <a:extLst>
               <a:ext uri="{FF2B5EF4-FFF2-40B4-BE49-F238E27FC236}">
-                <a16:creationId xmlns:a16="http://schemas.microsoft.com/office/drawing/2014/main" id="{AC08A9FA-3460-A241-89A5-14DEF284408E}"/>
+                <a16:creationId xmlns:a16="http://schemas.microsoft.com/office/drawing/2014/main" id="{64B71750-5E83-B3FA-1EFA-70909565DE56}"/>
               </a:ext>
             </a:extLst>
           </p:cNvPr>
@@ -2430,7 +2431,7 @@
           <a:bodyPr/>
           <a:lstStyle/>
           <a:p>
-            <a:fld id="{FD7A2B11-542E-4CA3-8CAD-ADBF93301D0C}" type="slidenum">
+            <a:fld id="{56A1CD77-F38E-452D-AE70-F639BBE63637}" type="slidenum">
               <a:rPr lang="de-DE" smtClean="0"/>
               <a:t>‹Nr.›</a:t>
             </a:fld>
@@ -2441,7 +2442,7 @@
     </p:spTree>
     <p:extLst>
       <p:ext uri="{BB962C8B-B14F-4D97-AF65-F5344CB8AC3E}">
-        <p14:creationId xmlns:p14="http://schemas.microsoft.com/office/powerpoint/2010/main" val="236535551"/>
+        <p14:creationId xmlns:p14="http://schemas.microsoft.com/office/powerpoint/2010/main" val="4268019021"/>
       </p:ext>
     </p:extLst>
   </p:cSld>
@@ -2473,7 +2474,7 @@
           <p:cNvPr id="2" name="Titel 1">
             <a:extLst>
               <a:ext uri="{FF2B5EF4-FFF2-40B4-BE49-F238E27FC236}">
-                <a16:creationId xmlns:a16="http://schemas.microsoft.com/office/drawing/2014/main" id="{E1ED5D83-5432-08B7-ED72-46E55380525A}"/>
+                <a16:creationId xmlns:a16="http://schemas.microsoft.com/office/drawing/2014/main" id="{A8008E7E-36D0-CF13-8F67-172B7A8E1A1D}"/>
               </a:ext>
             </a:extLst>
           </p:cNvPr>
@@ -2510,7 +2511,7 @@
           <p:cNvPr id="3" name="Bildplatzhalter 2">
             <a:extLst>
               <a:ext uri="{FF2B5EF4-FFF2-40B4-BE49-F238E27FC236}">
-                <a16:creationId xmlns:a16="http://schemas.microsoft.com/office/drawing/2014/main" id="{D7A031F4-40A6-9190-865C-CEBC1A817FA5}"/>
+                <a16:creationId xmlns:a16="http://schemas.microsoft.com/office/drawing/2014/main" id="{051B0832-B363-8D7A-EE35-7225CF02ECA2}"/>
               </a:ext>
             </a:extLst>
           </p:cNvPr>
@@ -2577,7 +2578,7 @@
           <p:cNvPr id="4" name="Textplatzhalter 3">
             <a:extLst>
               <a:ext uri="{FF2B5EF4-FFF2-40B4-BE49-F238E27FC236}">
-                <a16:creationId xmlns:a16="http://schemas.microsoft.com/office/drawing/2014/main" id="{23789805-7810-7EEE-59FE-04FA2F21F8B2}"/>
+                <a16:creationId xmlns:a16="http://schemas.microsoft.com/office/drawing/2014/main" id="{65F1191D-E0EB-A29D-79E7-0358DBFC0D2D}"/>
               </a:ext>
             </a:extLst>
           </p:cNvPr>
@@ -2648,7 +2649,7 @@
           <p:cNvPr id="5" name="Datumsplatzhalter 4">
             <a:extLst>
               <a:ext uri="{FF2B5EF4-FFF2-40B4-BE49-F238E27FC236}">
-                <a16:creationId xmlns:a16="http://schemas.microsoft.com/office/drawing/2014/main" id="{4E3CFBFD-8AE0-22A1-8740-A7D51952D861}"/>
+                <a16:creationId xmlns:a16="http://schemas.microsoft.com/office/drawing/2014/main" id="{ED084057-1DBF-2CE9-2466-C023D4F851C3}"/>
               </a:ext>
             </a:extLst>
           </p:cNvPr>
@@ -2664,7 +2665,7 @@
           <a:bodyPr/>
           <a:lstStyle/>
           <a:p>
-            <a:fld id="{5A1AF197-8666-45A1-A9DD-65DA68AEA0EB}" type="datetimeFigureOut">
+            <a:fld id="{B2B075A0-D846-4290-88CC-C140D1C58584}" type="datetimeFigureOut">
               <a:rPr lang="de-DE" smtClean="0"/>
               <a:t>08.10.2026</a:t>
             </a:fld>
@@ -2677,7 +2678,7 @@
           <p:cNvPr id="6" name="Fußzeilenplatzhalter 5">
             <a:extLst>
               <a:ext uri="{FF2B5EF4-FFF2-40B4-BE49-F238E27FC236}">
-                <a16:creationId xmlns:a16="http://schemas.microsoft.com/office/drawing/2014/main" id="{668B69EA-2174-3132-17B1-43E202968E75}"/>
+                <a16:creationId xmlns:a16="http://schemas.microsoft.com/office/drawing/2014/main" id="{96FF7421-A9A9-F80B-C26E-624FAA63C1A0}"/>
               </a:ext>
             </a:extLst>
           </p:cNvPr>
@@ -2702,7 +2703,7 @@
           <p:cNvPr id="7" name="Foliennummernplatzhalter 6">
             <a:extLst>
               <a:ext uri="{FF2B5EF4-FFF2-40B4-BE49-F238E27FC236}">
-                <a16:creationId xmlns:a16="http://schemas.microsoft.com/office/drawing/2014/main" id="{8CF36AC2-0275-3140-1966-E1B21A7528E0}"/>
+                <a16:creationId xmlns:a16="http://schemas.microsoft.com/office/drawing/2014/main" id="{9983975A-89C4-C3FD-3DF7-52EA039EA713}"/>
               </a:ext>
             </a:extLst>
           </p:cNvPr>
@@ -2718,7 +2719,7 @@
           <a:bodyPr/>
           <a:lstStyle/>
           <a:p>
-            <a:fld id="{FD7A2B11-542E-4CA3-8CAD-ADBF93301D0C}" type="slidenum">
+            <a:fld id="{56A1CD77-F38E-452D-AE70-F639BBE63637}" type="slidenum">
               <a:rPr lang="de-DE" smtClean="0"/>
               <a:t>‹Nr.›</a:t>
             </a:fld>
@@ -2729,7 +2730,7 @@
     </p:spTree>
     <p:extLst>
       <p:ext uri="{BB962C8B-B14F-4D97-AF65-F5344CB8AC3E}">
-        <p14:creationId xmlns:p14="http://schemas.microsoft.com/office/powerpoint/2010/main" val="4284705121"/>
+        <p14:creationId xmlns:p14="http://schemas.microsoft.com/office/powerpoint/2010/main" val="836559656"/>
       </p:ext>
     </p:extLst>
   </p:cSld>
@@ -2766,7 +2767,7 @@
           <p:cNvPr id="2" name="Titelplatzhalter 1">
             <a:extLst>
               <a:ext uri="{FF2B5EF4-FFF2-40B4-BE49-F238E27FC236}">
-                <a16:creationId xmlns:a16="http://schemas.microsoft.com/office/drawing/2014/main" id="{2A1B5342-469A-88F5-06D1-2F6BAE196031}"/>
+                <a16:creationId xmlns:a16="http://schemas.microsoft.com/office/drawing/2014/main" id="{AD2478CD-14C1-DFC3-6D48-751EE1C3EA2F}"/>
               </a:ext>
             </a:extLst>
           </p:cNvPr>
@@ -2804,7 +2805,7 @@
           <p:cNvPr id="3" name="Textplatzhalter 2">
             <a:extLst>
               <a:ext uri="{FF2B5EF4-FFF2-40B4-BE49-F238E27FC236}">
-                <a16:creationId xmlns:a16="http://schemas.microsoft.com/office/drawing/2014/main" id="{FF82D3DA-0033-4E60-AD70-530A1E840A4A}"/>
+                <a16:creationId xmlns:a16="http://schemas.microsoft.com/office/drawing/2014/main" id="{9703E0EF-D82C-8665-17EC-A290B478A18B}"/>
               </a:ext>
             </a:extLst>
           </p:cNvPr>
@@ -2871,7 +2872,7 @@
           <p:cNvPr id="4" name="Datumsplatzhalter 3">
             <a:extLst>
               <a:ext uri="{FF2B5EF4-FFF2-40B4-BE49-F238E27FC236}">
-                <a16:creationId xmlns:a16="http://schemas.microsoft.com/office/drawing/2014/main" id="{83311BBC-602C-292F-9D94-A1655F3472B8}"/>
+                <a16:creationId xmlns:a16="http://schemas.microsoft.com/office/drawing/2014/main" id="{CB90F1C1-F179-B169-125E-90FEB903EBFB}"/>
               </a:ext>
             </a:extLst>
           </p:cNvPr>
@@ -2905,7 +2906,7 @@
             </a:lvl1pPr>
           </a:lstStyle>
           <a:p>
-            <a:fld id="{5A1AF197-8666-45A1-A9DD-65DA68AEA0EB}" type="datetimeFigureOut">
+            <a:fld id="{B2B075A0-D846-4290-88CC-C140D1C58584}" type="datetimeFigureOut">
               <a:rPr lang="de-DE" smtClean="0"/>
               <a:t>08.10.2026</a:t>
             </a:fld>
@@ -2918,7 +2919,7 @@
           <p:cNvPr id="5" name="Fußzeilenplatzhalter 4">
             <a:extLst>
               <a:ext uri="{FF2B5EF4-FFF2-40B4-BE49-F238E27FC236}">
-                <a16:creationId xmlns:a16="http://schemas.microsoft.com/office/drawing/2014/main" id="{EEC4B4EA-CE28-553A-B843-ABDAE0269558}"/>
+                <a16:creationId xmlns:a16="http://schemas.microsoft.com/office/drawing/2014/main" id="{F2BE319A-E69E-16EA-E5AF-346B1BBA8450}"/>
               </a:ext>
             </a:extLst>
           </p:cNvPr>
@@ -2961,7 +2962,7 @@
           <p:cNvPr id="6" name="Foliennummernplatzhalter 5">
             <a:extLst>
               <a:ext uri="{FF2B5EF4-FFF2-40B4-BE49-F238E27FC236}">
-                <a16:creationId xmlns:a16="http://schemas.microsoft.com/office/drawing/2014/main" id="{BD0E9F3A-3C43-96F2-4149-F8D7885C390E}"/>
+                <a16:creationId xmlns:a16="http://schemas.microsoft.com/office/drawing/2014/main" id="{58B20F33-DD29-D207-524A-91E6C9180446}"/>
               </a:ext>
             </a:extLst>
           </p:cNvPr>
@@ -2995,7 +2996,7 @@
             </a:lvl1pPr>
           </a:lstStyle>
           <a:p>
-            <a:fld id="{FD7A2B11-542E-4CA3-8CAD-ADBF93301D0C}" type="slidenum">
+            <a:fld id="{56A1CD77-F38E-452D-AE70-F639BBE63637}" type="slidenum">
               <a:rPr lang="de-DE" smtClean="0"/>
               <a:t>‹Nr.›</a:t>
             </a:fld>
@@ -3006,7 +3007,7 @@
     </p:spTree>
     <p:extLst>
       <p:ext uri="{BB962C8B-B14F-4D97-AF65-F5344CB8AC3E}">
-        <p14:creationId xmlns:p14="http://schemas.microsoft.com/office/powerpoint/2010/main" val="1261187872"/>
+        <p14:creationId xmlns:p14="http://schemas.microsoft.com/office/powerpoint/2010/main" val="387281136"/>
       </p:ext>
     </p:extLst>
   </p:cSld>
@@ -3329,7 +3330,7 @@
           <p:cNvPr id="2" name="Rechteck 1">
             <a:extLst>
               <a:ext uri="{FF2B5EF4-FFF2-40B4-BE49-F238E27FC236}">
-                <a16:creationId xmlns:a16="http://schemas.microsoft.com/office/drawing/2014/main" id="{9F1DCDF6-ED1D-A1B1-39B9-92A272144DBC}"/>
+                <a16:creationId xmlns:a16="http://schemas.microsoft.com/office/drawing/2014/main" id="{59BB3FF2-24B4-DC0D-69AA-3D8A9FA87158}"/>
               </a:ext>
             </a:extLst>
           </p:cNvPr>
@@ -3406,7 +3407,7 @@
           <p:cNvPr id="3" name="Rechteck 2">
             <a:extLst>
               <a:ext uri="{FF2B5EF4-FFF2-40B4-BE49-F238E27FC236}">
-                <a16:creationId xmlns:a16="http://schemas.microsoft.com/office/drawing/2014/main" id="{43116EA8-4129-2AEC-AA30-0B643F63BED8}"/>
+                <a16:creationId xmlns:a16="http://schemas.microsoft.com/office/drawing/2014/main" id="{3D3F2A02-F436-182B-C609-DE0F98DBBE3D}"/>
               </a:ext>
             </a:extLst>
           </p:cNvPr>
@@ -3481,7 +3482,7 @@
           <p:cNvPr id="4" name="Rechteck: abgerundete Ecken 3">
             <a:extLst>
               <a:ext uri="{FF2B5EF4-FFF2-40B4-BE49-F238E27FC236}">
-                <a16:creationId xmlns:a16="http://schemas.microsoft.com/office/drawing/2014/main" id="{0A159F4C-7D71-3391-FFD2-E1431B85F4FE}"/>
+                <a16:creationId xmlns:a16="http://schemas.microsoft.com/office/drawing/2014/main" id="{BD62DA65-F28D-3EA9-DF2E-B9CDB9F40C3C}"/>
               </a:ext>
             </a:extLst>
           </p:cNvPr>
@@ -3558,7 +3559,7 @@
           <p:cNvPr id="5" name="Rechteck 4">
             <a:extLst>
               <a:ext uri="{FF2B5EF4-FFF2-40B4-BE49-F238E27FC236}">
-                <a16:creationId xmlns:a16="http://schemas.microsoft.com/office/drawing/2014/main" id="{BE15463F-8592-E90E-5CA4-6274A0BA1081}"/>
+                <a16:creationId xmlns:a16="http://schemas.microsoft.com/office/drawing/2014/main" id="{953E8D4C-5D55-F2E3-5AE6-D8F7E8BC644B}"/>
               </a:ext>
             </a:extLst>
           </p:cNvPr>
@@ -3635,7 +3636,7 @@
           <p:cNvPr id="6" name="Ellipse 5">
             <a:extLst>
               <a:ext uri="{FF2B5EF4-FFF2-40B4-BE49-F238E27FC236}">
-                <a16:creationId xmlns:a16="http://schemas.microsoft.com/office/drawing/2014/main" id="{0B45B2C6-A961-FB56-0CF0-EA7F07C17D44}"/>
+                <a16:creationId xmlns:a16="http://schemas.microsoft.com/office/drawing/2014/main" id="{046477FC-BBB1-67B8-CF96-3EF8F81D944B}"/>
               </a:ext>
             </a:extLst>
           </p:cNvPr>
@@ -3712,7 +3713,7 @@
           <p:cNvPr id="7" name="Rechteck 6">
             <a:extLst>
               <a:ext uri="{FF2B5EF4-FFF2-40B4-BE49-F238E27FC236}">
-                <a16:creationId xmlns:a16="http://schemas.microsoft.com/office/drawing/2014/main" id="{8BAE3E37-5FA9-369A-8B26-A413B6F3C6BA}"/>
+                <a16:creationId xmlns:a16="http://schemas.microsoft.com/office/drawing/2014/main" id="{D5265BC0-ADC1-F81B-A354-978DCA8FF4D8}"/>
               </a:ext>
             </a:extLst>
           </p:cNvPr>
@@ -3780,7 +3781,7 @@
           <p:cNvPr id="8" name="Ellipse 7">
             <a:extLst>
               <a:ext uri="{FF2B5EF4-FFF2-40B4-BE49-F238E27FC236}">
-                <a16:creationId xmlns:a16="http://schemas.microsoft.com/office/drawing/2014/main" id="{DD480319-B6CD-46AA-5C51-843AF60A1336}"/>
+                <a16:creationId xmlns:a16="http://schemas.microsoft.com/office/drawing/2014/main" id="{E0899BCB-9A63-FB11-08E0-9E47B175B8C1}"/>
               </a:ext>
             </a:extLst>
           </p:cNvPr>
@@ -3854,7 +3855,7 @@
     </p:spTree>
     <p:extLst>
       <p:ext uri="{BB962C8B-B14F-4D97-AF65-F5344CB8AC3E}">
-        <p14:creationId xmlns:p14="http://schemas.microsoft.com/office/powerpoint/2010/main" val="3732569157"/>
+        <p14:creationId xmlns:p14="http://schemas.microsoft.com/office/powerpoint/2010/main" val="3469920732"/>
       </p:ext>
     </p:extLst>
   </p:cSld>
@@ -3886,7 +3887,7 @@
           <p:cNvPr id="2" name="Rechteck 1">
             <a:extLst>
               <a:ext uri="{FF2B5EF4-FFF2-40B4-BE49-F238E27FC236}">
-                <a16:creationId xmlns:a16="http://schemas.microsoft.com/office/drawing/2014/main" id="{EB0CDFF3-9426-601B-6B93-8B20E9316F4C}"/>
+                <a16:creationId xmlns:a16="http://schemas.microsoft.com/office/drawing/2014/main" id="{06908775-989C-BC23-9E5A-70DE3B542B61}"/>
               </a:ext>
             </a:extLst>
           </p:cNvPr>
@@ -3964,7 +3965,7 @@
           <p:cNvPr id="3" name="Rechteck: abgerundete Ecken 2">
             <a:extLst>
               <a:ext uri="{FF2B5EF4-FFF2-40B4-BE49-F238E27FC236}">
-                <a16:creationId xmlns:a16="http://schemas.microsoft.com/office/drawing/2014/main" id="{91887F2B-F1A3-0409-742A-AAC507E60903}"/>
+                <a16:creationId xmlns:a16="http://schemas.microsoft.com/office/drawing/2014/main" id="{44CD0E3A-F119-8EFD-F1A1-6FA0CF088DE7}"/>
               </a:ext>
             </a:extLst>
           </p:cNvPr>
@@ -4042,7 +4043,7 @@
           <p:cNvPr id="4" name="Rechteck 3">
             <a:extLst>
               <a:ext uri="{FF2B5EF4-FFF2-40B4-BE49-F238E27FC236}">
-                <a16:creationId xmlns:a16="http://schemas.microsoft.com/office/drawing/2014/main" id="{39D9021C-216B-06E2-F7F8-246E778987FE}"/>
+                <a16:creationId xmlns:a16="http://schemas.microsoft.com/office/drawing/2014/main" id="{9D71A4B1-67BC-926C-9F72-00E14F0EA552}"/>
               </a:ext>
             </a:extLst>
           </p:cNvPr>
@@ -4119,7 +4120,7 @@
           <p:cNvPr id="5" name="Rechteck 4">
             <a:extLst>
               <a:ext uri="{FF2B5EF4-FFF2-40B4-BE49-F238E27FC236}">
-                <a16:creationId xmlns:a16="http://schemas.microsoft.com/office/drawing/2014/main" id="{619EA6EB-1412-081E-5CA7-33EFDAF275D9}"/>
+                <a16:creationId xmlns:a16="http://schemas.microsoft.com/office/drawing/2014/main" id="{598D8348-EAD4-BFD7-82F0-500D353DB910}"/>
               </a:ext>
             </a:extLst>
           </p:cNvPr>
@@ -4195,7 +4196,7 @@
           <p:cNvPr id="6" name="Ellipse 5">
             <a:extLst>
               <a:ext uri="{FF2B5EF4-FFF2-40B4-BE49-F238E27FC236}">
-                <a16:creationId xmlns:a16="http://schemas.microsoft.com/office/drawing/2014/main" id="{FDFFA47E-B452-EA0E-5EB0-92DE20429C18}"/>
+                <a16:creationId xmlns:a16="http://schemas.microsoft.com/office/drawing/2014/main" id="{D0E6CFCD-E0B3-7139-249D-6057782E190A}"/>
               </a:ext>
             </a:extLst>
           </p:cNvPr>
@@ -4271,7 +4272,7 @@
     </p:spTree>
     <p:extLst>
       <p:ext uri="{BB962C8B-B14F-4D97-AF65-F5344CB8AC3E}">
-        <p14:creationId xmlns:p14="http://schemas.microsoft.com/office/powerpoint/2010/main" val="1993990675"/>
+        <p14:creationId xmlns:p14="http://schemas.microsoft.com/office/powerpoint/2010/main" val="1766651423"/>
       </p:ext>
     </p:extLst>
   </p:cSld>
@@ -4303,7 +4304,7 @@
           <p:cNvPr id="2" name="perspective-0">
             <a:extLst>
               <a:ext uri="{FF2B5EF4-FFF2-40B4-BE49-F238E27FC236}">
-                <a16:creationId xmlns:a16="http://schemas.microsoft.com/office/drawing/2014/main" id="{BEF7C74C-C132-B0D8-D66A-D719F3DB739A}"/>
+                <a16:creationId xmlns:a16="http://schemas.microsoft.com/office/drawing/2014/main" id="{2ACF6BAE-20F8-C86D-15A0-0F848246059C}"/>
               </a:ext>
             </a:extLst>
           </p:cNvPr>
@@ -4377,7 +4378,7 @@
           <p:cNvPr id="3" name="perspective-1">
             <a:extLst>
               <a:ext uri="{FF2B5EF4-FFF2-40B4-BE49-F238E27FC236}">
-                <a16:creationId xmlns:a16="http://schemas.microsoft.com/office/drawing/2014/main" id="{BD4FA95A-1329-2224-7377-D8ED6346DB77}"/>
+                <a16:creationId xmlns:a16="http://schemas.microsoft.com/office/drawing/2014/main" id="{F790BD56-6C9B-1B9E-4637-5F4E94E73E48}"/>
               </a:ext>
             </a:extLst>
           </p:cNvPr>
@@ -4451,7 +4452,7 @@
           <p:cNvPr id="4" name="perspective-2">
             <a:extLst>
               <a:ext uri="{FF2B5EF4-FFF2-40B4-BE49-F238E27FC236}">
-                <a16:creationId xmlns:a16="http://schemas.microsoft.com/office/drawing/2014/main" id="{374FC81E-8387-5AA8-A2CB-2CE39D69A0E0}"/>
+                <a16:creationId xmlns:a16="http://schemas.microsoft.com/office/drawing/2014/main" id="{71698A75-BEEA-D088-630A-4ED5D12C63BA}"/>
               </a:ext>
             </a:extLst>
           </p:cNvPr>
@@ -4525,7 +4526,7 @@
           <p:cNvPr id="5" name="perspective-3">
             <a:extLst>
               <a:ext uri="{FF2B5EF4-FFF2-40B4-BE49-F238E27FC236}">
-                <a16:creationId xmlns:a16="http://schemas.microsoft.com/office/drawing/2014/main" id="{D0BE96B2-8D39-1D23-254E-D9CE4B278BD8}"/>
+                <a16:creationId xmlns:a16="http://schemas.microsoft.com/office/drawing/2014/main" id="{25FBA2D3-31BD-6145-5DD6-3CA7451883D6}"/>
               </a:ext>
             </a:extLst>
           </p:cNvPr>
@@ -4599,7 +4600,7 @@
           <p:cNvPr id="6" name="perspective-4">
             <a:extLst>
               <a:ext uri="{FF2B5EF4-FFF2-40B4-BE49-F238E27FC236}">
-                <a16:creationId xmlns:a16="http://schemas.microsoft.com/office/drawing/2014/main" id="{D180BCE6-6B27-72E1-FD32-E5E1D075A75A}"/>
+                <a16:creationId xmlns:a16="http://schemas.microsoft.com/office/drawing/2014/main" id="{34C2B1D3-2BA9-9DB3-EA9A-8FBB2F4C4BE6}"/>
               </a:ext>
             </a:extLst>
           </p:cNvPr>
@@ -4673,7 +4674,7 @@
           <p:cNvPr id="7" name="perspective-5">
             <a:extLst>
               <a:ext uri="{FF2B5EF4-FFF2-40B4-BE49-F238E27FC236}">
-                <a16:creationId xmlns:a16="http://schemas.microsoft.com/office/drawing/2014/main" id="{71BFD4D2-C820-3E33-9E0A-0A9E015106C7}"/>
+                <a16:creationId xmlns:a16="http://schemas.microsoft.com/office/drawing/2014/main" id="{6B02CB5C-A870-840D-A89B-999BCD3497BE}"/>
               </a:ext>
             </a:extLst>
           </p:cNvPr>
@@ -4747,7 +4748,7 @@
           <p:cNvPr id="8" name="perspective-6">
             <a:extLst>
               <a:ext uri="{FF2B5EF4-FFF2-40B4-BE49-F238E27FC236}">
-                <a16:creationId xmlns:a16="http://schemas.microsoft.com/office/drawing/2014/main" id="{0B24BDCB-B900-C396-3FEB-79E43AEF9515}"/>
+                <a16:creationId xmlns:a16="http://schemas.microsoft.com/office/drawing/2014/main" id="{014C0043-05D6-2571-7F26-5EA27EA84581}"/>
               </a:ext>
             </a:extLst>
           </p:cNvPr>
@@ -4821,7 +4822,7 @@
           <p:cNvPr id="9" name="perspective-7">
             <a:extLst>
               <a:ext uri="{FF2B5EF4-FFF2-40B4-BE49-F238E27FC236}">
-                <a16:creationId xmlns:a16="http://schemas.microsoft.com/office/drawing/2014/main" id="{99EAEC51-9AE6-28DA-C920-01287B4EDB52}"/>
+                <a16:creationId xmlns:a16="http://schemas.microsoft.com/office/drawing/2014/main" id="{BBA0A933-BB10-6749-3567-31B77B58BDE8}"/>
               </a:ext>
             </a:extLst>
           </p:cNvPr>
@@ -4893,7 +4894,7 @@
     </p:spTree>
     <p:extLst>
       <p:ext uri="{BB962C8B-B14F-4D97-AF65-F5344CB8AC3E}">
-        <p14:creationId xmlns:p14="http://schemas.microsoft.com/office/powerpoint/2010/main" val="3146653908"/>
+        <p14:creationId xmlns:p14="http://schemas.microsoft.com/office/powerpoint/2010/main" val="983393089"/>
       </p:ext>
     </p:extLst>
   </p:cSld>
@@ -4925,7 +4926,7 @@
           <p:cNvPr id="2" name="turned-0">
             <a:extLst>
               <a:ext uri="{FF2B5EF4-FFF2-40B4-BE49-F238E27FC236}">
-                <a16:creationId xmlns:a16="http://schemas.microsoft.com/office/drawing/2014/main" id="{0EA5DEC4-0EED-8E42-A95D-1DF0FA17945E}"/>
+                <a16:creationId xmlns:a16="http://schemas.microsoft.com/office/drawing/2014/main" id="{3872C9EC-AF04-830F-E4CB-8C51ACD005F0}"/>
               </a:ext>
             </a:extLst>
           </p:cNvPr>
@@ -4999,7 +5000,7 @@
           <p:cNvPr id="3" name="turned-1">
             <a:extLst>
               <a:ext uri="{FF2B5EF4-FFF2-40B4-BE49-F238E27FC236}">
-                <a16:creationId xmlns:a16="http://schemas.microsoft.com/office/drawing/2014/main" id="{439F2E9E-D1C8-601D-5B61-4A2BA56D7431}"/>
+                <a16:creationId xmlns:a16="http://schemas.microsoft.com/office/drawing/2014/main" id="{BA8DB7FE-02F0-AA21-2A16-514C63576B0A}"/>
               </a:ext>
             </a:extLst>
           </p:cNvPr>
@@ -5073,7 +5074,7 @@
           <p:cNvPr id="4" name="turned-2">
             <a:extLst>
               <a:ext uri="{FF2B5EF4-FFF2-40B4-BE49-F238E27FC236}">
-                <a16:creationId xmlns:a16="http://schemas.microsoft.com/office/drawing/2014/main" id="{45095E88-1B56-148C-906B-59760DCA2136}"/>
+                <a16:creationId xmlns:a16="http://schemas.microsoft.com/office/drawing/2014/main" id="{8AF329BD-B8CA-8C8F-FEAA-49BBEA76E9F9}"/>
               </a:ext>
             </a:extLst>
           </p:cNvPr>
@@ -5147,7 +5148,7 @@
           <p:cNvPr id="5" name="turned-3">
             <a:extLst>
               <a:ext uri="{FF2B5EF4-FFF2-40B4-BE49-F238E27FC236}">
-                <a16:creationId xmlns:a16="http://schemas.microsoft.com/office/drawing/2014/main" id="{DA543B73-9AB1-11D1-0328-22FF4EF3D093}"/>
+                <a16:creationId xmlns:a16="http://schemas.microsoft.com/office/drawing/2014/main" id="{5BCC7A14-885E-CC9E-4606-4669D7EFF766}"/>
               </a:ext>
             </a:extLst>
           </p:cNvPr>
@@ -5221,7 +5222,7 @@
           <p:cNvPr id="6" name="turned-4">
             <a:extLst>
               <a:ext uri="{FF2B5EF4-FFF2-40B4-BE49-F238E27FC236}">
-                <a16:creationId xmlns:a16="http://schemas.microsoft.com/office/drawing/2014/main" id="{F6B42B56-767F-0E62-237B-BDA94D4A6389}"/>
+                <a16:creationId xmlns:a16="http://schemas.microsoft.com/office/drawing/2014/main" id="{11D43F43-2E2A-7FEE-5E8E-B522EB18F273}"/>
               </a:ext>
             </a:extLst>
           </p:cNvPr>
@@ -5295,7 +5296,7 @@
           <p:cNvPr id="7" name="turned-5">
             <a:extLst>
               <a:ext uri="{FF2B5EF4-FFF2-40B4-BE49-F238E27FC236}">
-                <a16:creationId xmlns:a16="http://schemas.microsoft.com/office/drawing/2014/main" id="{4D693258-FAA2-46AF-2689-61A1D3919947}"/>
+                <a16:creationId xmlns:a16="http://schemas.microsoft.com/office/drawing/2014/main" id="{67DC131B-D845-7EF1-DA46-21391C05CB95}"/>
               </a:ext>
             </a:extLst>
           </p:cNvPr>
@@ -5369,7 +5370,7 @@
           <p:cNvPr id="8" name="turned-6">
             <a:extLst>
               <a:ext uri="{FF2B5EF4-FFF2-40B4-BE49-F238E27FC236}">
-                <a16:creationId xmlns:a16="http://schemas.microsoft.com/office/drawing/2014/main" id="{1CDB972F-65D1-C236-A394-20F361D3E2F8}"/>
+                <a16:creationId xmlns:a16="http://schemas.microsoft.com/office/drawing/2014/main" id="{C06826AF-E8F7-C8F9-13B3-F2FDD49AA638}"/>
               </a:ext>
             </a:extLst>
           </p:cNvPr>
@@ -5443,7 +5444,7 @@
           <p:cNvPr id="9" name="turned-7">
             <a:extLst>
               <a:ext uri="{FF2B5EF4-FFF2-40B4-BE49-F238E27FC236}">
-                <a16:creationId xmlns:a16="http://schemas.microsoft.com/office/drawing/2014/main" id="{C523081F-AC63-7F65-F484-9D842B79568C}"/>
+                <a16:creationId xmlns:a16="http://schemas.microsoft.com/office/drawing/2014/main" id="{DC53F8C4-8BEE-820A-698D-EC578EA27027}"/>
               </a:ext>
             </a:extLst>
           </p:cNvPr>
@@ -5515,7 +5516,597 @@
     </p:spTree>
     <p:extLst>
       <p:ext uri="{BB962C8B-B14F-4D97-AF65-F5344CB8AC3E}">
-        <p14:creationId xmlns:p14="http://schemas.microsoft.com/office/powerpoint/2010/main" val="2821036149"/>
+        <p14:creationId xmlns:p14="http://schemas.microsoft.com/office/powerpoint/2010/main" val="2823851770"/>
+      </p:ext>
+    </p:extLst>
+  </p:cSld>
+  <p:clrMapOvr>
+    <a:masterClrMapping/>
+  </p:clrMapOvr>
+</p:sld>
+</file>
+
+<file path=ppt/slides/slide5.xml><?xml version="1.0" encoding="utf-8"?>
+<p:sld xmlns:a="http://schemas.openxmlformats.org/drawingml/2006/main" xmlns:r="http://schemas.openxmlformats.org/officeDocument/2006/relationships" xmlns:p="http://schemas.openxmlformats.org/presentationml/2006/main">
+  <p:cSld>
+    <p:spTree>
+      <p:nvGrpSpPr>
+        <p:cNvPr id="1" name=""/>
+        <p:cNvGrpSpPr/>
+        <p:nvPr/>
+      </p:nvGrpSpPr>
+      <p:grpSpPr>
+        <a:xfrm>
+          <a:off x="0" y="0"/>
+          <a:ext cx="0" cy="0"/>
+          <a:chOff x="0" y="0"/>
+          <a:chExt cx="0" cy="0"/>
+        </a:xfrm>
+      </p:grpSpPr>
+      <p:sp>
+        <p:nvSpPr>
+          <p:cNvPr id="2" name="reflection-0">
+            <a:extLst>
+              <a:ext uri="{FF2B5EF4-FFF2-40B4-BE49-F238E27FC236}">
+                <a16:creationId xmlns:a16="http://schemas.microsoft.com/office/drawing/2014/main" id="{763521E6-DCFE-EF79-C5BC-762BDA588C77}"/>
+              </a:ext>
+            </a:extLst>
+          </p:cNvPr>
+          <p:cNvSpPr/>
+          <p:nvPr/>
+        </p:nvSpPr>
+        <p:spPr>
+          <a:xfrm>
+            <a:off x="762000" y="508000"/>
+            <a:ext cx="1651000" cy="1270000"/>
+          </a:xfrm>
+          <a:prstGeom prst="rect">
+            <a:avLst/>
+          </a:prstGeom>
+          <a:solidFill>
+            <a:srgbClr val="4472C4"/>
+          </a:solidFill>
+          <a:ln w="19050" cap="flat" cmpd="sng" algn="ctr">
+            <a:noFill/>
+            <a:prstDash val="solid"/>
+            <a:miter lim="800000"/>
+          </a:ln>
+          <a:effectLst>
+            <a:reflection xmlns:a="http://schemas.openxmlformats.org/drawingml/2006/main" stA="50000" endA="300" endPos="90000" dir="5400000" sy="-100000" algn="bl" rotWithShape="0"/>
+          </a:effectLst>
+          <a:extLst>
+            <a:ext uri="{91240B29-F687-4F45-9708-019B960494DF}">
+              <a14:hiddenLine xmlns:a14="http://schemas.microsoft.com/office/drawing/2010/main" w="19050" cap="flat" cmpd="sng" algn="ctr">
+                <a:solidFill>
+                  <a:schemeClr val="accent1">
+                    <a:shade val="15000"/>
+                  </a:schemeClr>
+                </a:solidFill>
+                <a:prstDash val="solid"/>
+                <a:miter lim="800000"/>
+              </a14:hiddenLine>
+            </a:ext>
+          </a:extLst>
+        </p:spPr>
+        <p:style>
+          <a:lnRef idx="2">
+            <a:schemeClr val="accent1">
+              <a:shade val="15000"/>
+            </a:schemeClr>
+          </a:lnRef>
+          <a:fillRef idx="1">
+            <a:schemeClr val="accent1"/>
+          </a:fillRef>
+          <a:effectRef idx="0">
+            <a:schemeClr val="accent1"/>
+          </a:effectRef>
+          <a:fontRef idx="minor">
+            <a:schemeClr val="lt1"/>
+          </a:fontRef>
+        </p:style>
+        <p:txBody>
+          <a:bodyPr rtlCol="0" anchor="ctr"/>
+          <a:lstStyle/>
+          <a:p>
+            <a:pPr algn="ctr"/>
+            <a:endParaRPr lang="de-DE"/>
+          </a:p>
+        </p:txBody>
+      </p:sp>
+      <p:sp>
+        <p:nvSpPr>
+          <p:cNvPr id="3" name="reflection-1">
+            <a:extLst>
+              <a:ext uri="{FF2B5EF4-FFF2-40B4-BE49-F238E27FC236}">
+                <a16:creationId xmlns:a16="http://schemas.microsoft.com/office/drawing/2014/main" id="{02CF4227-1006-560E-FD65-2490AC4269F5}"/>
+              </a:ext>
+            </a:extLst>
+          </p:cNvPr>
+          <p:cNvSpPr/>
+          <p:nvPr/>
+        </p:nvSpPr>
+        <p:spPr>
+          <a:xfrm>
+            <a:off x="3683000" y="508000"/>
+            <a:ext cx="1651000" cy="1270000"/>
+          </a:xfrm>
+          <a:prstGeom prst="rect">
+            <a:avLst/>
+          </a:prstGeom>
+          <a:solidFill>
+            <a:srgbClr val="4472C4"/>
+          </a:solidFill>
+          <a:ln w="19050" cap="flat" cmpd="sng" algn="ctr">
+            <a:noFill/>
+            <a:prstDash val="solid"/>
+            <a:miter lim="800000"/>
+          </a:ln>
+          <a:effectLst>
+            <a:reflection xmlns:a="http://schemas.openxmlformats.org/drawingml/2006/main" stA="50000" endA="300" endPos="90000" dir="5400000" sy="-100000" kx="1200000" algn="bl" rotWithShape="0"/>
+          </a:effectLst>
+          <a:extLst>
+            <a:ext uri="{91240B29-F687-4F45-9708-019B960494DF}">
+              <a14:hiddenLine xmlns:a14="http://schemas.microsoft.com/office/drawing/2010/main" w="19050" cap="flat" cmpd="sng" algn="ctr">
+                <a:solidFill>
+                  <a:schemeClr val="accent1">
+                    <a:shade val="15000"/>
+                  </a:schemeClr>
+                </a:solidFill>
+                <a:prstDash val="solid"/>
+                <a:miter lim="800000"/>
+              </a14:hiddenLine>
+            </a:ext>
+          </a:extLst>
+        </p:spPr>
+        <p:style>
+          <a:lnRef idx="2">
+            <a:schemeClr val="accent1">
+              <a:shade val="15000"/>
+            </a:schemeClr>
+          </a:lnRef>
+          <a:fillRef idx="1">
+            <a:schemeClr val="accent1"/>
+          </a:fillRef>
+          <a:effectRef idx="0">
+            <a:schemeClr val="accent1"/>
+          </a:effectRef>
+          <a:fontRef idx="minor">
+            <a:schemeClr val="lt1"/>
+          </a:fontRef>
+        </p:style>
+        <p:txBody>
+          <a:bodyPr rtlCol="0" anchor="ctr"/>
+          <a:lstStyle/>
+          <a:p>
+            <a:pPr algn="ctr"/>
+            <a:endParaRPr lang="de-DE"/>
+          </a:p>
+        </p:txBody>
+      </p:sp>
+      <p:sp>
+        <p:nvSpPr>
+          <p:cNvPr id="4" name="reflection-2">
+            <a:extLst>
+              <a:ext uri="{FF2B5EF4-FFF2-40B4-BE49-F238E27FC236}">
+                <a16:creationId xmlns:a16="http://schemas.microsoft.com/office/drawing/2014/main" id="{8940EBD1-2DB1-3188-E52C-AC1D32298A11}"/>
+              </a:ext>
+            </a:extLst>
+          </p:cNvPr>
+          <p:cNvSpPr/>
+          <p:nvPr/>
+        </p:nvSpPr>
+        <p:spPr>
+          <a:xfrm>
+            <a:off x="6604000" y="508000"/>
+            <a:ext cx="1651000" cy="1270000"/>
+          </a:xfrm>
+          <a:prstGeom prst="rect">
+            <a:avLst/>
+          </a:prstGeom>
+          <a:solidFill>
+            <a:srgbClr val="4472C4"/>
+          </a:solidFill>
+          <a:ln w="19050" cap="flat" cmpd="sng" algn="ctr">
+            <a:noFill/>
+            <a:prstDash val="solid"/>
+            <a:miter lim="800000"/>
+          </a:ln>
+          <a:effectLst>
+            <a:reflection xmlns:a="http://schemas.openxmlformats.org/drawingml/2006/main" stA="50000" endA="300" endPos="90000" fadeDir="0" dir="5400000" sy="-100000" algn="bl" rotWithShape="0"/>
+          </a:effectLst>
+          <a:extLst>
+            <a:ext uri="{91240B29-F687-4F45-9708-019B960494DF}">
+              <a14:hiddenLine xmlns:a14="http://schemas.microsoft.com/office/drawing/2010/main" w="19050" cap="flat" cmpd="sng" algn="ctr">
+                <a:solidFill>
+                  <a:schemeClr val="accent1">
+                    <a:shade val="15000"/>
+                  </a:schemeClr>
+                </a:solidFill>
+                <a:prstDash val="solid"/>
+                <a:miter lim="800000"/>
+              </a14:hiddenLine>
+            </a:ext>
+          </a:extLst>
+        </p:spPr>
+        <p:style>
+          <a:lnRef idx="2">
+            <a:schemeClr val="accent1">
+              <a:shade val="15000"/>
+            </a:schemeClr>
+          </a:lnRef>
+          <a:fillRef idx="1">
+            <a:schemeClr val="accent1"/>
+          </a:fillRef>
+          <a:effectRef idx="0">
+            <a:schemeClr val="accent1"/>
+          </a:effectRef>
+          <a:fontRef idx="minor">
+            <a:schemeClr val="lt1"/>
+          </a:fontRef>
+        </p:style>
+        <p:txBody>
+          <a:bodyPr rtlCol="0" anchor="ctr"/>
+          <a:lstStyle/>
+          <a:p>
+            <a:pPr algn="ctr"/>
+            <a:endParaRPr lang="de-DE"/>
+          </a:p>
+        </p:txBody>
+      </p:sp>
+      <p:sp>
+        <p:nvSpPr>
+          <p:cNvPr id="5" name="reflection-3">
+            <a:extLst>
+              <a:ext uri="{FF2B5EF4-FFF2-40B4-BE49-F238E27FC236}">
+                <a16:creationId xmlns:a16="http://schemas.microsoft.com/office/drawing/2014/main" id="{D7579C0F-C0B5-CA48-A5F6-E24A971CD957}"/>
+              </a:ext>
+            </a:extLst>
+          </p:cNvPr>
+          <p:cNvSpPr/>
+          <p:nvPr/>
+        </p:nvSpPr>
+        <p:spPr>
+          <a:xfrm>
+            <a:off x="9525000" y="508000"/>
+            <a:ext cx="1651000" cy="1270000"/>
+          </a:xfrm>
+          <a:prstGeom prst="rect">
+            <a:avLst/>
+          </a:prstGeom>
+          <a:solidFill>
+            <a:srgbClr val="4472C4"/>
+          </a:solidFill>
+          <a:ln w="19050" cap="flat" cmpd="sng" algn="ctr">
+            <a:noFill/>
+            <a:prstDash val="solid"/>
+            <a:miter lim="800000"/>
+          </a:ln>
+          <a:effectLst>
+            <a:reflection xmlns:a="http://schemas.openxmlformats.org/drawingml/2006/main" stA="50000" endA="300" endPos="90000" dist="76200" dir="5400000" sy="-60000" ky="600000" algn="bl" rotWithShape="0"/>
+          </a:effectLst>
+          <a:extLst>
+            <a:ext uri="{91240B29-F687-4F45-9708-019B960494DF}">
+              <a14:hiddenLine xmlns:a14="http://schemas.microsoft.com/office/drawing/2010/main" w="19050" cap="flat" cmpd="sng" algn="ctr">
+                <a:solidFill>
+                  <a:schemeClr val="accent1">
+                    <a:shade val="15000"/>
+                  </a:schemeClr>
+                </a:solidFill>
+                <a:prstDash val="solid"/>
+                <a:miter lim="800000"/>
+              </a14:hiddenLine>
+            </a:ext>
+          </a:extLst>
+        </p:spPr>
+        <p:style>
+          <a:lnRef idx="2">
+            <a:schemeClr val="accent1">
+              <a:shade val="15000"/>
+            </a:schemeClr>
+          </a:lnRef>
+          <a:fillRef idx="1">
+            <a:schemeClr val="accent1"/>
+          </a:fillRef>
+          <a:effectRef idx="0">
+            <a:schemeClr val="accent1"/>
+          </a:effectRef>
+          <a:fontRef idx="minor">
+            <a:schemeClr val="lt1"/>
+          </a:fontRef>
+        </p:style>
+        <p:txBody>
+          <a:bodyPr rtlCol="0" anchor="ctr"/>
+          <a:lstStyle/>
+          <a:p>
+            <a:pPr algn="ctr"/>
+            <a:endParaRPr lang="de-DE"/>
+          </a:p>
+        </p:txBody>
+      </p:sp>
+      <p:sp>
+        <p:nvSpPr>
+          <p:cNvPr id="6" name="reflection-4">
+            <a:extLst>
+              <a:ext uri="{FF2B5EF4-FFF2-40B4-BE49-F238E27FC236}">
+                <a16:creationId xmlns:a16="http://schemas.microsoft.com/office/drawing/2014/main" id="{C9670B48-0621-2E9A-5705-92F25272692F}"/>
+              </a:ext>
+            </a:extLst>
+          </p:cNvPr>
+          <p:cNvSpPr/>
+          <p:nvPr/>
+        </p:nvSpPr>
+        <p:spPr>
+          <a:xfrm rot="1800000">
+            <a:off x="762000" y="3810000"/>
+            <a:ext cx="1651000" cy="1270000"/>
+          </a:xfrm>
+          <a:prstGeom prst="rect">
+            <a:avLst/>
+          </a:prstGeom>
+          <a:solidFill>
+            <a:srgbClr val="4472C4"/>
+          </a:solidFill>
+          <a:ln w="19050" cap="flat" cmpd="sng" algn="ctr">
+            <a:noFill/>
+            <a:prstDash val="solid"/>
+            <a:miter lim="800000"/>
+          </a:ln>
+          <a:effectLst>
+            <a:reflection xmlns:a="http://schemas.openxmlformats.org/drawingml/2006/main" stA="50000" endA="300" endPos="90000" dir="5400000" sy="-100000" algn="bl" rotWithShape="0"/>
+          </a:effectLst>
+          <a:extLst>
+            <a:ext uri="{91240B29-F687-4F45-9708-019B960494DF}">
+              <a14:hiddenLine xmlns:a14="http://schemas.microsoft.com/office/drawing/2010/main" w="19050" cap="flat" cmpd="sng" algn="ctr">
+                <a:solidFill>
+                  <a:schemeClr val="accent1">
+                    <a:shade val="15000"/>
+                  </a:schemeClr>
+                </a:solidFill>
+                <a:prstDash val="solid"/>
+                <a:miter lim="800000"/>
+              </a14:hiddenLine>
+            </a:ext>
+          </a:extLst>
+        </p:spPr>
+        <p:style>
+          <a:lnRef idx="2">
+            <a:schemeClr val="accent1">
+              <a:shade val="15000"/>
+            </a:schemeClr>
+          </a:lnRef>
+          <a:fillRef idx="1">
+            <a:schemeClr val="accent1"/>
+          </a:fillRef>
+          <a:effectRef idx="0">
+            <a:schemeClr val="accent1"/>
+          </a:effectRef>
+          <a:fontRef idx="minor">
+            <a:schemeClr val="lt1"/>
+          </a:fontRef>
+        </p:style>
+        <p:txBody>
+          <a:bodyPr rtlCol="0" anchor="ctr"/>
+          <a:lstStyle/>
+          <a:p>
+            <a:pPr algn="ctr"/>
+            <a:endParaRPr lang="de-DE"/>
+          </a:p>
+        </p:txBody>
+      </p:sp>
+      <p:sp>
+        <p:nvSpPr>
+          <p:cNvPr id="7" name="reflection-5">
+            <a:extLst>
+              <a:ext uri="{FF2B5EF4-FFF2-40B4-BE49-F238E27FC236}">
+                <a16:creationId xmlns:a16="http://schemas.microsoft.com/office/drawing/2014/main" id="{23C1C228-FB5E-337C-A0DD-90812D1D7CC1}"/>
+              </a:ext>
+            </a:extLst>
+          </p:cNvPr>
+          <p:cNvSpPr/>
+          <p:nvPr/>
+        </p:nvSpPr>
+        <p:spPr>
+          <a:xfrm rot="1800000">
+            <a:off x="3683000" y="3810000"/>
+            <a:ext cx="1651000" cy="1270000"/>
+          </a:xfrm>
+          <a:prstGeom prst="rect">
+            <a:avLst/>
+          </a:prstGeom>
+          <a:solidFill>
+            <a:srgbClr val="4472C4"/>
+          </a:solidFill>
+          <a:ln w="19050" cap="flat" cmpd="sng" algn="ctr">
+            <a:noFill/>
+            <a:prstDash val="solid"/>
+            <a:miter lim="800000"/>
+          </a:ln>
+          <a:effectLst>
+            <a:reflection xmlns:a="http://schemas.openxmlformats.org/drawingml/2006/main" stA="50000" endA="300" endPos="90000" dir="5400000" sy="-100000" algn="bl" rotWithShape="1"/>
+          </a:effectLst>
+          <a:extLst>
+            <a:ext uri="{91240B29-F687-4F45-9708-019B960494DF}">
+              <a14:hiddenLine xmlns:a14="http://schemas.microsoft.com/office/drawing/2010/main" w="19050" cap="flat" cmpd="sng" algn="ctr">
+                <a:solidFill>
+                  <a:schemeClr val="accent1">
+                    <a:shade val="15000"/>
+                  </a:schemeClr>
+                </a:solidFill>
+                <a:prstDash val="solid"/>
+                <a:miter lim="800000"/>
+              </a14:hiddenLine>
+            </a:ext>
+          </a:extLst>
+        </p:spPr>
+        <p:style>
+          <a:lnRef idx="2">
+            <a:schemeClr val="accent1">
+              <a:shade val="15000"/>
+            </a:schemeClr>
+          </a:lnRef>
+          <a:fillRef idx="1">
+            <a:schemeClr val="accent1"/>
+          </a:fillRef>
+          <a:effectRef idx="0">
+            <a:schemeClr val="accent1"/>
+          </a:effectRef>
+          <a:fontRef idx="minor">
+            <a:schemeClr val="lt1"/>
+          </a:fontRef>
+        </p:style>
+        <p:txBody>
+          <a:bodyPr rtlCol="0" anchor="ctr"/>
+          <a:lstStyle/>
+          <a:p>
+            <a:pPr algn="ctr"/>
+            <a:endParaRPr lang="de-DE"/>
+          </a:p>
+        </p:txBody>
+      </p:sp>
+      <p:sp>
+        <p:nvSpPr>
+          <p:cNvPr id="8" name="reflection-6">
+            <a:extLst>
+              <a:ext uri="{FF2B5EF4-FFF2-40B4-BE49-F238E27FC236}">
+                <a16:creationId xmlns:a16="http://schemas.microsoft.com/office/drawing/2014/main" id="{F03DA3E9-19EA-7407-28F1-FB22DB6AC076}"/>
+              </a:ext>
+            </a:extLst>
+          </p:cNvPr>
+          <p:cNvSpPr/>
+          <p:nvPr/>
+        </p:nvSpPr>
+        <p:spPr>
+          <a:xfrm>
+            <a:off x="6604000" y="3810000"/>
+            <a:ext cx="1651000" cy="1270000"/>
+          </a:xfrm>
+          <a:prstGeom prst="rect">
+            <a:avLst/>
+          </a:prstGeom>
+          <a:solidFill>
+            <a:srgbClr val="4472C4"/>
+          </a:solidFill>
+          <a:ln w="19050" cap="flat" cmpd="sng" algn="ctr">
+            <a:noFill/>
+            <a:prstDash val="solid"/>
+            <a:miter lim="800000"/>
+          </a:ln>
+          <a:effectLst>
+            <a:reflection xmlns:a="http://schemas.openxmlformats.org/drawingml/2006/main" stA="50000" endA="300" endPos="90000" fadeDir="2700000" dir="5400000" sy="-100000" algn="bl" rotWithShape="0"/>
+          </a:effectLst>
+          <a:extLst>
+            <a:ext uri="{91240B29-F687-4F45-9708-019B960494DF}">
+              <a14:hiddenLine xmlns:a14="http://schemas.microsoft.com/office/drawing/2010/main" w="19050" cap="flat" cmpd="sng" algn="ctr">
+                <a:solidFill>
+                  <a:schemeClr val="accent1">
+                    <a:shade val="15000"/>
+                  </a:schemeClr>
+                </a:solidFill>
+                <a:prstDash val="solid"/>
+                <a:miter lim="800000"/>
+              </a14:hiddenLine>
+            </a:ext>
+          </a:extLst>
+        </p:spPr>
+        <p:style>
+          <a:lnRef idx="2">
+            <a:schemeClr val="accent1">
+              <a:shade val="15000"/>
+            </a:schemeClr>
+          </a:lnRef>
+          <a:fillRef idx="1">
+            <a:schemeClr val="accent1"/>
+          </a:fillRef>
+          <a:effectRef idx="0">
+            <a:schemeClr val="accent1"/>
+          </a:effectRef>
+          <a:fontRef idx="minor">
+            <a:schemeClr val="lt1"/>
+          </a:fontRef>
+        </p:style>
+        <p:txBody>
+          <a:bodyPr rtlCol="0" anchor="ctr"/>
+          <a:lstStyle/>
+          <a:p>
+            <a:pPr algn="ctr"/>
+            <a:endParaRPr lang="de-DE"/>
+          </a:p>
+        </p:txBody>
+      </p:sp>
+      <p:sp>
+        <p:nvSpPr>
+          <p:cNvPr id="9" name="reflection-7">
+            <a:extLst>
+              <a:ext uri="{FF2B5EF4-FFF2-40B4-BE49-F238E27FC236}">
+                <a16:creationId xmlns:a16="http://schemas.microsoft.com/office/drawing/2014/main" id="{118CB979-2747-7EE3-3DF0-C48DA21C9C93}"/>
+              </a:ext>
+            </a:extLst>
+          </p:cNvPr>
+          <p:cNvSpPr/>
+          <p:nvPr/>
+        </p:nvSpPr>
+        <p:spPr>
+          <a:xfrm>
+            <a:off x="9525000" y="3810000"/>
+            <a:ext cx="1651000" cy="1270000"/>
+          </a:xfrm>
+          <a:prstGeom prst="rect">
+            <a:avLst/>
+          </a:prstGeom>
+          <a:solidFill>
+            <a:srgbClr val="4472C4"/>
+          </a:solidFill>
+          <a:ln w="19050" cap="flat" cmpd="sng" algn="ctr">
+            <a:noFill/>
+            <a:prstDash val="solid"/>
+            <a:miter lim="800000"/>
+          </a:ln>
+          <a:effectLst>
+            <a:reflection xmlns:a="http://schemas.openxmlformats.org/drawingml/2006/main" stA="80000" endA="0" stPos="20000" endPos="60000" dir="0" sx="-100000" algn="r" rotWithShape="0"/>
+          </a:effectLst>
+          <a:extLst>
+            <a:ext uri="{91240B29-F687-4F45-9708-019B960494DF}">
+              <a14:hiddenLine xmlns:a14="http://schemas.microsoft.com/office/drawing/2010/main" w="19050" cap="flat" cmpd="sng" algn="ctr">
+                <a:solidFill>
+                  <a:schemeClr val="accent1">
+                    <a:shade val="15000"/>
+                  </a:schemeClr>
+                </a:solidFill>
+                <a:prstDash val="solid"/>
+                <a:miter lim="800000"/>
+              </a14:hiddenLine>
+            </a:ext>
+          </a:extLst>
+        </p:spPr>
+        <p:style>
+          <a:lnRef idx="2">
+            <a:schemeClr val="accent1">
+              <a:shade val="15000"/>
+            </a:schemeClr>
+          </a:lnRef>
+          <a:fillRef idx="1">
+            <a:schemeClr val="accent1"/>
+          </a:fillRef>
+          <a:effectRef idx="0">
+            <a:schemeClr val="accent1"/>
+          </a:effectRef>
+          <a:fontRef idx="minor">
+            <a:schemeClr val="lt1"/>
+          </a:fontRef>
+        </p:style>
+        <p:txBody>
+          <a:bodyPr rtlCol="0" anchor="ctr"/>
+          <a:lstStyle/>
+          <a:p>
+            <a:pPr algn="ctr"/>
+            <a:endParaRPr lang="de-DE"/>
+          </a:p>
+        </p:txBody>
+      </p:sp>
+    </p:spTree>
+    <p:extLst>
+      <p:ext uri="{BB962C8B-B14F-4D97-AF65-F5344CB8AC3E}">
+        <p14:creationId xmlns:p14="http://schemas.microsoft.com/office/powerpoint/2010/main" val="2217486653"/>
       </p:ext>
     </p:extLst>
   </p:cSld>
